--- a/TTK_Executive_Briefing.pptx
+++ b/TTK_Executive_Briefing.pptx
@@ -15,9 +15,10 @@
     <p:sldId id="263" r:id="rId9"/>
     <p:sldId id="264" r:id="rId10"/>
     <p:sldId id="265" r:id="rId11"/>
+    <p:sldId id="266" r:id="rId12"/>
   </p:sldIdLst>
   <p:notesMasterIdLst>
-    <p:notesMasterId r:id="rId12"/>
+    <p:notesMasterId r:id="rId13"/>
   </p:notesMasterIdLst>
   <p:sldSz cx="9144000" cy="5143500"/>
   <p:notesSz cx="5143500" cy="9144000"/>
@@ -641,6 +642,94 @@
 </p:notes>
 </file>
 
+<file path=ppt/notesSlides/notesSlide11.xml><?xml version="1.0" encoding="utf-8"?>
+<p:notes xmlns:a="http://schemas.openxmlformats.org/drawingml/2006/main" xmlns:r="http://schemas.openxmlformats.org/officeDocument/2006/relationships" xmlns:p="http://schemas.openxmlformats.org/presentationml/2006/main">
+  <p:cSld>
+    <p:spTree>
+      <p:nvGrpSpPr>
+        <p:cNvPr id="1" name=""/>
+        <p:cNvGrpSpPr/>
+        <p:nvPr/>
+      </p:nvGrpSpPr>
+      <p:grpSpPr>
+        <a:xfrm>
+          <a:off x="0" y="0"/>
+          <a:ext cx="0" cy="0"/>
+          <a:chOff x="0" y="0"/>
+          <a:chExt cx="0" cy="0"/>
+        </a:xfrm>
+      </p:grpSpPr>
+      <p:sp>
+        <p:nvSpPr>
+          <p:cNvPr id="2" name="Slide Image Placeholder 1"/>
+          <p:cNvSpPr>
+            <a:spLocks noGrp="1" noRot="1" noChangeAspect="1"/>
+          </p:cNvSpPr>
+          <p:nvPr>
+            <p:ph type="sldImg"/>
+          </p:nvPr>
+        </p:nvSpPr>
+        <p:spPr/>
+      </p:sp>
+      <p:sp>
+        <p:nvSpPr>
+          <p:cNvPr id="3" name="Notes Placeholder 2"/>
+          <p:cNvSpPr>
+            <a:spLocks noGrp="1"/>
+          </p:cNvSpPr>
+          <p:nvPr>
+            <p:ph type="body" idx="1"/>
+          </p:nvPr>
+        </p:nvSpPr>
+        <p:spPr/>
+        <p:txBody>
+          <a:bodyPr/>
+          <a:lstStyle/>
+          <a:p>
+            <a:r>
+              <a:rPr lang="en-US" dirty="0"/>
+              <a:t/>
+            </a:r>
+            <a:endParaRPr lang="en-US" dirty="0"/>
+          </a:p>
+        </p:txBody>
+      </p:sp>
+      <p:sp>
+        <p:nvSpPr>
+          <p:cNvPr id="4" name="Slide Number Placeholder 3"/>
+          <p:cNvSpPr>
+            <a:spLocks noGrp="1"/>
+          </p:cNvSpPr>
+          <p:nvPr>
+            <p:ph type="sldNum" sz="quarter" idx="10"/>
+          </p:nvPr>
+        </p:nvSpPr>
+        <p:spPr/>
+        <p:txBody>
+          <a:bodyPr/>
+          <a:lstStyle/>
+          <a:p>
+            <a:fld id="{F7021451-1387-4CA6-816F-3879F97B5CBC}" type="slidenum">
+              <a:rPr lang="en-US"/>
+              <a:t>11</a:t>
+            </a:fld>
+            <a:endParaRPr lang="en-US"/>
+          </a:p>
+        </p:txBody>
+      </p:sp>
+    </p:spTree>
+    <p:extLst>
+      <p:ext uri="{BB962C8B-B14F-4D97-AF65-F5344CB8AC3E}">
+        <p14:creationId xmlns:p14="http://schemas.microsoft.com/office/powerpoint/2010/main" val="1024086991"/>
+      </p:ext>
+    </p:extLst>
+  </p:cSld>
+  <p:clrMapOvr>
+    <a:masterClrMapping/>
+  </p:clrMapOvr>
+</p:notes>
+</file>
+
 <file path=ppt/notesSlides/notesSlide2.xml><?xml version="1.0" encoding="utf-8"?>
 <p:notes xmlns:a="http://schemas.openxmlformats.org/drawingml/2006/main" xmlns:r="http://schemas.openxmlformats.org/officeDocument/2006/relationships" xmlns:p="http://schemas.openxmlformats.org/presentationml/2006/main">
   <p:cSld>
@@ -1994,6 +2083,1055 @@
     <p:bg>
       <p:bgPr>
         <a:solidFill>
+          <a:srgbClr val="F4F5FB"/>
+        </a:solidFill>
+      </p:bgPr>
+    </p:bg>
+    <p:spTree>
+      <p:nvGrpSpPr>
+        <p:cNvPr id="1" name=""/>
+        <p:cNvGrpSpPr/>
+        <p:nvPr/>
+      </p:nvGrpSpPr>
+      <p:grpSpPr>
+        <a:xfrm>
+          <a:off x="0" y="0"/>
+          <a:ext cx="0" cy="0"/>
+          <a:chOff x="0" y="0"/>
+          <a:chExt cx="0" cy="0"/>
+        </a:xfrm>
+      </p:grpSpPr>
+      <p:sp>
+        <p:nvSpPr>
+          <p:cNvPr id="2" name="Shape 0"/>
+          <p:cNvSpPr/>
+          <p:nvPr/>
+        </p:nvSpPr>
+        <p:spPr>
+          <a:xfrm>
+            <a:off x="0" y="0"/>
+            <a:ext cx="9144000" cy="777240"/>
+          </a:xfrm>
+          <a:prstGeom prst="rect">
+            <a:avLst/>
+          </a:prstGeom>
+          <a:solidFill>
+            <a:srgbClr val="0D1B4B"/>
+          </a:solidFill>
+          <a:ln w="12700">
+            <a:solidFill>
+              <a:srgbClr val="0D1B4B"/>
+            </a:solidFill>
+            <a:prstDash val="solid"/>
+          </a:ln>
+        </p:spPr>
+      </p:sp>
+      <p:sp>
+        <p:nvSpPr>
+          <p:cNvPr id="3" name="Text 1"/>
+          <p:cNvSpPr/>
+          <p:nvPr/>
+        </p:nvSpPr>
+        <p:spPr>
+          <a:xfrm>
+            <a:off x="365760" y="0"/>
+            <a:ext cx="8412480" cy="777240"/>
+          </a:xfrm>
+          <a:prstGeom prst="rect">
+            <a:avLst/>
+          </a:prstGeom>
+          <a:noFill/>
+          <a:ln/>
+        </p:spPr>
+        <p:txBody>
+          <a:bodyPr wrap="square" lIns="0" tIns="0" rIns="0" bIns="0" rtlCol="0" anchor="ctr"/>
+          <a:lstStyle/>
+          <a:p>
+            <a:pPr indent="0" marL="0">
+              <a:buNone/>
+            </a:pPr>
+            <a:r>
+              <a:rPr lang="en-US" sz="2200" b="1" dirty="0">
+                <a:solidFill>
+                  <a:srgbClr val="FFFFFF"/>
+                </a:solidFill>
+                <a:latin typeface="Georgia" pitchFamily="34" charset="0"/>
+                <a:ea typeface="Georgia" pitchFamily="34" charset="-122"/>
+                <a:cs typeface="Georgia" pitchFamily="34" charset="-120"/>
+              </a:rPr>
+              <a:t>Deployment &amp; Access</a:t>
+            </a:r>
+            <a:endParaRPr lang="en-US" sz="2200" dirty="0"/>
+          </a:p>
+        </p:txBody>
+      </p:sp>
+      <p:sp>
+        <p:nvSpPr>
+          <p:cNvPr id="4" name="Shape 2"/>
+          <p:cNvSpPr/>
+          <p:nvPr/>
+        </p:nvSpPr>
+        <p:spPr>
+          <a:xfrm>
+            <a:off x="274320" y="914400"/>
+            <a:ext cx="2788920" cy="3611880"/>
+          </a:xfrm>
+          <a:prstGeom prst="rect">
+            <a:avLst/>
+          </a:prstGeom>
+          <a:solidFill>
+            <a:srgbClr val="FFFFFF"/>
+          </a:solidFill>
+          <a:ln w="12700">
+            <a:solidFill>
+              <a:srgbClr val="E0E3F0"/>
+            </a:solidFill>
+            <a:prstDash val="solid"/>
+          </a:ln>
+          <a:effectLst>
+            <a:outerShdw sx="100000" sy="100000" kx="0" ky="0" algn="bl" rotWithShape="0" blurRad="101600" dist="38100" dir="8100000">
+              <a:srgbClr val="000000">
+                <a:alpha val="12000"/>
+              </a:srgbClr>
+            </a:outerShdw>
+          </a:effectLst>
+        </p:spPr>
+      </p:sp>
+      <p:sp>
+        <p:nvSpPr>
+          <p:cNvPr id="5" name="Shape 3"/>
+          <p:cNvSpPr/>
+          <p:nvPr/>
+        </p:nvSpPr>
+        <p:spPr>
+          <a:xfrm>
+            <a:off x="274320" y="914400"/>
+            <a:ext cx="2788920" cy="438912"/>
+          </a:xfrm>
+          <a:prstGeom prst="rect">
+            <a:avLst/>
+          </a:prstGeom>
+          <a:solidFill>
+            <a:srgbClr val="0D1B4B"/>
+          </a:solidFill>
+          <a:ln w="12700">
+            <a:solidFill>
+              <a:srgbClr val="0D1B4B"/>
+            </a:solidFill>
+            <a:prstDash val="solid"/>
+          </a:ln>
+        </p:spPr>
+      </p:sp>
+      <p:sp>
+        <p:nvSpPr>
+          <p:cNvPr id="6" name="Text 4"/>
+          <p:cNvSpPr/>
+          <p:nvPr/>
+        </p:nvSpPr>
+        <p:spPr>
+          <a:xfrm>
+            <a:off x="274320" y="914400"/>
+            <a:ext cx="2788920" cy="438912"/>
+          </a:xfrm>
+          <a:prstGeom prst="rect">
+            <a:avLst/>
+          </a:prstGeom>
+          <a:noFill/>
+          <a:ln/>
+        </p:spPr>
+        <p:txBody>
+          <a:bodyPr wrap="square" lIns="0" tIns="0" rIns="0" bIns="0" rtlCol="0" anchor="ctr"/>
+          <a:lstStyle/>
+          <a:p>
+            <a:pPr algn="ctr" indent="0" marL="0">
+              <a:buNone/>
+            </a:pPr>
+            <a:r>
+              <a:rPr lang="en-US" sz="1100" b="1" spc="150" kern="0" dirty="0">
+                <a:solidFill>
+                  <a:srgbClr val="FFFFFF"/>
+                </a:solidFill>
+                <a:latin typeface="Calibri" pitchFamily="34" charset="0"/>
+                <a:ea typeface="Calibri" pitchFamily="34" charset="-122"/>
+                <a:cs typeface="Calibri" pitchFamily="34" charset="-120"/>
+              </a:rPr>
+              <a:t>LOCAL</a:t>
+            </a:r>
+            <a:endParaRPr lang="en-US" sz="1100" dirty="0"/>
+          </a:p>
+        </p:txBody>
+      </p:sp>
+      <p:sp>
+        <p:nvSpPr>
+          <p:cNvPr id="7" name="Shape 5"/>
+          <p:cNvSpPr/>
+          <p:nvPr/>
+        </p:nvSpPr>
+        <p:spPr>
+          <a:xfrm>
+            <a:off x="411480" y="1481328"/>
+            <a:ext cx="2514600" cy="402336"/>
+          </a:xfrm>
+          <a:prstGeom prst="rect">
+            <a:avLst/>
+          </a:prstGeom>
+          <a:solidFill>
+            <a:srgbClr val="E8EAF6"/>
+          </a:solidFill>
+          <a:ln w="12700">
+            <a:solidFill>
+              <a:srgbClr val="E8EAF6"/>
+            </a:solidFill>
+            <a:prstDash val="solid"/>
+          </a:ln>
+        </p:spPr>
+      </p:sp>
+      <p:sp>
+        <p:nvSpPr>
+          <p:cNvPr id="8" name="Text 6"/>
+          <p:cNvSpPr/>
+          <p:nvPr/>
+        </p:nvSpPr>
+        <p:spPr>
+          <a:xfrm>
+            <a:off x="411480" y="1481328"/>
+            <a:ext cx="2514600" cy="402336"/>
+          </a:xfrm>
+          <a:prstGeom prst="rect">
+            <a:avLst/>
+          </a:prstGeom>
+          <a:noFill/>
+          <a:ln/>
+        </p:spPr>
+        <p:txBody>
+          <a:bodyPr wrap="square" lIns="0" tIns="0" rIns="0" bIns="0" rtlCol="0" anchor="ctr"/>
+          <a:lstStyle/>
+          <a:p>
+            <a:pPr algn="ctr" indent="0" marL="0">
+              <a:buNone/>
+            </a:pPr>
+            <a:r>
+              <a:rPr lang="en-US" sz="1200" b="1" dirty="0">
+                <a:solidFill>
+                  <a:srgbClr val="0D1B4B"/>
+                </a:solidFill>
+                <a:latin typeface="Consolas" pitchFamily="34" charset="0"/>
+                <a:ea typeface="Consolas" pitchFamily="34" charset="-122"/>
+                <a:cs typeface="Consolas" pitchFamily="34" charset="-120"/>
+              </a:rPr>
+              <a:t>localhost:8000</a:t>
+            </a:r>
+            <a:endParaRPr lang="en-US" sz="1200" dirty="0"/>
+          </a:p>
+        </p:txBody>
+      </p:sp>
+      <p:sp>
+        <p:nvSpPr>
+          <p:cNvPr id="9" name="Text 7"/>
+          <p:cNvSpPr/>
+          <p:nvPr/>
+        </p:nvSpPr>
+        <p:spPr>
+          <a:xfrm>
+            <a:off x="457200" y="2011680"/>
+            <a:ext cx="2423160" cy="2331720"/>
+          </a:xfrm>
+          <a:prstGeom prst="rect">
+            <a:avLst/>
+          </a:prstGeom>
+          <a:noFill/>
+          <a:ln/>
+        </p:spPr>
+        <p:txBody>
+          <a:bodyPr wrap="square" rtlCol="0" anchor="t"/>
+          <a:lstStyle/>
+          <a:p>
+            <a:pPr marL="342900" indent="-342900">
+              <a:lnSpc>
+                <a:spcPct val="140000"/>
+              </a:lnSpc>
+              <a:buSzPct val="100000"/>
+              <a:buChar char="•"/>
+            </a:pPr>
+            <a:r>
+              <a:rPr lang="en-US" sz="1100" dirty="0">
+                <a:solidFill>
+                  <a:srgbClr val="1C1E2E"/>
+                </a:solidFill>
+                <a:latin typeface="Calibri" pitchFamily="34" charset="0"/>
+                <a:ea typeface="Calibri" pitchFamily="34" charset="-122"/>
+                <a:cs typeface="Calibri" pitchFamily="34" charset="-120"/>
+              </a:rPr>
+              <a:t>uvicorn app:app --reload --port 8000</a:t>
+            </a:r>
+            <a:endParaRPr lang="en-US" sz="1100" dirty="0"/>
+          </a:p>
+          <a:p>
+            <a:pPr marL="342900" indent="-342900">
+              <a:lnSpc>
+                <a:spcPct val="140000"/>
+              </a:lnSpc>
+              <a:buSzPct val="100000"/>
+              <a:buChar char="•"/>
+            </a:pPr>
+            <a:r>
+              <a:rPr lang="en-US" sz="1100" dirty="0">
+                <a:solidFill>
+                  <a:srgbClr val="1C1E2E"/>
+                </a:solidFill>
+                <a:latin typeface="Calibri" pitchFamily="34" charset="0"/>
+                <a:ea typeface="Calibri" pitchFamily="34" charset="-122"/>
+                <a:cs typeface="Calibri" pitchFamily="34" charset="-120"/>
+              </a:rPr>
+              <a:t>Engineer view: /</a:t>
+            </a:r>
+            <a:endParaRPr lang="en-US" sz="1100" dirty="0"/>
+          </a:p>
+          <a:p>
+            <a:pPr marL="342900" indent="-342900">
+              <a:lnSpc>
+                <a:spcPct val="140000"/>
+              </a:lnSpc>
+              <a:buSzPct val="100000"/>
+              <a:buChar char="•"/>
+            </a:pPr>
+            <a:r>
+              <a:rPr lang="en-US" sz="1100" dirty="0">
+                <a:solidFill>
+                  <a:srgbClr val="1C1E2E"/>
+                </a:solidFill>
+                <a:latin typeface="Calibri" pitchFamily="34" charset="0"/>
+                <a:ea typeface="Calibri" pitchFamily="34" charset="-122"/>
+                <a:cs typeface="Calibri" pitchFamily="34" charset="-120"/>
+              </a:rPr>
+              <a:t>Admin dashboard: /admin</a:t>
+            </a:r>
+            <a:endParaRPr lang="en-US" sz="1100" dirty="0"/>
+          </a:p>
+          <a:p>
+            <a:pPr marL="342900" indent="-342900">
+              <a:lnSpc>
+                <a:spcPct val="140000"/>
+              </a:lnSpc>
+              <a:buSzPct val="100000"/>
+              <a:buChar char="•"/>
+            </a:pPr>
+            <a:r>
+              <a:rPr lang="en-US" sz="1100" dirty="0">
+                <a:solidFill>
+                  <a:srgbClr val="1C1E2E"/>
+                </a:solidFill>
+                <a:latin typeface="Calibri" pitchFamily="34" charset="0"/>
+                <a:ea typeface="Calibri" pitchFamily="34" charset="-122"/>
+                <a:cs typeface="Calibri" pitchFamily="34" charset="-120"/>
+              </a:rPr>
+              <a:t>SQLite DB: ttk_output/ttk_knowledge.db</a:t>
+            </a:r>
+            <a:endParaRPr lang="en-US" sz="1100" dirty="0"/>
+          </a:p>
+          <a:p>
+            <a:pPr indent="0" marL="0">
+              <a:lnSpc>
+                <a:spcPct val="140000"/>
+              </a:lnSpc>
+              <a:buNone/>
+            </a:pPr>
+            <a:endParaRPr lang="en-US" sz="1100" dirty="0"/>
+          </a:p>
+        </p:txBody>
+      </p:sp>
+      <p:sp>
+        <p:nvSpPr>
+          <p:cNvPr id="10" name="Shape 8"/>
+          <p:cNvSpPr/>
+          <p:nvPr/>
+        </p:nvSpPr>
+        <p:spPr>
+          <a:xfrm>
+            <a:off x="3200400" y="914400"/>
+            <a:ext cx="2788920" cy="3611880"/>
+          </a:xfrm>
+          <a:prstGeom prst="rect">
+            <a:avLst/>
+          </a:prstGeom>
+          <a:solidFill>
+            <a:srgbClr val="FFFFFF"/>
+          </a:solidFill>
+          <a:ln w="12700">
+            <a:solidFill>
+              <a:srgbClr val="E0E3F0"/>
+            </a:solidFill>
+            <a:prstDash val="solid"/>
+          </a:ln>
+          <a:effectLst>
+            <a:outerShdw sx="100000" sy="100000" kx="0" ky="0" algn="bl" rotWithShape="0" blurRad="101600" dist="38100" dir="8100000">
+              <a:srgbClr val="000000">
+                <a:alpha val="12000"/>
+              </a:srgbClr>
+            </a:outerShdw>
+          </a:effectLst>
+        </p:spPr>
+      </p:sp>
+      <p:sp>
+        <p:nvSpPr>
+          <p:cNvPr id="11" name="Shape 9"/>
+          <p:cNvSpPr/>
+          <p:nvPr/>
+        </p:nvSpPr>
+        <p:spPr>
+          <a:xfrm>
+            <a:off x="3200400" y="914400"/>
+            <a:ext cx="2788920" cy="438912"/>
+          </a:xfrm>
+          <a:prstGeom prst="rect">
+            <a:avLst/>
+          </a:prstGeom>
+          <a:solidFill>
+            <a:srgbClr val="3949AB"/>
+          </a:solidFill>
+          <a:ln w="12700">
+            <a:solidFill>
+              <a:srgbClr val="3949AB"/>
+            </a:solidFill>
+            <a:prstDash val="solid"/>
+          </a:ln>
+        </p:spPr>
+      </p:sp>
+      <p:sp>
+        <p:nvSpPr>
+          <p:cNvPr id="12" name="Text 10"/>
+          <p:cNvSpPr/>
+          <p:nvPr/>
+        </p:nvSpPr>
+        <p:spPr>
+          <a:xfrm>
+            <a:off x="3200400" y="914400"/>
+            <a:ext cx="2788920" cy="438912"/>
+          </a:xfrm>
+          <a:prstGeom prst="rect">
+            <a:avLst/>
+          </a:prstGeom>
+          <a:noFill/>
+          <a:ln/>
+        </p:spPr>
+        <p:txBody>
+          <a:bodyPr wrap="square" lIns="0" tIns="0" rIns="0" bIns="0" rtlCol="0" anchor="ctr"/>
+          <a:lstStyle/>
+          <a:p>
+            <a:pPr algn="ctr" indent="0" marL="0">
+              <a:buNone/>
+            </a:pPr>
+            <a:r>
+              <a:rPr lang="en-US" sz="1100" b="1" spc="150" kern="0" dirty="0">
+                <a:solidFill>
+                  <a:srgbClr val="FFFFFF"/>
+                </a:solidFill>
+                <a:latin typeface="Calibri" pitchFamily="34" charset="0"/>
+                <a:ea typeface="Calibri" pitchFamily="34" charset="-122"/>
+                <a:cs typeface="Calibri" pitchFamily="34" charset="-120"/>
+              </a:rPr>
+              <a:t>PUBLIC</a:t>
+            </a:r>
+            <a:endParaRPr lang="en-US" sz="1100" dirty="0"/>
+          </a:p>
+        </p:txBody>
+      </p:sp>
+      <p:sp>
+        <p:nvSpPr>
+          <p:cNvPr id="13" name="Shape 11"/>
+          <p:cNvSpPr/>
+          <p:nvPr/>
+        </p:nvSpPr>
+        <p:spPr>
+          <a:xfrm>
+            <a:off x="3337560" y="1481328"/>
+            <a:ext cx="2514600" cy="402336"/>
+          </a:xfrm>
+          <a:prstGeom prst="rect">
+            <a:avLst/>
+          </a:prstGeom>
+          <a:solidFill>
+            <a:srgbClr val="E8EAF6"/>
+          </a:solidFill>
+          <a:ln w="12700">
+            <a:solidFill>
+              <a:srgbClr val="E8EAF6"/>
+            </a:solidFill>
+            <a:prstDash val="solid"/>
+          </a:ln>
+        </p:spPr>
+      </p:sp>
+      <p:sp>
+        <p:nvSpPr>
+          <p:cNvPr id="14" name="Text 12"/>
+          <p:cNvSpPr/>
+          <p:nvPr/>
+        </p:nvSpPr>
+        <p:spPr>
+          <a:xfrm>
+            <a:off x="3337560" y="1481328"/>
+            <a:ext cx="2514600" cy="402336"/>
+          </a:xfrm>
+          <a:prstGeom prst="rect">
+            <a:avLst/>
+          </a:prstGeom>
+          <a:noFill/>
+          <a:ln/>
+        </p:spPr>
+        <p:txBody>
+          <a:bodyPr wrap="square" lIns="0" tIns="0" rIns="0" bIns="0" rtlCol="0" anchor="ctr"/>
+          <a:lstStyle/>
+          <a:p>
+            <a:pPr algn="ctr" indent="0" marL="0">
+              <a:buNone/>
+            </a:pPr>
+            <a:r>
+              <a:rPr lang="en-US" sz="1200" b="1" dirty="0">
+                <a:solidFill>
+                  <a:srgbClr val="3949AB"/>
+                </a:solidFill>
+                <a:latin typeface="Consolas" pitchFamily="34" charset="0"/>
+                <a:ea typeface="Consolas" pitchFamily="34" charset="-122"/>
+                <a:cs typeface="Consolas" pitchFamily="34" charset="-120"/>
+              </a:rPr>
+              <a:t>knowledge.ngrok-free.app</a:t>
+            </a:r>
+            <a:endParaRPr lang="en-US" sz="1200" dirty="0"/>
+          </a:p>
+        </p:txBody>
+      </p:sp>
+      <p:sp>
+        <p:nvSpPr>
+          <p:cNvPr id="15" name="Text 13"/>
+          <p:cNvSpPr/>
+          <p:nvPr/>
+        </p:nvSpPr>
+        <p:spPr>
+          <a:xfrm>
+            <a:off x="3383280" y="2011680"/>
+            <a:ext cx="2423160" cy="2331720"/>
+          </a:xfrm>
+          <a:prstGeom prst="rect">
+            <a:avLst/>
+          </a:prstGeom>
+          <a:noFill/>
+          <a:ln/>
+        </p:spPr>
+        <p:txBody>
+          <a:bodyPr wrap="square" rtlCol="0" anchor="t"/>
+          <a:lstStyle/>
+          <a:p>
+            <a:pPr marL="342900" indent="-342900">
+              <a:lnSpc>
+                <a:spcPct val="140000"/>
+              </a:lnSpc>
+              <a:buSzPct val="100000"/>
+              <a:buChar char="•"/>
+            </a:pPr>
+            <a:r>
+              <a:rPr lang="en-US" sz="1100" dirty="0">
+                <a:solidFill>
+                  <a:srgbClr val="1C1E2E"/>
+                </a:solidFill>
+                <a:latin typeface="Calibri" pitchFamily="34" charset="0"/>
+                <a:ea typeface="Calibri" pitchFamily="34" charset="-122"/>
+                <a:cs typeface="Calibri" pitchFamily="34" charset="-120"/>
+              </a:rPr>
+              <a:t>ngrok static domain (free tier)</a:t>
+            </a:r>
+            <a:endParaRPr lang="en-US" sz="1100" dirty="0"/>
+          </a:p>
+          <a:p>
+            <a:pPr marL="342900" indent="-342900">
+              <a:lnSpc>
+                <a:spcPct val="140000"/>
+              </a:lnSpc>
+              <a:buSzPct val="100000"/>
+              <a:buChar char="•"/>
+            </a:pPr>
+            <a:r>
+              <a:rPr lang="en-US" sz="1100" dirty="0">
+                <a:solidFill>
+                  <a:srgbClr val="1C1E2E"/>
+                </a:solidFill>
+                <a:latin typeface="Calibri" pitchFamily="34" charset="0"/>
+                <a:ea typeface="Calibri" pitchFamily="34" charset="-122"/>
+                <a:cs typeface="Calibri" pitchFamily="34" charset="-120"/>
+              </a:rPr>
+              <a:t>Permanent URL — no change on restart</a:t>
+            </a:r>
+            <a:endParaRPr lang="en-US" sz="1100" dirty="0"/>
+          </a:p>
+          <a:p>
+            <a:pPr marL="342900" indent="-342900">
+              <a:lnSpc>
+                <a:spcPct val="140000"/>
+              </a:lnSpc>
+              <a:buSzPct val="100000"/>
+              <a:buChar char="•"/>
+            </a:pPr>
+            <a:r>
+              <a:rPr lang="en-US" sz="1100" dirty="0">
+                <a:solidFill>
+                  <a:srgbClr val="1C1E2E"/>
+                </a:solidFill>
+                <a:latin typeface="Calibri" pitchFamily="34" charset="0"/>
+                <a:ea typeface="Calibri" pitchFamily="34" charset="-122"/>
+                <a:cs typeface="Calibri" pitchFamily="34" charset="-120"/>
+              </a:rPr>
+              <a:t>Engineer: knowledge.ngrok-free.app</a:t>
+            </a:r>
+            <a:endParaRPr lang="en-US" sz="1100" dirty="0"/>
+          </a:p>
+          <a:p>
+            <a:pPr marL="342900" indent="-342900">
+              <a:lnSpc>
+                <a:spcPct val="140000"/>
+              </a:lnSpc>
+              <a:buSzPct val="100000"/>
+              <a:buChar char="•"/>
+            </a:pPr>
+            <a:r>
+              <a:rPr lang="en-US" sz="1100" dirty="0">
+                <a:solidFill>
+                  <a:srgbClr val="1C1E2E"/>
+                </a:solidFill>
+                <a:latin typeface="Calibri" pitchFamily="34" charset="0"/>
+                <a:ea typeface="Calibri" pitchFamily="34" charset="-122"/>
+                <a:cs typeface="Calibri" pitchFamily="34" charset="-120"/>
+              </a:rPr>
+              <a:t>Admin: knowledge.ngrok-free.app/admin</a:t>
+            </a:r>
+            <a:endParaRPr lang="en-US" sz="1100" dirty="0"/>
+          </a:p>
+          <a:p>
+            <a:pPr indent="0" marL="0">
+              <a:lnSpc>
+                <a:spcPct val="140000"/>
+              </a:lnSpc>
+              <a:buNone/>
+            </a:pPr>
+            <a:endParaRPr lang="en-US" sz="1100" dirty="0"/>
+          </a:p>
+        </p:txBody>
+      </p:sp>
+      <p:sp>
+        <p:nvSpPr>
+          <p:cNvPr id="16" name="Shape 14"/>
+          <p:cNvSpPr/>
+          <p:nvPr/>
+        </p:nvSpPr>
+        <p:spPr>
+          <a:xfrm>
+            <a:off x="6126480" y="914400"/>
+            <a:ext cx="2788920" cy="3611880"/>
+          </a:xfrm>
+          <a:prstGeom prst="rect">
+            <a:avLst/>
+          </a:prstGeom>
+          <a:solidFill>
+            <a:srgbClr val="FFFFFF"/>
+          </a:solidFill>
+          <a:ln w="12700">
+            <a:solidFill>
+              <a:srgbClr val="E0E3F0"/>
+            </a:solidFill>
+            <a:prstDash val="solid"/>
+          </a:ln>
+          <a:effectLst>
+            <a:outerShdw sx="100000" sy="100000" kx="0" ky="0" algn="bl" rotWithShape="0" blurRad="101600" dist="38100" dir="8100000">
+              <a:srgbClr val="000000">
+                <a:alpha val="12000"/>
+              </a:srgbClr>
+            </a:outerShdw>
+          </a:effectLst>
+        </p:spPr>
+      </p:sp>
+      <p:sp>
+        <p:nvSpPr>
+          <p:cNvPr id="17" name="Shape 15"/>
+          <p:cNvSpPr/>
+          <p:nvPr/>
+        </p:nvSpPr>
+        <p:spPr>
+          <a:xfrm>
+            <a:off x="6126480" y="914400"/>
+            <a:ext cx="2788920" cy="438912"/>
+          </a:xfrm>
+          <a:prstGeom prst="rect">
+            <a:avLst/>
+          </a:prstGeom>
+          <a:solidFill>
+            <a:srgbClr val="00695C"/>
+          </a:solidFill>
+          <a:ln w="12700">
+            <a:solidFill>
+              <a:srgbClr val="00695C"/>
+            </a:solidFill>
+            <a:prstDash val="solid"/>
+          </a:ln>
+        </p:spPr>
+      </p:sp>
+      <p:sp>
+        <p:nvSpPr>
+          <p:cNvPr id="18" name="Text 16"/>
+          <p:cNvSpPr/>
+          <p:nvPr/>
+        </p:nvSpPr>
+        <p:spPr>
+          <a:xfrm>
+            <a:off x="6126480" y="914400"/>
+            <a:ext cx="2788920" cy="438912"/>
+          </a:xfrm>
+          <a:prstGeom prst="rect">
+            <a:avLst/>
+          </a:prstGeom>
+          <a:noFill/>
+          <a:ln/>
+        </p:spPr>
+        <p:txBody>
+          <a:bodyPr wrap="square" lIns="0" tIns="0" rIns="0" bIns="0" rtlCol="0" anchor="ctr"/>
+          <a:lstStyle/>
+          <a:p>
+            <a:pPr algn="ctr" indent="0" marL="0">
+              <a:buNone/>
+            </a:pPr>
+            <a:r>
+              <a:rPr lang="en-US" sz="1100" b="1" spc="150" kern="0" dirty="0">
+                <a:solidFill>
+                  <a:srgbClr val="FFFFFF"/>
+                </a:solidFill>
+                <a:latin typeface="Calibri" pitchFamily="34" charset="0"/>
+                <a:ea typeface="Calibri" pitchFamily="34" charset="-122"/>
+                <a:cs typeface="Calibri" pitchFamily="34" charset="-120"/>
+              </a:rPr>
+              <a:t>CLOUD (RECOMMENDED)</a:t>
+            </a:r>
+            <a:endParaRPr lang="en-US" sz="1100" dirty="0"/>
+          </a:p>
+        </p:txBody>
+      </p:sp>
+      <p:sp>
+        <p:nvSpPr>
+          <p:cNvPr id="19" name="Shape 17"/>
+          <p:cNvSpPr/>
+          <p:nvPr/>
+        </p:nvSpPr>
+        <p:spPr>
+          <a:xfrm>
+            <a:off x="6263640" y="1481328"/>
+            <a:ext cx="2514600" cy="402336"/>
+          </a:xfrm>
+          <a:prstGeom prst="rect">
+            <a:avLst/>
+          </a:prstGeom>
+          <a:solidFill>
+            <a:srgbClr val="E8EAF6"/>
+          </a:solidFill>
+          <a:ln w="12700">
+            <a:solidFill>
+              <a:srgbClr val="E8EAF6"/>
+            </a:solidFill>
+            <a:prstDash val="solid"/>
+          </a:ln>
+        </p:spPr>
+      </p:sp>
+      <p:sp>
+        <p:nvSpPr>
+          <p:cNvPr id="20" name="Text 18"/>
+          <p:cNvSpPr/>
+          <p:nvPr/>
+        </p:nvSpPr>
+        <p:spPr>
+          <a:xfrm>
+            <a:off x="6263640" y="1481328"/>
+            <a:ext cx="2514600" cy="402336"/>
+          </a:xfrm>
+          <a:prstGeom prst="rect">
+            <a:avLst/>
+          </a:prstGeom>
+          <a:noFill/>
+          <a:ln/>
+        </p:spPr>
+        <p:txBody>
+          <a:bodyPr wrap="square" lIns="0" tIns="0" rIns="0" bIns="0" rtlCol="0" anchor="ctr"/>
+          <a:lstStyle/>
+          <a:p>
+            <a:pPr algn="ctr" indent="0" marL="0">
+              <a:buNone/>
+            </a:pPr>
+            <a:r>
+              <a:rPr lang="en-US" sz="1200" b="1" dirty="0">
+                <a:solidFill>
+                  <a:srgbClr val="00695C"/>
+                </a:solidFill>
+                <a:latin typeface="Consolas" pitchFamily="34" charset="0"/>
+                <a:ea typeface="Consolas" pitchFamily="34" charset="-122"/>
+                <a:cs typeface="Consolas" pitchFamily="34" charset="-120"/>
+              </a:rPr>
+              <a:t>Railway.app</a:t>
+            </a:r>
+            <a:endParaRPr lang="en-US" sz="1200" dirty="0"/>
+          </a:p>
+        </p:txBody>
+      </p:sp>
+      <p:sp>
+        <p:nvSpPr>
+          <p:cNvPr id="21" name="Text 19"/>
+          <p:cNvSpPr/>
+          <p:nvPr/>
+        </p:nvSpPr>
+        <p:spPr>
+          <a:xfrm>
+            <a:off x="6309360" y="2011680"/>
+            <a:ext cx="2423160" cy="2331720"/>
+          </a:xfrm>
+          <a:prstGeom prst="rect">
+            <a:avLst/>
+          </a:prstGeom>
+          <a:noFill/>
+          <a:ln/>
+        </p:spPr>
+        <p:txBody>
+          <a:bodyPr wrap="square" rtlCol="0" anchor="t"/>
+          <a:lstStyle/>
+          <a:p>
+            <a:pPr marL="342900" indent="-342900">
+              <a:lnSpc>
+                <a:spcPct val="140000"/>
+              </a:lnSpc>
+              <a:buSzPct val="100000"/>
+              <a:buChar char="•"/>
+            </a:pPr>
+            <a:r>
+              <a:rPr lang="en-US" sz="1100" dirty="0">
+                <a:solidFill>
+                  <a:srgbClr val="1C1E2E"/>
+                </a:solidFill>
+                <a:latin typeface="Calibri" pitchFamily="34" charset="0"/>
+                <a:ea typeface="Calibri" pitchFamily="34" charset="-122"/>
+                <a:cs typeface="Calibri" pitchFamily="34" charset="-120"/>
+              </a:rPr>
+              <a:t>railway.toml included in repo</a:t>
+            </a:r>
+            <a:endParaRPr lang="en-US" sz="1100" dirty="0"/>
+          </a:p>
+          <a:p>
+            <a:pPr marL="342900" indent="-342900">
+              <a:lnSpc>
+                <a:spcPct val="140000"/>
+              </a:lnSpc>
+              <a:buSzPct val="100000"/>
+              <a:buChar char="•"/>
+            </a:pPr>
+            <a:r>
+              <a:rPr lang="en-US" sz="1100" dirty="0">
+                <a:solidFill>
+                  <a:srgbClr val="1C1E2E"/>
+                </a:solidFill>
+                <a:latin typeface="Calibri" pitchFamily="34" charset="0"/>
+                <a:ea typeface="Calibri" pitchFamily="34" charset="-122"/>
+                <a:cs typeface="Calibri" pitchFamily="34" charset="-120"/>
+              </a:rPr>
+              <a:t>Connect github.com/girishkurup/ttk-knowledge-agent</a:t>
+            </a:r>
+            <a:endParaRPr lang="en-US" sz="1100" dirty="0"/>
+          </a:p>
+          <a:p>
+            <a:pPr marL="342900" indent="-342900">
+              <a:lnSpc>
+                <a:spcPct val="140000"/>
+              </a:lnSpc>
+              <a:buSzPct val="100000"/>
+              <a:buChar char="•"/>
+            </a:pPr>
+            <a:r>
+              <a:rPr lang="en-US" sz="1100" dirty="0">
+                <a:solidFill>
+                  <a:srgbClr val="1C1E2E"/>
+                </a:solidFill>
+                <a:latin typeface="Calibri" pitchFamily="34" charset="0"/>
+                <a:ea typeface="Calibri" pitchFamily="34" charset="-122"/>
+                <a:cs typeface="Calibri" pitchFamily="34" charset="-120"/>
+              </a:rPr>
+              <a:t>Set ANTHROPIC_API_KEY in Railway dashboard</a:t>
+            </a:r>
+            <a:endParaRPr lang="en-US" sz="1100" dirty="0"/>
+          </a:p>
+          <a:p>
+            <a:pPr marL="342900" indent="-342900">
+              <a:lnSpc>
+                <a:spcPct val="140000"/>
+              </a:lnSpc>
+              <a:buSzPct val="100000"/>
+              <a:buChar char="•"/>
+            </a:pPr>
+            <a:r>
+              <a:rPr lang="en-US" sz="1100" dirty="0">
+                <a:solidFill>
+                  <a:srgbClr val="1C1E2E"/>
+                </a:solidFill>
+                <a:latin typeface="Calibri" pitchFamily="34" charset="0"/>
+                <a:ea typeface="Calibri" pitchFamily="34" charset="-122"/>
+                <a:cs typeface="Calibri" pitchFamily="34" charset="-120"/>
+              </a:rPr>
+              <a:t>Permanent URL — no laptop required</a:t>
+            </a:r>
+            <a:endParaRPr lang="en-US" sz="1100" dirty="0"/>
+          </a:p>
+          <a:p>
+            <a:pPr indent="0" marL="0">
+              <a:lnSpc>
+                <a:spcPct val="140000"/>
+              </a:lnSpc>
+              <a:buNone/>
+            </a:pPr>
+            <a:endParaRPr lang="en-US" sz="1100" dirty="0"/>
+          </a:p>
+        </p:txBody>
+      </p:sp>
+      <p:sp>
+        <p:nvSpPr>
+          <p:cNvPr id="22" name="Shape 20"/>
+          <p:cNvSpPr/>
+          <p:nvPr/>
+        </p:nvSpPr>
+        <p:spPr>
+          <a:xfrm>
+            <a:off x="274320" y="4617720"/>
+            <a:ext cx="8595360" cy="274320"/>
+          </a:xfrm>
+          <a:prstGeom prst="rect">
+            <a:avLst/>
+          </a:prstGeom>
+          <a:solidFill>
+            <a:srgbClr val="0D1B4B"/>
+          </a:solidFill>
+          <a:ln w="12700">
+            <a:solidFill>
+              <a:srgbClr val="0D1B4B"/>
+            </a:solidFill>
+            <a:prstDash val="solid"/>
+          </a:ln>
+        </p:spPr>
+      </p:sp>
+      <p:sp>
+        <p:nvSpPr>
+          <p:cNvPr id="23" name="Text 21"/>
+          <p:cNvSpPr/>
+          <p:nvPr/>
+        </p:nvSpPr>
+        <p:spPr>
+          <a:xfrm>
+            <a:off x="274320" y="4617720"/>
+            <a:ext cx="8595360" cy="274320"/>
+          </a:xfrm>
+          <a:prstGeom prst="rect">
+            <a:avLst/>
+          </a:prstGeom>
+          <a:noFill/>
+          <a:ln/>
+        </p:spPr>
+        <p:txBody>
+          <a:bodyPr wrap="square" lIns="0" tIns="0" rIns="0" bIns="0" rtlCol="0" anchor="ctr"/>
+          <a:lstStyle/>
+          <a:p>
+            <a:pPr algn="ctr" indent="0" marL="0">
+              <a:buNone/>
+            </a:pPr>
+            <a:r>
+              <a:rPr lang="en-US" sz="1000" dirty="0">
+                <a:solidFill>
+                  <a:srgbClr val="FFFFFF"/>
+                </a:solidFill>
+                <a:latin typeface="Calibri" pitchFamily="34" charset="0"/>
+                <a:ea typeface="Calibri" pitchFamily="34" charset="-122"/>
+                <a:cs typeface="Calibri" pitchFamily="34" charset="-120"/>
+              </a:rPr>
+              <a:t>GitHub:  github.com/girishkurup/ttk-knowledge-agent  —  All source code + session data + SQLite DB committed</a:t>
+            </a:r>
+            <a:endParaRPr lang="en-US" sz="1000" dirty="0"/>
+          </a:p>
+        </p:txBody>
+      </p:sp>
+      <p:sp>
+        <p:nvSpPr>
+          <p:cNvPr id="24" name="Shape 22"/>
+          <p:cNvSpPr/>
+          <p:nvPr/>
+        </p:nvSpPr>
+        <p:spPr>
+          <a:xfrm>
+            <a:off x="0" y="4892040"/>
+            <a:ext cx="9144000" cy="251460"/>
+          </a:xfrm>
+          <a:prstGeom prst="rect">
+            <a:avLst/>
+          </a:prstGeom>
+          <a:solidFill>
+            <a:srgbClr val="E8EAF6"/>
+          </a:solidFill>
+          <a:ln w="12700">
+            <a:solidFill>
+              <a:srgbClr val="E8EAF6"/>
+            </a:solidFill>
+            <a:prstDash val="solid"/>
+          </a:ln>
+        </p:spPr>
+      </p:sp>
+      <p:sp>
+        <p:nvSpPr>
+          <p:cNvPr id="25" name="Text 23"/>
+          <p:cNvSpPr/>
+          <p:nvPr/>
+        </p:nvSpPr>
+        <p:spPr>
+          <a:xfrm>
+            <a:off x="274320" y="4892040"/>
+            <a:ext cx="8595360" cy="251460"/>
+          </a:xfrm>
+          <a:prstGeom prst="rect">
+            <a:avLst/>
+          </a:prstGeom>
+          <a:noFill/>
+          <a:ln/>
+        </p:spPr>
+        <p:txBody>
+          <a:bodyPr wrap="square" lIns="0" tIns="0" rIns="0" bIns="0" rtlCol="0" anchor="ctr"/>
+          <a:lstStyle/>
+          <a:p>
+            <a:pPr indent="0" marL="0">
+              <a:buNone/>
+            </a:pPr>
+            <a:r>
+              <a:rPr lang="en-US" sz="900" dirty="0">
+                <a:solidFill>
+                  <a:srgbClr val="6B7280"/>
+                </a:solidFill>
+                <a:latin typeface="Calibri" pitchFamily="34" charset="0"/>
+                <a:ea typeface="Calibri" pitchFamily="34" charset="-122"/>
+                <a:cs typeface="Calibri" pitchFamily="34" charset="-120"/>
+              </a:rPr>
+              <a:t>TTK Companion Agent Pipeline  |  Executive Briefing  |  2026</a:t>
+            </a:r>
+            <a:endParaRPr lang="en-US" sz="900" dirty="0"/>
+          </a:p>
+        </p:txBody>
+      </p:sp>
+    </p:spTree>
+  </p:cSld>
+  <p:clrMapOvr>
+    <a:masterClrMapping/>
+  </p:clrMapOvr>
+</p:sld>
+</file>
+
+<file path=ppt/slides/slide11.xml><?xml version="1.0" encoding="utf-8"?>
+<p:sld xmlns:a="http://schemas.openxmlformats.org/drawingml/2006/main" xmlns:r="http://schemas.openxmlformats.org/officeDocument/2006/relationships" xmlns:p="http://schemas.openxmlformats.org/presentationml/2006/main">
+  <p:cSld name="Slide 11">
+    <p:bg>
+      <p:bgPr>
+        <a:solidFill>
           <a:srgbClr val="FFFFFF"/>
         </a:solidFill>
       </p:bgPr>
@@ -4863,7 +6001,7 @@
                 <a:ea typeface="Georgia" pitchFamily="34" charset="-122"/>
                 <a:cs typeface="Georgia" pitchFamily="34" charset="-120"/>
               </a:rPr>
-              <a:t>Architecture — Two Pipelines</a:t>
+              <a:t>Why Agentic? — Suitability Criteria</a:t>
             </a:r>
             <a:endParaRPr lang="en-US" sz="2200" dirty="0"/>
           </a:p>
@@ -4877,8 +6015,8 @@
         </p:nvSpPr>
         <p:spPr>
           <a:xfrm>
-            <a:off x="274320" y="914400"/>
-            <a:ext cx="4160520" cy="3520440"/>
+            <a:off x="256032" y="914400"/>
+            <a:ext cx="2788920" cy="1874520"/>
           </a:xfrm>
           <a:prstGeom prst="rect">
             <a:avLst/>
@@ -4909,8 +6047,8 @@
         </p:nvSpPr>
         <p:spPr>
           <a:xfrm>
-            <a:off x="274320" y="914400"/>
-            <a:ext cx="4160520" cy="411480"/>
+            <a:off x="256032" y="914400"/>
+            <a:ext cx="2788920" cy="384048"/>
           </a:xfrm>
           <a:prstGeom prst="rect">
             <a:avLst/>
@@ -4928,14 +6066,39 @@
       </p:sp>
       <p:sp>
         <p:nvSpPr>
-          <p:cNvPr id="6" name="Text 4"/>
-          <p:cNvSpPr/>
-          <p:nvPr/>
-        </p:nvSpPr>
-        <p:spPr>
-          <a:xfrm>
-            <a:off x="274320" y="914400"/>
-            <a:ext cx="4160520" cy="411480"/>
+          <p:cNvPr id="6" name="Shape 4"/>
+          <p:cNvSpPr/>
+          <p:nvPr/>
+        </p:nvSpPr>
+        <p:spPr>
+          <a:xfrm>
+            <a:off x="347472" y="1371600"/>
+            <a:ext cx="402336" cy="402336"/>
+          </a:xfrm>
+          <a:prstGeom prst="rect">
+            <a:avLst/>
+          </a:prstGeom>
+          <a:solidFill>
+            <a:srgbClr val="0D1B4B"/>
+          </a:solidFill>
+          <a:ln w="12700">
+            <a:solidFill>
+              <a:srgbClr val="0D1B4B"/>
+            </a:solidFill>
+            <a:prstDash val="solid"/>
+          </a:ln>
+        </p:spPr>
+      </p:sp>
+      <p:sp>
+        <p:nvSpPr>
+          <p:cNvPr id="7" name="Text 5"/>
+          <p:cNvSpPr/>
+          <p:nvPr/>
+        </p:nvSpPr>
+        <p:spPr>
+          <a:xfrm>
+            <a:off x="347472" y="1371600"/>
+            <a:ext cx="402336" cy="402336"/>
           </a:xfrm>
           <a:prstGeom prst="rect">
             <a:avLst/>
@@ -4951,7 +6114,46 @@
               <a:buNone/>
             </a:pPr>
             <a:r>
-              <a:rPr lang="en-US" sz="1100" b="1" spc="100" kern="0" dirty="0">
+              <a:rPr lang="en-US" sz="1300" b="1" dirty="0">
+                <a:solidFill>
+                  <a:srgbClr val="FFFFFF"/>
+                </a:solidFill>
+                <a:latin typeface="Georgia" pitchFamily="34" charset="0"/>
+                <a:ea typeface="Georgia" pitchFamily="34" charset="-122"/>
+                <a:cs typeface="Georgia" pitchFamily="34" charset="-120"/>
+              </a:rPr>
+              <a:t>01</a:t>
+            </a:r>
+            <a:endParaRPr lang="en-US" sz="1300" dirty="0"/>
+          </a:p>
+        </p:txBody>
+      </p:sp>
+      <p:sp>
+        <p:nvSpPr>
+          <p:cNvPr id="8" name="Text 6"/>
+          <p:cNvSpPr/>
+          <p:nvPr/>
+        </p:nvSpPr>
+        <p:spPr>
+          <a:xfrm>
+            <a:off x="2633472" y="914400"/>
+            <a:ext cx="347472" cy="384048"/>
+          </a:xfrm>
+          <a:prstGeom prst="rect">
+            <a:avLst/>
+          </a:prstGeom>
+          <a:noFill/>
+          <a:ln/>
+        </p:spPr>
+        <p:txBody>
+          <a:bodyPr wrap="square" lIns="0" tIns="0" rIns="0" bIns="0" rtlCol="0" anchor="ctr"/>
+          <a:lstStyle/>
+          <a:p>
+            <a:pPr algn="ctr" indent="0" marL="0">
+              <a:buNone/>
+            </a:pPr>
+            <a:r>
+              <a:rPr lang="en-US" sz="1600" b="1" dirty="0">
                 <a:solidFill>
                   <a:srgbClr val="FFFFFF"/>
                 </a:solidFill>
@@ -4959,112 +6161,48 @@
                 <a:ea typeface="Calibri" pitchFamily="34" charset="-122"/>
                 <a:cs typeface="Calibri" pitchFamily="34" charset="-120"/>
               </a:rPr>
-              <a:t>INTERVIEW PIPELINE  —  Automatic</a:t>
-            </a:r>
-            <a:endParaRPr lang="en-US" sz="1100" dirty="0"/>
-          </a:p>
-        </p:txBody>
-      </p:sp>
-      <p:sp>
-        <p:nvSpPr>
-          <p:cNvPr id="7" name="Shape 5"/>
-          <p:cNvSpPr/>
-          <p:nvPr/>
-        </p:nvSpPr>
-        <p:spPr>
-          <a:xfrm>
-            <a:off x="457200" y="1463040"/>
-            <a:ext cx="411480" cy="411480"/>
-          </a:xfrm>
-          <a:prstGeom prst="rect">
-            <a:avLst/>
-          </a:prstGeom>
-          <a:solidFill>
-            <a:srgbClr val="3949AB"/>
-          </a:solidFill>
-          <a:ln w="12700">
-            <a:solidFill>
-              <a:srgbClr val="3949AB"/>
-            </a:solidFill>
-            <a:prstDash val="solid"/>
-          </a:ln>
-        </p:spPr>
-      </p:sp>
-      <p:sp>
-        <p:nvSpPr>
-          <p:cNvPr id="8" name="Text 6"/>
-          <p:cNvSpPr/>
-          <p:nvPr/>
-        </p:nvSpPr>
-        <p:spPr>
-          <a:xfrm>
-            <a:off x="457200" y="1463040"/>
-            <a:ext cx="411480" cy="411480"/>
-          </a:xfrm>
-          <a:prstGeom prst="rect">
-            <a:avLst/>
-          </a:prstGeom>
-          <a:noFill/>
-          <a:ln/>
-        </p:spPr>
-        <p:txBody>
-          <a:bodyPr wrap="square" lIns="0" tIns="0" rIns="0" bIns="0" rtlCol="0" anchor="ctr"/>
-          <a:lstStyle/>
-          <a:p>
-            <a:pPr algn="ctr" indent="0" marL="0">
-              <a:buNone/>
-            </a:pPr>
-            <a:r>
-              <a:rPr lang="en-US" sz="1600" b="1" dirty="0">
+              <a:t>✓</a:t>
+            </a:r>
+            <a:endParaRPr lang="en-US" sz="1600" dirty="0"/>
+          </a:p>
+        </p:txBody>
+      </p:sp>
+      <p:sp>
+        <p:nvSpPr>
+          <p:cNvPr id="9" name="Text 7"/>
+          <p:cNvSpPr/>
+          <p:nvPr/>
+        </p:nvSpPr>
+        <p:spPr>
+          <a:xfrm>
+            <a:off x="256032" y="914400"/>
+            <a:ext cx="2331720" cy="384048"/>
+          </a:xfrm>
+          <a:prstGeom prst="rect">
+            <a:avLst/>
+          </a:prstGeom>
+          <a:noFill/>
+          <a:ln/>
+        </p:spPr>
+        <p:txBody>
+          <a:bodyPr wrap="square" lIns="101600" tIns="101600" rIns="101600" bIns="101600" rtlCol="0" anchor="ctr"/>
+          <a:lstStyle/>
+          <a:p>
+            <a:pPr indent="0" marL="0">
+              <a:buNone/>
+            </a:pPr>
+            <a:r>
+              <a:rPr lang="en-US" sz="1000" b="1" dirty="0">
                 <a:solidFill>
                   <a:srgbClr val="FFFFFF"/>
-                </a:solidFill>
-                <a:latin typeface="Georgia" pitchFamily="34" charset="0"/>
-                <a:ea typeface="Georgia" pitchFamily="34" charset="-122"/>
-                <a:cs typeface="Georgia" pitchFamily="34" charset="-120"/>
-              </a:rPr>
-              <a:t>1</a:t>
-            </a:r>
-            <a:endParaRPr lang="en-US" sz="1600" dirty="0"/>
-          </a:p>
-        </p:txBody>
-      </p:sp>
-      <p:sp>
-        <p:nvSpPr>
-          <p:cNvPr id="9" name="Text 7"/>
-          <p:cNvSpPr/>
-          <p:nvPr/>
-        </p:nvSpPr>
-        <p:spPr>
-          <a:xfrm>
-            <a:off x="960120" y="1463040"/>
-            <a:ext cx="3291840" cy="256032"/>
-          </a:xfrm>
-          <a:prstGeom prst="rect">
-            <a:avLst/>
-          </a:prstGeom>
-          <a:noFill/>
-          <a:ln/>
-        </p:spPr>
-        <p:txBody>
-          <a:bodyPr wrap="square" lIns="0" tIns="0" rIns="0" bIns="0" rtlCol="0" anchor="ctr"/>
-          <a:lstStyle/>
-          <a:p>
-            <a:pPr indent="0" marL="0">
-              <a:buNone/>
-            </a:pPr>
-            <a:r>
-              <a:rPr lang="en-US" sz="1200" b="1" dirty="0">
-                <a:solidFill>
-                  <a:srgbClr val="0D1B4B"/>
                 </a:solidFill>
                 <a:latin typeface="Calibri" pitchFamily="34" charset="0"/>
                 <a:ea typeface="Calibri" pitchFamily="34" charset="-122"/>
                 <a:cs typeface="Calibri" pitchFamily="34" charset="-120"/>
               </a:rPr>
-              <a:t>TTK Interview Agent</a:t>
-            </a:r>
-            <a:endParaRPr lang="en-US" sz="1200" dirty="0"/>
+              <a:t>Repetitive &amp; High Volume</a:t>
+            </a:r>
+            <a:endParaRPr lang="en-US" sz="1000" dirty="0"/>
           </a:p>
         </p:txBody>
       </p:sp>
@@ -5076,34 +6214,37 @@
         </p:nvSpPr>
         <p:spPr>
           <a:xfrm>
-            <a:off x="960120" y="1719072"/>
-            <a:ext cx="3291840" cy="347472"/>
-          </a:xfrm>
-          <a:prstGeom prst="rect">
-            <a:avLst/>
-          </a:prstGeom>
-          <a:noFill/>
-          <a:ln/>
-        </p:spPr>
-        <p:txBody>
-          <a:bodyPr wrap="square" lIns="0" tIns="0" rIns="0" bIns="0" rtlCol="0" anchor="ctr"/>
+            <a:off x="850392" y="1371600"/>
+            <a:ext cx="2103120" cy="1325880"/>
+          </a:xfrm>
+          <a:prstGeom prst="rect">
+            <a:avLst/>
+          </a:prstGeom>
+          <a:noFill/>
+          <a:ln/>
+        </p:spPr>
+        <p:txBody>
+          <a:bodyPr wrap="square" rtlCol="0" anchor="t"/>
           <a:lstStyle/>
           <a:p>
             <a:pPr indent="0" marL="0">
-              <a:buNone/>
-            </a:pPr>
-            <a:r>
-              <a:rPr lang="en-US" sz="1000" dirty="0">
-                <a:solidFill>
-                  <a:srgbClr val="6B7280"/>
+              <a:lnSpc>
+                <a:spcPct val="130000"/>
+              </a:lnSpc>
+              <a:buNone/>
+            </a:pPr>
+            <a:r>
+              <a:rPr lang="en-US" sz="1050" dirty="0">
+                <a:solidFill>
+                  <a:srgbClr val="1C1E2E"/>
                 </a:solidFill>
                 <a:latin typeface="Calibri" pitchFamily="34" charset="0"/>
                 <a:ea typeface="Calibri" pitchFamily="34" charset="-122"/>
                 <a:cs typeface="Calibri" pitchFamily="34" charset="-120"/>
               </a:rPr>
-              <a:t>Structured 5-turn conversation with process engineer via WebSocket streaming</a:t>
-            </a:r>
-            <a:endParaRPr lang="en-US" sz="1000" dirty="0"/>
+              <a:t>Knowledge capture interviews occur after every batch deviation event across all products, sites and engineers — a continuous, recurring need.</a:t>
+            </a:r>
+            <a:endParaRPr lang="en-US" sz="1050" dirty="0"/>
           </a:p>
         </p:txBody>
       </p:sp>
@@ -5115,342 +6256,8 @@
         </p:nvSpPr>
         <p:spPr>
           <a:xfrm>
-            <a:off x="594360" y="1965960"/>
-            <a:ext cx="128016" cy="411480"/>
-          </a:xfrm>
-          <a:prstGeom prst="rect">
-            <a:avLst/>
-          </a:prstGeom>
-          <a:solidFill>
-            <a:srgbClr val="5C6BC0"/>
-          </a:solidFill>
-          <a:ln w="12700">
-            <a:solidFill>
-              <a:srgbClr val="5C6BC0"/>
-            </a:solidFill>
-            <a:prstDash val="solid"/>
-          </a:ln>
-        </p:spPr>
-      </p:sp>
-      <p:sp>
-        <p:nvSpPr>
-          <p:cNvPr id="12" name="Shape 10"/>
-          <p:cNvSpPr/>
-          <p:nvPr/>
-        </p:nvSpPr>
-        <p:spPr>
-          <a:xfrm>
-            <a:off x="457200" y="2423160"/>
-            <a:ext cx="411480" cy="411480"/>
-          </a:xfrm>
-          <a:prstGeom prst="rect">
-            <a:avLst/>
-          </a:prstGeom>
-          <a:solidFill>
-            <a:srgbClr val="3949AB"/>
-          </a:solidFill>
-          <a:ln w="12700">
-            <a:solidFill>
-              <a:srgbClr val="3949AB"/>
-            </a:solidFill>
-            <a:prstDash val="solid"/>
-          </a:ln>
-        </p:spPr>
-      </p:sp>
-      <p:sp>
-        <p:nvSpPr>
-          <p:cNvPr id="13" name="Text 11"/>
-          <p:cNvSpPr/>
-          <p:nvPr/>
-        </p:nvSpPr>
-        <p:spPr>
-          <a:xfrm>
-            <a:off x="457200" y="2423160"/>
-            <a:ext cx="411480" cy="411480"/>
-          </a:xfrm>
-          <a:prstGeom prst="rect">
-            <a:avLst/>
-          </a:prstGeom>
-          <a:noFill/>
-          <a:ln/>
-        </p:spPr>
-        <p:txBody>
-          <a:bodyPr wrap="square" lIns="0" tIns="0" rIns="0" bIns="0" rtlCol="0" anchor="ctr"/>
-          <a:lstStyle/>
-          <a:p>
-            <a:pPr algn="ctr" indent="0" marL="0">
-              <a:buNone/>
-            </a:pPr>
-            <a:r>
-              <a:rPr lang="en-US" sz="1600" b="1" dirty="0">
-                <a:solidFill>
-                  <a:srgbClr val="FFFFFF"/>
-                </a:solidFill>
-                <a:latin typeface="Georgia" pitchFamily="34" charset="0"/>
-                <a:ea typeface="Georgia" pitchFamily="34" charset="-122"/>
-                <a:cs typeface="Georgia" pitchFamily="34" charset="-120"/>
-              </a:rPr>
-              <a:t>2</a:t>
-            </a:r>
-            <a:endParaRPr lang="en-US" sz="1600" dirty="0"/>
-          </a:p>
-        </p:txBody>
-      </p:sp>
-      <p:sp>
-        <p:nvSpPr>
-          <p:cNvPr id="14" name="Text 12"/>
-          <p:cNvSpPr/>
-          <p:nvPr/>
-        </p:nvSpPr>
-        <p:spPr>
-          <a:xfrm>
-            <a:off x="960120" y="2423160"/>
-            <a:ext cx="3291840" cy="256032"/>
-          </a:xfrm>
-          <a:prstGeom prst="rect">
-            <a:avLst/>
-          </a:prstGeom>
-          <a:noFill/>
-          <a:ln/>
-        </p:spPr>
-        <p:txBody>
-          <a:bodyPr wrap="square" lIns="0" tIns="0" rIns="0" bIns="0" rtlCol="0" anchor="ctr"/>
-          <a:lstStyle/>
-          <a:p>
-            <a:pPr indent="0" marL="0">
-              <a:buNone/>
-            </a:pPr>
-            <a:r>
-              <a:rPr lang="en-US" sz="1200" b="1" dirty="0">
-                <a:solidFill>
-                  <a:srgbClr val="0D1B4B"/>
-                </a:solidFill>
-                <a:latin typeface="Calibri" pitchFamily="34" charset="0"/>
-                <a:ea typeface="Calibri" pitchFamily="34" charset="-122"/>
-                <a:cs typeface="Calibri" pitchFamily="34" charset="-120"/>
-              </a:rPr>
-              <a:t>Knowledge Synthesis Agent</a:t>
-            </a:r>
-            <a:endParaRPr lang="en-US" sz="1200" dirty="0"/>
-          </a:p>
-        </p:txBody>
-      </p:sp>
-      <p:sp>
-        <p:nvSpPr>
-          <p:cNvPr id="15" name="Text 13"/>
-          <p:cNvSpPr/>
-          <p:nvPr/>
-        </p:nvSpPr>
-        <p:spPr>
-          <a:xfrm>
-            <a:off x="960120" y="2679192"/>
-            <a:ext cx="3291840" cy="347472"/>
-          </a:xfrm>
-          <a:prstGeom prst="rect">
-            <a:avLst/>
-          </a:prstGeom>
-          <a:noFill/>
-          <a:ln/>
-        </p:spPr>
-        <p:txBody>
-          <a:bodyPr wrap="square" lIns="0" tIns="0" rIns="0" bIns="0" rtlCol="0" anchor="ctr"/>
-          <a:lstStyle/>
-          <a:p>
-            <a:pPr indent="0" marL="0">
-              <a:buNone/>
-            </a:pPr>
-            <a:r>
-              <a:rPr lang="en-US" sz="1000" dirty="0">
-                <a:solidFill>
-                  <a:srgbClr val="6B7280"/>
-                </a:solidFill>
-                <a:latin typeface="Calibri" pitchFamily="34" charset="0"/>
-                <a:ea typeface="Calibri" pitchFamily="34" charset="-122"/>
-                <a:cs typeface="Calibri" pitchFamily="34" charset="-120"/>
-              </a:rPr>
-              <a:t>Generates Knowledge Article + Risk Verification Checklist from interview JSON</a:t>
-            </a:r>
-            <a:endParaRPr lang="en-US" sz="1000" dirty="0"/>
-          </a:p>
-        </p:txBody>
-      </p:sp>
-      <p:sp>
-        <p:nvSpPr>
-          <p:cNvPr id="16" name="Shape 14"/>
-          <p:cNvSpPr/>
-          <p:nvPr/>
-        </p:nvSpPr>
-        <p:spPr>
-          <a:xfrm>
-            <a:off x="594360" y="2926080"/>
-            <a:ext cx="128016" cy="411480"/>
-          </a:xfrm>
-          <a:prstGeom prst="rect">
-            <a:avLst/>
-          </a:prstGeom>
-          <a:solidFill>
-            <a:srgbClr val="5C6BC0"/>
-          </a:solidFill>
-          <a:ln w="12700">
-            <a:solidFill>
-              <a:srgbClr val="5C6BC0"/>
-            </a:solidFill>
-            <a:prstDash val="solid"/>
-          </a:ln>
-        </p:spPr>
-      </p:sp>
-      <p:sp>
-        <p:nvSpPr>
-          <p:cNvPr id="17" name="Shape 15"/>
-          <p:cNvSpPr/>
-          <p:nvPr/>
-        </p:nvSpPr>
-        <p:spPr>
-          <a:xfrm>
-            <a:off x="457200" y="3383280"/>
-            <a:ext cx="411480" cy="411480"/>
-          </a:xfrm>
-          <a:prstGeom prst="rect">
-            <a:avLst/>
-          </a:prstGeom>
-          <a:solidFill>
-            <a:srgbClr val="3949AB"/>
-          </a:solidFill>
-          <a:ln w="12700">
-            <a:solidFill>
-              <a:srgbClr val="3949AB"/>
-            </a:solidFill>
-            <a:prstDash val="solid"/>
-          </a:ln>
-        </p:spPr>
-      </p:sp>
-      <p:sp>
-        <p:nvSpPr>
-          <p:cNvPr id="18" name="Text 16"/>
-          <p:cNvSpPr/>
-          <p:nvPr/>
-        </p:nvSpPr>
-        <p:spPr>
-          <a:xfrm>
-            <a:off x="457200" y="3383280"/>
-            <a:ext cx="411480" cy="411480"/>
-          </a:xfrm>
-          <a:prstGeom prst="rect">
-            <a:avLst/>
-          </a:prstGeom>
-          <a:noFill/>
-          <a:ln/>
-        </p:spPr>
-        <p:txBody>
-          <a:bodyPr wrap="square" lIns="0" tIns="0" rIns="0" bIns="0" rtlCol="0" anchor="ctr"/>
-          <a:lstStyle/>
-          <a:p>
-            <a:pPr algn="ctr" indent="0" marL="0">
-              <a:buNone/>
-            </a:pPr>
-            <a:r>
-              <a:rPr lang="en-US" sz="1600" b="1" dirty="0">
-                <a:solidFill>
-                  <a:srgbClr val="FFFFFF"/>
-                </a:solidFill>
-                <a:latin typeface="Georgia" pitchFamily="34" charset="0"/>
-                <a:ea typeface="Georgia" pitchFamily="34" charset="-122"/>
-                <a:cs typeface="Georgia" pitchFamily="34" charset="-120"/>
-              </a:rPr>
-              <a:t>3</a:t>
-            </a:r>
-            <a:endParaRPr lang="en-US" sz="1600" dirty="0"/>
-          </a:p>
-        </p:txBody>
-      </p:sp>
-      <p:sp>
-        <p:nvSpPr>
-          <p:cNvPr id="19" name="Text 17"/>
-          <p:cNvSpPr/>
-          <p:nvPr/>
-        </p:nvSpPr>
-        <p:spPr>
-          <a:xfrm>
-            <a:off x="960120" y="3383280"/>
-            <a:ext cx="3291840" cy="256032"/>
-          </a:xfrm>
-          <a:prstGeom prst="rect">
-            <a:avLst/>
-          </a:prstGeom>
-          <a:noFill/>
-          <a:ln/>
-        </p:spPr>
-        <p:txBody>
-          <a:bodyPr wrap="square" lIns="0" tIns="0" rIns="0" bIns="0" rtlCol="0" anchor="ctr"/>
-          <a:lstStyle/>
-          <a:p>
-            <a:pPr indent="0" marL="0">
-              <a:buNone/>
-            </a:pPr>
-            <a:r>
-              <a:rPr lang="en-US" sz="1200" b="1" dirty="0">
-                <a:solidFill>
-                  <a:srgbClr val="0D1B4B"/>
-                </a:solidFill>
-                <a:latin typeface="Calibri" pitchFamily="34" charset="0"/>
-                <a:ea typeface="Calibri" pitchFamily="34" charset="-122"/>
-                <a:cs typeface="Calibri" pitchFamily="34" charset="-120"/>
-              </a:rPr>
-              <a:t>Knowledge Graph Agent</a:t>
-            </a:r>
-            <a:endParaRPr lang="en-US" sz="1200" dirty="0"/>
-          </a:p>
-        </p:txBody>
-      </p:sp>
-      <p:sp>
-        <p:nvSpPr>
-          <p:cNvPr id="20" name="Text 18"/>
-          <p:cNvSpPr/>
-          <p:nvPr/>
-        </p:nvSpPr>
-        <p:spPr>
-          <a:xfrm>
-            <a:off x="960120" y="3639312"/>
-            <a:ext cx="3291840" cy="347472"/>
-          </a:xfrm>
-          <a:prstGeom prst="rect">
-            <a:avLst/>
-          </a:prstGeom>
-          <a:noFill/>
-          <a:ln/>
-        </p:spPr>
-        <p:txBody>
-          <a:bodyPr wrap="square" lIns="0" tIns="0" rIns="0" bIns="0" rtlCol="0" anchor="ctr"/>
-          <a:lstStyle/>
-          <a:p>
-            <a:pPr indent="0" marL="0">
-              <a:buNone/>
-            </a:pPr>
-            <a:r>
-              <a:rPr lang="en-US" sz="1000" dirty="0">
-                <a:solidFill>
-                  <a:srgbClr val="6B7280"/>
-                </a:solidFill>
-                <a:latin typeface="Calibri" pitchFamily="34" charset="0"/>
-                <a:ea typeface="Calibri" pitchFamily="34" charset="-122"/>
-                <a:cs typeface="Calibri" pitchFamily="34" charset="-120"/>
-              </a:rPr>
-              <a:t>Extracts entities &amp; relationships into graph nodes/edges, stored in SQLite</a:t>
-            </a:r>
-            <a:endParaRPr lang="en-US" sz="1000" dirty="0"/>
-          </a:p>
-        </p:txBody>
-      </p:sp>
-      <p:sp>
-        <p:nvSpPr>
-          <p:cNvPr id="21" name="Shape 19"/>
-          <p:cNvSpPr/>
-          <p:nvPr/>
-        </p:nvSpPr>
-        <p:spPr>
-          <a:xfrm>
-            <a:off x="4709160" y="914400"/>
-            <a:ext cx="4160520" cy="3520440"/>
+            <a:off x="3163824" y="914400"/>
+            <a:ext cx="2788920" cy="1874520"/>
           </a:xfrm>
           <a:prstGeom prst="rect">
             <a:avLst/>
@@ -5475,39 +6282,64 @@
       </p:sp>
       <p:sp>
         <p:nvSpPr>
-          <p:cNvPr id="22" name="Shape 20"/>
-          <p:cNvSpPr/>
-          <p:nvPr/>
-        </p:nvSpPr>
-        <p:spPr>
-          <a:xfrm>
-            <a:off x="4709160" y="914400"/>
-            <a:ext cx="4160520" cy="411480"/>
-          </a:xfrm>
-          <a:prstGeom prst="rect">
-            <a:avLst/>
-          </a:prstGeom>
-          <a:solidFill>
-            <a:srgbClr val="00695C"/>
-          </a:solidFill>
-          <a:ln w="12700">
-            <a:solidFill>
-              <a:srgbClr val="00695C"/>
-            </a:solidFill>
-            <a:prstDash val="solid"/>
-          </a:ln>
-        </p:spPr>
-      </p:sp>
-      <p:sp>
-        <p:nvSpPr>
-          <p:cNvPr id="23" name="Text 21"/>
-          <p:cNvSpPr/>
-          <p:nvPr/>
-        </p:nvSpPr>
-        <p:spPr>
-          <a:xfrm>
-            <a:off x="4709160" y="914400"/>
-            <a:ext cx="4160520" cy="411480"/>
+          <p:cNvPr id="12" name="Shape 10"/>
+          <p:cNvSpPr/>
+          <p:nvPr/>
+        </p:nvSpPr>
+        <p:spPr>
+          <a:xfrm>
+            <a:off x="3163824" y="914400"/>
+            <a:ext cx="2788920" cy="384048"/>
+          </a:xfrm>
+          <a:prstGeom prst="rect">
+            <a:avLst/>
+          </a:prstGeom>
+          <a:solidFill>
+            <a:srgbClr val="3949AB"/>
+          </a:solidFill>
+          <a:ln w="12700">
+            <a:solidFill>
+              <a:srgbClr val="3949AB"/>
+            </a:solidFill>
+            <a:prstDash val="solid"/>
+          </a:ln>
+        </p:spPr>
+      </p:sp>
+      <p:sp>
+        <p:nvSpPr>
+          <p:cNvPr id="13" name="Shape 11"/>
+          <p:cNvSpPr/>
+          <p:nvPr/>
+        </p:nvSpPr>
+        <p:spPr>
+          <a:xfrm>
+            <a:off x="3255264" y="1371600"/>
+            <a:ext cx="402336" cy="402336"/>
+          </a:xfrm>
+          <a:prstGeom prst="rect">
+            <a:avLst/>
+          </a:prstGeom>
+          <a:solidFill>
+            <a:srgbClr val="3949AB"/>
+          </a:solidFill>
+          <a:ln w="12700">
+            <a:solidFill>
+              <a:srgbClr val="3949AB"/>
+            </a:solidFill>
+            <a:prstDash val="solid"/>
+          </a:ln>
+        </p:spPr>
+      </p:sp>
+      <p:sp>
+        <p:nvSpPr>
+          <p:cNvPr id="14" name="Text 12"/>
+          <p:cNvSpPr/>
+          <p:nvPr/>
+        </p:nvSpPr>
+        <p:spPr>
+          <a:xfrm>
+            <a:off x="3255264" y="1371600"/>
+            <a:ext cx="402336" cy="402336"/>
           </a:xfrm>
           <a:prstGeom prst="rect">
             <a:avLst/>
@@ -5523,7 +6355,46 @@
               <a:buNone/>
             </a:pPr>
             <a:r>
-              <a:rPr lang="en-US" sz="1100" b="1" spc="100" kern="0" dirty="0">
+              <a:rPr lang="en-US" sz="1300" b="1" dirty="0">
+                <a:solidFill>
+                  <a:srgbClr val="FFFFFF"/>
+                </a:solidFill>
+                <a:latin typeface="Georgia" pitchFamily="34" charset="0"/>
+                <a:ea typeface="Georgia" pitchFamily="34" charset="-122"/>
+                <a:cs typeface="Georgia" pitchFamily="34" charset="-120"/>
+              </a:rPr>
+              <a:t>02</a:t>
+            </a:r>
+            <a:endParaRPr lang="en-US" sz="1300" dirty="0"/>
+          </a:p>
+        </p:txBody>
+      </p:sp>
+      <p:sp>
+        <p:nvSpPr>
+          <p:cNvPr id="15" name="Text 13"/>
+          <p:cNvSpPr/>
+          <p:nvPr/>
+        </p:nvSpPr>
+        <p:spPr>
+          <a:xfrm>
+            <a:off x="5541264" y="914400"/>
+            <a:ext cx="347472" cy="384048"/>
+          </a:xfrm>
+          <a:prstGeom prst="rect">
+            <a:avLst/>
+          </a:prstGeom>
+          <a:noFill/>
+          <a:ln/>
+        </p:spPr>
+        <p:txBody>
+          <a:bodyPr wrap="square" lIns="0" tIns="0" rIns="0" bIns="0" rtlCol="0" anchor="ctr"/>
+          <a:lstStyle/>
+          <a:p>
+            <a:pPr algn="ctr" indent="0" marL="0">
+              <a:buNone/>
+            </a:pPr>
+            <a:r>
+              <a:rPr lang="en-US" sz="1600" b="1" dirty="0">
                 <a:solidFill>
                   <a:srgbClr val="FFFFFF"/>
                 </a:solidFill>
@@ -5531,47 +6402,185 @@
                 <a:ea typeface="Calibri" pitchFamily="34" charset="-122"/>
                 <a:cs typeface="Calibri" pitchFamily="34" charset="-120"/>
               </a:rPr>
-              <a:t>ADMIN PIPELINE  —  On Demand</a:t>
-            </a:r>
-            <a:endParaRPr lang="en-US" sz="1100" dirty="0"/>
-          </a:p>
-        </p:txBody>
-      </p:sp>
-      <p:sp>
-        <p:nvSpPr>
-          <p:cNvPr id="24" name="Shape 22"/>
-          <p:cNvSpPr/>
-          <p:nvPr/>
-        </p:nvSpPr>
-        <p:spPr>
-          <a:xfrm>
-            <a:off x="4892040" y="1463040"/>
-            <a:ext cx="411480" cy="411480"/>
-          </a:xfrm>
-          <a:prstGeom prst="rect">
-            <a:avLst/>
-          </a:prstGeom>
-          <a:solidFill>
-            <a:srgbClr val="00695C"/>
-          </a:solidFill>
-          <a:ln w="12700">
-            <a:solidFill>
-              <a:srgbClr val="00695C"/>
-            </a:solidFill>
-            <a:prstDash val="solid"/>
-          </a:ln>
-        </p:spPr>
-      </p:sp>
-      <p:sp>
-        <p:nvSpPr>
-          <p:cNvPr id="25" name="Text 23"/>
-          <p:cNvSpPr/>
-          <p:nvPr/>
-        </p:nvSpPr>
-        <p:spPr>
-          <a:xfrm>
-            <a:off x="4892040" y="1463040"/>
-            <a:ext cx="411480" cy="411480"/>
+              <a:t>✓</a:t>
+            </a:r>
+            <a:endParaRPr lang="en-US" sz="1600" dirty="0"/>
+          </a:p>
+        </p:txBody>
+      </p:sp>
+      <p:sp>
+        <p:nvSpPr>
+          <p:cNvPr id="16" name="Text 14"/>
+          <p:cNvSpPr/>
+          <p:nvPr/>
+        </p:nvSpPr>
+        <p:spPr>
+          <a:xfrm>
+            <a:off x="3163824" y="914400"/>
+            <a:ext cx="2331720" cy="384048"/>
+          </a:xfrm>
+          <a:prstGeom prst="rect">
+            <a:avLst/>
+          </a:prstGeom>
+          <a:noFill/>
+          <a:ln/>
+        </p:spPr>
+        <p:txBody>
+          <a:bodyPr wrap="square" lIns="101600" tIns="101600" rIns="101600" bIns="101600" rtlCol="0" anchor="ctr"/>
+          <a:lstStyle/>
+          <a:p>
+            <a:pPr indent="0" marL="0">
+              <a:buNone/>
+            </a:pPr>
+            <a:r>
+              <a:rPr lang="en-US" sz="1000" b="1" dirty="0">
+                <a:solidFill>
+                  <a:srgbClr val="FFFFFF"/>
+                </a:solidFill>
+                <a:latin typeface="Calibri" pitchFamily="34" charset="0"/>
+                <a:ea typeface="Calibri" pitchFamily="34" charset="-122"/>
+                <a:cs typeface="Calibri" pitchFamily="34" charset="-120"/>
+              </a:rPr>
+              <a:t>Measurable Outcomes</a:t>
+            </a:r>
+            <a:endParaRPr lang="en-US" sz="1000" dirty="0"/>
+          </a:p>
+        </p:txBody>
+      </p:sp>
+      <p:sp>
+        <p:nvSpPr>
+          <p:cNvPr id="17" name="Text 15"/>
+          <p:cNvSpPr/>
+          <p:nvPr/>
+        </p:nvSpPr>
+        <p:spPr>
+          <a:xfrm>
+            <a:off x="3758184" y="1371600"/>
+            <a:ext cx="2103120" cy="1325880"/>
+          </a:xfrm>
+          <a:prstGeom prst="rect">
+            <a:avLst/>
+          </a:prstGeom>
+          <a:noFill/>
+          <a:ln/>
+        </p:spPr>
+        <p:txBody>
+          <a:bodyPr wrap="square" rtlCol="0" anchor="t"/>
+          <a:lstStyle/>
+          <a:p>
+            <a:pPr indent="0" marL="0">
+              <a:lnSpc>
+                <a:spcPct val="130000"/>
+              </a:lnSpc>
+              <a:buNone/>
+            </a:pPr>
+            <a:r>
+              <a:rPr lang="en-US" sz="1050" dirty="0">
+                <a:solidFill>
+                  <a:srgbClr val="1C1E2E"/>
+                </a:solidFill>
+                <a:latin typeface="Calibri" pitchFamily="34" charset="0"/>
+                <a:ea typeface="Calibri" pitchFamily="34" charset="-122"/>
+                <a:cs typeface="Calibri" pitchFamily="34" charset="-120"/>
+              </a:rPr>
+              <a:t>Success is quantifiable: article completeness, graph node count, checklist coverage, sessions captured. No ambiguity in what 'done' looks like.</a:t>
+            </a:r>
+            <a:endParaRPr lang="en-US" sz="1050" dirty="0"/>
+          </a:p>
+        </p:txBody>
+      </p:sp>
+      <p:sp>
+        <p:nvSpPr>
+          <p:cNvPr id="18" name="Shape 16"/>
+          <p:cNvSpPr/>
+          <p:nvPr/>
+        </p:nvSpPr>
+        <p:spPr>
+          <a:xfrm>
+            <a:off x="6071616" y="914400"/>
+            <a:ext cx="2788920" cy="1874520"/>
+          </a:xfrm>
+          <a:prstGeom prst="rect">
+            <a:avLst/>
+          </a:prstGeom>
+          <a:solidFill>
+            <a:srgbClr val="FFFFFF"/>
+          </a:solidFill>
+          <a:ln w="12700">
+            <a:solidFill>
+              <a:srgbClr val="E0E3F0"/>
+            </a:solidFill>
+            <a:prstDash val="solid"/>
+          </a:ln>
+          <a:effectLst>
+            <a:outerShdw sx="100000" sy="100000" kx="0" ky="0" algn="bl" rotWithShape="0" blurRad="101600" dist="38100" dir="8100000">
+              <a:srgbClr val="000000">
+                <a:alpha val="12000"/>
+              </a:srgbClr>
+            </a:outerShdw>
+          </a:effectLst>
+        </p:spPr>
+      </p:sp>
+      <p:sp>
+        <p:nvSpPr>
+          <p:cNvPr id="19" name="Shape 17"/>
+          <p:cNvSpPr/>
+          <p:nvPr/>
+        </p:nvSpPr>
+        <p:spPr>
+          <a:xfrm>
+            <a:off x="6071616" y="914400"/>
+            <a:ext cx="2788920" cy="384048"/>
+          </a:xfrm>
+          <a:prstGeom prst="rect">
+            <a:avLst/>
+          </a:prstGeom>
+          <a:solidFill>
+            <a:srgbClr val="5C6BC0"/>
+          </a:solidFill>
+          <a:ln w="12700">
+            <a:solidFill>
+              <a:srgbClr val="5C6BC0"/>
+            </a:solidFill>
+            <a:prstDash val="solid"/>
+          </a:ln>
+        </p:spPr>
+      </p:sp>
+      <p:sp>
+        <p:nvSpPr>
+          <p:cNvPr id="20" name="Shape 18"/>
+          <p:cNvSpPr/>
+          <p:nvPr/>
+        </p:nvSpPr>
+        <p:spPr>
+          <a:xfrm>
+            <a:off x="6163056" y="1371600"/>
+            <a:ext cx="402336" cy="402336"/>
+          </a:xfrm>
+          <a:prstGeom prst="rect">
+            <a:avLst/>
+          </a:prstGeom>
+          <a:solidFill>
+            <a:srgbClr val="5C6BC0"/>
+          </a:solidFill>
+          <a:ln w="12700">
+            <a:solidFill>
+              <a:srgbClr val="5C6BC0"/>
+            </a:solidFill>
+            <a:prstDash val="solid"/>
+          </a:ln>
+        </p:spPr>
+      </p:sp>
+      <p:sp>
+        <p:nvSpPr>
+          <p:cNvPr id="21" name="Text 19"/>
+          <p:cNvSpPr/>
+          <p:nvPr/>
+        </p:nvSpPr>
+        <p:spPr>
+          <a:xfrm>
+            <a:off x="6163056" y="1371600"/>
+            <a:ext cx="402336" cy="402336"/>
           </a:xfrm>
           <a:prstGeom prst="rect">
             <a:avLst/>
@@ -5587,7 +6596,7 @@
               <a:buNone/>
             </a:pPr>
             <a:r>
-              <a:rPr lang="en-US" sz="1600" b="1" dirty="0">
+              <a:rPr lang="en-US" sz="1300" b="1" dirty="0">
                 <a:solidFill>
                   <a:srgbClr val="FFFFFF"/>
                 </a:solidFill>
@@ -5595,22 +6604,22 @@
                 <a:ea typeface="Georgia" pitchFamily="34" charset="-122"/>
                 <a:cs typeface="Georgia" pitchFamily="34" charset="-120"/>
               </a:rPr>
-              <a:t>4</a:t>
-            </a:r>
-            <a:endParaRPr lang="en-US" sz="1600" dirty="0"/>
-          </a:p>
-        </p:txBody>
-      </p:sp>
-      <p:sp>
-        <p:nvSpPr>
-          <p:cNvPr id="26" name="Text 24"/>
-          <p:cNvSpPr/>
-          <p:nvPr/>
-        </p:nvSpPr>
-        <p:spPr>
-          <a:xfrm>
-            <a:off x="5394960" y="1463040"/>
-            <a:ext cx="3291840" cy="256032"/>
+              <a:t>03</a:t>
+            </a:r>
+            <a:endParaRPr lang="en-US" sz="1300" dirty="0"/>
+          </a:p>
+        </p:txBody>
+      </p:sp>
+      <p:sp>
+        <p:nvSpPr>
+          <p:cNvPr id="22" name="Text 20"/>
+          <p:cNvSpPr/>
+          <p:nvPr/>
+        </p:nvSpPr>
+        <p:spPr>
+          <a:xfrm>
+            <a:off x="8449056" y="914400"/>
+            <a:ext cx="347472" cy="384048"/>
           </a:xfrm>
           <a:prstGeom prst="rect">
             <a:avLst/>
@@ -5622,58 +6631,58 @@
           <a:bodyPr wrap="square" lIns="0" tIns="0" rIns="0" bIns="0" rtlCol="0" anchor="ctr"/>
           <a:lstStyle/>
           <a:p>
-            <a:pPr indent="0" marL="0">
-              <a:buNone/>
-            </a:pPr>
-            <a:r>
-              <a:rPr lang="en-US" sz="1200" b="1" dirty="0">
-                <a:solidFill>
-                  <a:srgbClr val="0D1B4B"/>
+            <a:pPr algn="ctr" indent="0" marL="0">
+              <a:buNone/>
+            </a:pPr>
+            <a:r>
+              <a:rPr lang="en-US" sz="1600" b="1" dirty="0">
+                <a:solidFill>
+                  <a:srgbClr val="FFFFFF"/>
                 </a:solidFill>
                 <a:latin typeface="Calibri" pitchFamily="34" charset="0"/>
                 <a:ea typeface="Calibri" pitchFamily="34" charset="-122"/>
                 <a:cs typeface="Calibri" pitchFamily="34" charset="-120"/>
               </a:rPr>
-              <a:t>Admin KA Agent</a:t>
-            </a:r>
-            <a:endParaRPr lang="en-US" sz="1200" dirty="0"/>
-          </a:p>
-        </p:txBody>
-      </p:sp>
-      <p:sp>
-        <p:nvSpPr>
-          <p:cNvPr id="27" name="Text 25"/>
-          <p:cNvSpPr/>
-          <p:nvPr/>
-        </p:nvSpPr>
-        <p:spPr>
-          <a:xfrm>
-            <a:off x="5394960" y="1719072"/>
-            <a:ext cx="3291840" cy="347472"/>
-          </a:xfrm>
-          <a:prstGeom prst="rect">
-            <a:avLst/>
-          </a:prstGeom>
-          <a:noFill/>
-          <a:ln/>
-        </p:spPr>
-        <p:txBody>
-          <a:bodyPr wrap="square" lIns="0" tIns="0" rIns="0" bIns="0" rtlCol="0" anchor="ctr"/>
+              <a:t>✓</a:t>
+            </a:r>
+            <a:endParaRPr lang="en-US" sz="1600" dirty="0"/>
+          </a:p>
+        </p:txBody>
+      </p:sp>
+      <p:sp>
+        <p:nvSpPr>
+          <p:cNvPr id="23" name="Text 21"/>
+          <p:cNvSpPr/>
+          <p:nvPr/>
+        </p:nvSpPr>
+        <p:spPr>
+          <a:xfrm>
+            <a:off x="6071616" y="914400"/>
+            <a:ext cx="2331720" cy="384048"/>
+          </a:xfrm>
+          <a:prstGeom prst="rect">
+            <a:avLst/>
+          </a:prstGeom>
+          <a:noFill/>
+          <a:ln/>
+        </p:spPr>
+        <p:txBody>
+          <a:bodyPr wrap="square" lIns="101600" tIns="101600" rIns="101600" bIns="101600" rtlCol="0" anchor="ctr"/>
           <a:lstStyle/>
           <a:p>
             <a:pPr indent="0" marL="0">
               <a:buNone/>
             </a:pPr>
             <a:r>
-              <a:rPr lang="en-US" sz="1000" dirty="0">
-                <a:solidFill>
-                  <a:srgbClr val="6B7280"/>
+              <a:rPr lang="en-US" sz="1000" b="1" dirty="0">
+                <a:solidFill>
+                  <a:srgbClr val="FFFFFF"/>
                 </a:solidFill>
                 <a:latin typeface="Calibri" pitchFamily="34" charset="0"/>
                 <a:ea typeface="Calibri" pitchFamily="34" charset="-122"/>
                 <a:cs typeface="Calibri" pitchFamily="34" charset="-120"/>
               </a:rPr>
-              <a:t>Consolidates all sessions into one authoritative Knowledge Article</a:t>
+              <a:t>Current System is Slow</a:t>
             </a:r>
             <a:endParaRPr lang="en-US" sz="1000" dirty="0"/>
           </a:p>
@@ -5681,39 +6690,88 @@
       </p:sp>
       <p:sp>
         <p:nvSpPr>
-          <p:cNvPr id="28" name="Shape 26"/>
-          <p:cNvSpPr/>
-          <p:nvPr/>
-        </p:nvSpPr>
-        <p:spPr>
-          <a:xfrm>
-            <a:off x="5029200" y="1965960"/>
-            <a:ext cx="128016" cy="411480"/>
-          </a:xfrm>
-          <a:prstGeom prst="rect">
-            <a:avLst/>
-          </a:prstGeom>
-          <a:solidFill>
-            <a:srgbClr val="00897B"/>
-          </a:solidFill>
-          <a:ln w="12700">
-            <a:solidFill>
-              <a:srgbClr val="00897B"/>
-            </a:solidFill>
-            <a:prstDash val="solid"/>
-          </a:ln>
-        </p:spPr>
-      </p:sp>
-      <p:sp>
-        <p:nvSpPr>
-          <p:cNvPr id="29" name="Shape 27"/>
-          <p:cNvSpPr/>
-          <p:nvPr/>
-        </p:nvSpPr>
-        <p:spPr>
-          <a:xfrm>
-            <a:off x="4892040" y="2423160"/>
-            <a:ext cx="411480" cy="411480"/>
+          <p:cNvPr id="24" name="Text 22"/>
+          <p:cNvSpPr/>
+          <p:nvPr/>
+        </p:nvSpPr>
+        <p:spPr>
+          <a:xfrm>
+            <a:off x="6665976" y="1371600"/>
+            <a:ext cx="2103120" cy="1325880"/>
+          </a:xfrm>
+          <a:prstGeom prst="rect">
+            <a:avLst/>
+          </a:prstGeom>
+          <a:noFill/>
+          <a:ln/>
+        </p:spPr>
+        <p:txBody>
+          <a:bodyPr wrap="square" rtlCol="0" anchor="t"/>
+          <a:lstStyle/>
+          <a:p>
+            <a:pPr indent="0" marL="0">
+              <a:lnSpc>
+                <a:spcPct val="130000"/>
+              </a:lnSpc>
+              <a:buNone/>
+            </a:pPr>
+            <a:r>
+              <a:rPr lang="en-US" sz="1050" dirty="0">
+                <a:solidFill>
+                  <a:srgbClr val="1C1E2E"/>
+                </a:solidFill>
+                <a:latin typeface="Calibri" pitchFamily="34" charset="0"/>
+                <a:ea typeface="Calibri" pitchFamily="34" charset="-122"/>
+                <a:cs typeface="Calibri" pitchFamily="34" charset="-120"/>
+              </a:rPr>
+              <a:t>Manual post-event documentation takes days or weeks — if it happens at all. The agent captures the same knowledge in 5 minutes during the event.</a:t>
+            </a:r>
+            <a:endParaRPr lang="en-US" sz="1050" dirty="0"/>
+          </a:p>
+        </p:txBody>
+      </p:sp>
+      <p:sp>
+        <p:nvSpPr>
+          <p:cNvPr id="25" name="Shape 23"/>
+          <p:cNvSpPr/>
+          <p:nvPr/>
+        </p:nvSpPr>
+        <p:spPr>
+          <a:xfrm>
+            <a:off x="256032" y="2926080"/>
+            <a:ext cx="2788920" cy="1874520"/>
+          </a:xfrm>
+          <a:prstGeom prst="rect">
+            <a:avLst/>
+          </a:prstGeom>
+          <a:solidFill>
+            <a:srgbClr val="FFFFFF"/>
+          </a:solidFill>
+          <a:ln w="12700">
+            <a:solidFill>
+              <a:srgbClr val="E0E3F0"/>
+            </a:solidFill>
+            <a:prstDash val="solid"/>
+          </a:ln>
+          <a:effectLst>
+            <a:outerShdw sx="100000" sy="100000" kx="0" ky="0" algn="bl" rotWithShape="0" blurRad="101600" dist="38100" dir="8100000">
+              <a:srgbClr val="000000">
+                <a:alpha val="12000"/>
+              </a:srgbClr>
+            </a:outerShdw>
+          </a:effectLst>
+        </p:spPr>
+      </p:sp>
+      <p:sp>
+        <p:nvSpPr>
+          <p:cNvPr id="26" name="Shape 24"/>
+          <p:cNvSpPr/>
+          <p:nvPr/>
+        </p:nvSpPr>
+        <p:spPr>
+          <a:xfrm>
+            <a:off x="256032" y="2926080"/>
+            <a:ext cx="2788920" cy="384048"/>
           </a:xfrm>
           <a:prstGeom prst="rect">
             <a:avLst/>
@@ -5731,14 +6789,39 @@
       </p:sp>
       <p:sp>
         <p:nvSpPr>
-          <p:cNvPr id="30" name="Text 28"/>
-          <p:cNvSpPr/>
-          <p:nvPr/>
-        </p:nvSpPr>
-        <p:spPr>
-          <a:xfrm>
-            <a:off x="4892040" y="2423160"/>
-            <a:ext cx="411480" cy="411480"/>
+          <p:cNvPr id="27" name="Shape 25"/>
+          <p:cNvSpPr/>
+          <p:nvPr/>
+        </p:nvSpPr>
+        <p:spPr>
+          <a:xfrm>
+            <a:off x="347472" y="3383280"/>
+            <a:ext cx="402336" cy="402336"/>
+          </a:xfrm>
+          <a:prstGeom prst="rect">
+            <a:avLst/>
+          </a:prstGeom>
+          <a:solidFill>
+            <a:srgbClr val="00695C"/>
+          </a:solidFill>
+          <a:ln w="12700">
+            <a:solidFill>
+              <a:srgbClr val="00695C"/>
+            </a:solidFill>
+            <a:prstDash val="solid"/>
+          </a:ln>
+        </p:spPr>
+      </p:sp>
+      <p:sp>
+        <p:nvSpPr>
+          <p:cNvPr id="28" name="Text 26"/>
+          <p:cNvSpPr/>
+          <p:nvPr/>
+        </p:nvSpPr>
+        <p:spPr>
+          <a:xfrm>
+            <a:off x="347472" y="3383280"/>
+            <a:ext cx="402336" cy="402336"/>
           </a:xfrm>
           <a:prstGeom prst="rect">
             <a:avLst/>
@@ -5754,7 +6837,7 @@
               <a:buNone/>
             </a:pPr>
             <a:r>
-              <a:rPr lang="en-US" sz="1600" b="1" dirty="0">
+              <a:rPr lang="en-US" sz="1300" b="1" dirty="0">
                 <a:solidFill>
                   <a:srgbClr val="FFFFFF"/>
                 </a:solidFill>
@@ -5762,22 +6845,22 @@
                 <a:ea typeface="Georgia" pitchFamily="34" charset="-122"/>
                 <a:cs typeface="Georgia" pitchFamily="34" charset="-120"/>
               </a:rPr>
-              <a:t>5</a:t>
-            </a:r>
-            <a:endParaRPr lang="en-US" sz="1600" dirty="0"/>
-          </a:p>
-        </p:txBody>
-      </p:sp>
-      <p:sp>
-        <p:nvSpPr>
-          <p:cNvPr id="31" name="Text 29"/>
-          <p:cNvSpPr/>
-          <p:nvPr/>
-        </p:nvSpPr>
-        <p:spPr>
-          <a:xfrm>
-            <a:off x="5394960" y="2423160"/>
-            <a:ext cx="3291840" cy="256032"/>
+              <a:t>04</a:t>
+            </a:r>
+            <a:endParaRPr lang="en-US" sz="1300" dirty="0"/>
+          </a:p>
+        </p:txBody>
+      </p:sp>
+      <p:sp>
+        <p:nvSpPr>
+          <p:cNvPr id="29" name="Text 27"/>
+          <p:cNvSpPr/>
+          <p:nvPr/>
+        </p:nvSpPr>
+        <p:spPr>
+          <a:xfrm>
+            <a:off x="2633472" y="2926080"/>
+            <a:ext cx="347472" cy="384048"/>
           </a:xfrm>
           <a:prstGeom prst="rect">
             <a:avLst/>
@@ -5789,58 +6872,58 @@
           <a:bodyPr wrap="square" lIns="0" tIns="0" rIns="0" bIns="0" rtlCol="0" anchor="ctr"/>
           <a:lstStyle/>
           <a:p>
-            <a:pPr indent="0" marL="0">
-              <a:buNone/>
-            </a:pPr>
-            <a:r>
-              <a:rPr lang="en-US" sz="1200" b="1" dirty="0">
-                <a:solidFill>
-                  <a:srgbClr val="0D1B4B"/>
+            <a:pPr algn="ctr" indent="0" marL="0">
+              <a:buNone/>
+            </a:pPr>
+            <a:r>
+              <a:rPr lang="en-US" sz="1600" b="1" dirty="0">
+                <a:solidFill>
+                  <a:srgbClr val="FFFFFF"/>
                 </a:solidFill>
                 <a:latin typeface="Calibri" pitchFamily="34" charset="0"/>
                 <a:ea typeface="Calibri" pitchFamily="34" charset="-122"/>
                 <a:cs typeface="Calibri" pitchFamily="34" charset="-120"/>
               </a:rPr>
-              <a:t>Admin Checklist Agent</a:t>
-            </a:r>
-            <a:endParaRPr lang="en-US" sz="1200" dirty="0"/>
-          </a:p>
-        </p:txBody>
-      </p:sp>
-      <p:sp>
-        <p:nvSpPr>
-          <p:cNvPr id="32" name="Text 30"/>
-          <p:cNvSpPr/>
-          <p:nvPr/>
-        </p:nvSpPr>
-        <p:spPr>
-          <a:xfrm>
-            <a:off x="5394960" y="2679192"/>
-            <a:ext cx="3291840" cy="347472"/>
-          </a:xfrm>
-          <a:prstGeom prst="rect">
-            <a:avLst/>
-          </a:prstGeom>
-          <a:noFill/>
-          <a:ln/>
-        </p:spPr>
-        <p:txBody>
-          <a:bodyPr wrap="square" lIns="0" tIns="0" rIns="0" bIns="0" rtlCol="0" anchor="ctr"/>
+              <a:t>✓</a:t>
+            </a:r>
+            <a:endParaRPr lang="en-US" sz="1600" dirty="0"/>
+          </a:p>
+        </p:txBody>
+      </p:sp>
+      <p:sp>
+        <p:nvSpPr>
+          <p:cNvPr id="30" name="Text 28"/>
+          <p:cNvSpPr/>
+          <p:nvPr/>
+        </p:nvSpPr>
+        <p:spPr>
+          <a:xfrm>
+            <a:off x="256032" y="2926080"/>
+            <a:ext cx="2331720" cy="384048"/>
+          </a:xfrm>
+          <a:prstGeom prst="rect">
+            <a:avLst/>
+          </a:prstGeom>
+          <a:noFill/>
+          <a:ln/>
+        </p:spPr>
+        <p:txBody>
+          <a:bodyPr wrap="square" lIns="101600" tIns="101600" rIns="101600" bIns="101600" rtlCol="0" anchor="ctr"/>
           <a:lstStyle/>
           <a:p>
             <a:pPr indent="0" marL="0">
               <a:buNone/>
             </a:pPr>
             <a:r>
-              <a:rPr lang="en-US" sz="1000" dirty="0">
-                <a:solidFill>
-                  <a:srgbClr val="6B7280"/>
+              <a:rPr lang="en-US" sz="1000" b="1" dirty="0">
+                <a:solidFill>
+                  <a:srgbClr val="FFFFFF"/>
                 </a:solidFill>
                 <a:latin typeface="Calibri" pitchFamily="34" charset="0"/>
                 <a:ea typeface="Calibri" pitchFamily="34" charset="-122"/>
                 <a:cs typeface="Calibri" pitchFamily="34" charset="-120"/>
               </a:rPr>
-              <a:t>De-duplicated cross-session best practices checklist with [CRITICAL] tags</a:t>
+              <a:t>Current System is Expensive</a:t>
             </a:r>
             <a:endParaRPr lang="en-US" sz="1000" dirty="0"/>
           </a:p>
@@ -5848,24 +6931,98 @@
       </p:sp>
       <p:sp>
         <p:nvSpPr>
+          <p:cNvPr id="31" name="Text 29"/>
+          <p:cNvSpPr/>
+          <p:nvPr/>
+        </p:nvSpPr>
+        <p:spPr>
+          <a:xfrm>
+            <a:off x="850392" y="3383280"/>
+            <a:ext cx="2103120" cy="1325880"/>
+          </a:xfrm>
+          <a:prstGeom prst="rect">
+            <a:avLst/>
+          </a:prstGeom>
+          <a:noFill/>
+          <a:ln/>
+        </p:spPr>
+        <p:txBody>
+          <a:bodyPr wrap="square" rtlCol="0" anchor="t"/>
+          <a:lstStyle/>
+          <a:p>
+            <a:pPr indent="0" marL="0">
+              <a:lnSpc>
+                <a:spcPct val="130000"/>
+              </a:lnSpc>
+              <a:buNone/>
+            </a:pPr>
+            <a:r>
+              <a:rPr lang="en-US" sz="1050" dirty="0">
+                <a:solidFill>
+                  <a:srgbClr val="1C1E2E"/>
+                </a:solidFill>
+                <a:latin typeface="Calibri" pitchFamily="34" charset="0"/>
+                <a:ea typeface="Calibri" pitchFamily="34" charset="-122"/>
+                <a:cs typeface="Calibri" pitchFamily="34" charset="-120"/>
+              </a:rPr>
+              <a:t>Undocumented lessons lead to repeated batch failures. Each rejected commercial batch costs millions. Agentic capture breaks the repeat-failure cycle.</a:t>
+            </a:r>
+            <a:endParaRPr lang="en-US" sz="1050" dirty="0"/>
+          </a:p>
+        </p:txBody>
+      </p:sp>
+      <p:sp>
+        <p:nvSpPr>
+          <p:cNvPr id="32" name="Shape 30"/>
+          <p:cNvSpPr/>
+          <p:nvPr/>
+        </p:nvSpPr>
+        <p:spPr>
+          <a:xfrm>
+            <a:off x="3163824" y="2926080"/>
+            <a:ext cx="2788920" cy="1874520"/>
+          </a:xfrm>
+          <a:prstGeom prst="rect">
+            <a:avLst/>
+          </a:prstGeom>
+          <a:solidFill>
+            <a:srgbClr val="FFFFFF"/>
+          </a:solidFill>
+          <a:ln w="12700">
+            <a:solidFill>
+              <a:srgbClr val="E0E3F0"/>
+            </a:solidFill>
+            <a:prstDash val="solid"/>
+          </a:ln>
+          <a:effectLst>
+            <a:outerShdw sx="100000" sy="100000" kx="0" ky="0" algn="bl" rotWithShape="0" blurRad="101600" dist="38100" dir="8100000">
+              <a:srgbClr val="000000">
+                <a:alpha val="12000"/>
+              </a:srgbClr>
+            </a:outerShdw>
+          </a:effectLst>
+        </p:spPr>
+      </p:sp>
+      <p:sp>
+        <p:nvSpPr>
           <p:cNvPr id="33" name="Shape 31"/>
           <p:cNvSpPr/>
           <p:nvPr/>
         </p:nvSpPr>
         <p:spPr>
           <a:xfrm>
-            <a:off x="5029200" y="2926080"/>
-            <a:ext cx="128016" cy="411480"/>
-          </a:xfrm>
-          <a:prstGeom prst="rect">
-            <a:avLst/>
-          </a:prstGeom>
-          <a:solidFill>
-            <a:srgbClr val="00897B"/>
-          </a:solidFill>
-          <a:ln w="12700">
-            <a:solidFill>
-              <a:srgbClr val="00897B"/>
+            <a:off x="3163824" y="2926080"/>
+            <a:ext cx="2788920" cy="384048"/>
+          </a:xfrm>
+          <a:prstGeom prst="rect">
+            <a:avLst/>
+          </a:prstGeom>
+          <a:solidFill>
+            <a:srgbClr val="F57F17"/>
+          </a:solidFill>
+          <a:ln w="12700">
+            <a:solidFill>
+              <a:srgbClr val="F57F17"/>
             </a:solidFill>
             <a:prstDash val="solid"/>
           </a:ln>
@@ -5879,18 +7036,18 @@
         </p:nvSpPr>
         <p:spPr>
           <a:xfrm>
-            <a:off x="4892040" y="3383280"/>
-            <a:ext cx="411480" cy="411480"/>
-          </a:xfrm>
-          <a:prstGeom prst="rect">
-            <a:avLst/>
-          </a:prstGeom>
-          <a:solidFill>
-            <a:srgbClr val="00695C"/>
-          </a:solidFill>
-          <a:ln w="12700">
-            <a:solidFill>
-              <a:srgbClr val="00695C"/>
+            <a:off x="3255264" y="3383280"/>
+            <a:ext cx="402336" cy="402336"/>
+          </a:xfrm>
+          <a:prstGeom prst="rect">
+            <a:avLst/>
+          </a:prstGeom>
+          <a:solidFill>
+            <a:srgbClr val="F57F17"/>
+          </a:solidFill>
+          <a:ln w="12700">
+            <a:solidFill>
+              <a:srgbClr val="F57F17"/>
             </a:solidFill>
             <a:prstDash val="solid"/>
           </a:ln>
@@ -5904,8 +7061,8 @@
         </p:nvSpPr>
         <p:spPr>
           <a:xfrm>
-            <a:off x="4892040" y="3383280"/>
-            <a:ext cx="411480" cy="411480"/>
+            <a:off x="3255264" y="3383280"/>
+            <a:ext cx="402336" cy="402336"/>
           </a:xfrm>
           <a:prstGeom prst="rect">
             <a:avLst/>
@@ -5921,7 +7078,7 @@
               <a:buNone/>
             </a:pPr>
             <a:r>
-              <a:rPr lang="en-US" sz="1600" b="1" dirty="0">
+              <a:rPr lang="en-US" sz="1300" b="1" dirty="0">
                 <a:solidFill>
                   <a:srgbClr val="FFFFFF"/>
                 </a:solidFill>
@@ -5929,9 +7086,9 @@
                 <a:ea typeface="Georgia" pitchFamily="34" charset="-122"/>
                 <a:cs typeface="Georgia" pitchFamily="34" charset="-120"/>
               </a:rPr>
-              <a:t>6</a:t>
-            </a:r>
-            <a:endParaRPr lang="en-US" sz="1600" dirty="0"/>
+              <a:t>05</a:t>
+            </a:r>
+            <a:endParaRPr lang="en-US" sz="1300" dirty="0"/>
           </a:p>
         </p:txBody>
       </p:sp>
@@ -5943,8 +7100,8 @@
         </p:nvSpPr>
         <p:spPr>
           <a:xfrm>
-            <a:off x="5394960" y="3383280"/>
-            <a:ext cx="3291840" cy="256032"/>
+            <a:off x="5541264" y="2926080"/>
+            <a:ext cx="347472" cy="384048"/>
           </a:xfrm>
           <a:prstGeom prst="rect">
             <a:avLst/>
@@ -5956,21 +7113,21 @@
           <a:bodyPr wrap="square" lIns="0" tIns="0" rIns="0" bIns="0" rtlCol="0" anchor="ctr"/>
           <a:lstStyle/>
           <a:p>
-            <a:pPr indent="0" marL="0">
-              <a:buNone/>
-            </a:pPr>
-            <a:r>
-              <a:rPr lang="en-US" sz="1200" b="1" dirty="0">
-                <a:solidFill>
-                  <a:srgbClr val="0D1B4B"/>
+            <a:pPr algn="ctr" indent="0" marL="0">
+              <a:buNone/>
+            </a:pPr>
+            <a:r>
+              <a:rPr lang="en-US" sz="1600" b="1" dirty="0">
+                <a:solidFill>
+                  <a:srgbClr val="FFFFFF"/>
                 </a:solidFill>
                 <a:latin typeface="Calibri" pitchFamily="34" charset="0"/>
                 <a:ea typeface="Calibri" pitchFamily="34" charset="-122"/>
                 <a:cs typeface="Calibri" pitchFamily="34" charset="-120"/>
               </a:rPr>
-              <a:t>Admin Graph Agent</a:t>
-            </a:r>
-            <a:endParaRPr lang="en-US" sz="1200" dirty="0"/>
+              <a:t>✓</a:t>
+            </a:r>
+            <a:endParaRPr lang="en-US" sz="1600" dirty="0"/>
           </a:p>
         </p:txBody>
       </p:sp>
@@ -5982,32 +7139,32 @@
         </p:nvSpPr>
         <p:spPr>
           <a:xfrm>
-            <a:off x="5394960" y="3639312"/>
-            <a:ext cx="3291840" cy="347472"/>
-          </a:xfrm>
-          <a:prstGeom prst="rect">
-            <a:avLst/>
-          </a:prstGeom>
-          <a:noFill/>
-          <a:ln/>
-        </p:spPr>
-        <p:txBody>
-          <a:bodyPr wrap="square" lIns="0" tIns="0" rIns="0" bIns="0" rtlCol="0" anchor="ctr"/>
+            <a:off x="3163824" y="2926080"/>
+            <a:ext cx="2331720" cy="384048"/>
+          </a:xfrm>
+          <a:prstGeom prst="rect">
+            <a:avLst/>
+          </a:prstGeom>
+          <a:noFill/>
+          <a:ln/>
+        </p:spPr>
+        <p:txBody>
+          <a:bodyPr wrap="square" lIns="101600" tIns="101600" rIns="101600" bIns="101600" rtlCol="0" anchor="ctr"/>
           <a:lstStyle/>
           <a:p>
             <a:pPr indent="0" marL="0">
               <a:buNone/>
             </a:pPr>
             <a:r>
-              <a:rPr lang="en-US" sz="1000" dirty="0">
-                <a:solidFill>
-                  <a:srgbClr val="6B7280"/>
+              <a:rPr lang="en-US" sz="1000" b="1" dirty="0">
+                <a:solidFill>
+                  <a:srgbClr val="FFFFFF"/>
                 </a:solidFill>
                 <a:latin typeface="Calibri" pitchFamily="34" charset="0"/>
                 <a:ea typeface="Calibri" pitchFamily="34" charset="-122"/>
                 <a:cs typeface="Calibri" pitchFamily="34" charset="-120"/>
               </a:rPr>
-              <a:t>Unified knowledge graph — SQL merge or full LLM re-extraction</a:t>
+              <a:t>Multi-Step Logic with Clear Handoffs</a:t>
             </a:r>
             <a:endParaRPr lang="en-US" sz="1000" dirty="0"/>
           </a:p>
@@ -6015,67 +7172,77 @@
       </p:sp>
       <p:sp>
         <p:nvSpPr>
-          <p:cNvPr id="38" name="Shape 36"/>
-          <p:cNvSpPr/>
-          <p:nvPr/>
-        </p:nvSpPr>
-        <p:spPr>
-          <a:xfrm>
-            <a:off x="274320" y="4572000"/>
-            <a:ext cx="8595360" cy="274320"/>
-          </a:xfrm>
-          <a:prstGeom prst="rect">
-            <a:avLst/>
-          </a:prstGeom>
-          <a:solidFill>
-            <a:srgbClr val="E8EAF6"/>
-          </a:solidFill>
-          <a:ln w="12700">
-            <a:solidFill>
-              <a:srgbClr val="E8EAF6"/>
-            </a:solidFill>
-            <a:prstDash val="solid"/>
-          </a:ln>
-        </p:spPr>
-      </p:sp>
-      <p:sp>
-        <p:nvSpPr>
-          <p:cNvPr id="39" name="Text 37"/>
-          <p:cNvSpPr/>
-          <p:nvPr/>
-        </p:nvSpPr>
-        <p:spPr>
-          <a:xfrm>
-            <a:off x="274320" y="4572000"/>
-            <a:ext cx="8595360" cy="274320"/>
-          </a:xfrm>
-          <a:prstGeom prst="rect">
-            <a:avLst/>
-          </a:prstGeom>
-          <a:noFill/>
-          <a:ln/>
-        </p:spPr>
-        <p:txBody>
-          <a:bodyPr wrap="square" lIns="0" tIns="0" rIns="0" bIns="0" rtlCol="0" anchor="ctr"/>
-          <a:lstStyle/>
-          <a:p>
-            <a:pPr algn="ctr" indent="0" marL="0">
-              <a:buNone/>
-            </a:pPr>
-            <a:r>
-              <a:rPr lang="en-US" sz="1000" b="1" dirty="0">
-                <a:solidFill>
-                  <a:srgbClr val="0D1B4B"/>
+          <p:cNvPr id="38" name="Text 36"/>
+          <p:cNvSpPr/>
+          <p:nvPr/>
+        </p:nvSpPr>
+        <p:spPr>
+          <a:xfrm>
+            <a:off x="3758184" y="3383280"/>
+            <a:ext cx="2103120" cy="1325880"/>
+          </a:xfrm>
+          <a:prstGeom prst="rect">
+            <a:avLst/>
+          </a:prstGeom>
+          <a:noFill/>
+          <a:ln/>
+        </p:spPr>
+        <p:txBody>
+          <a:bodyPr wrap="square" rtlCol="0" anchor="t"/>
+          <a:lstStyle/>
+          <a:p>
+            <a:pPr indent="0" marL="0">
+              <a:lnSpc>
+                <a:spcPct val="130000"/>
+              </a:lnSpc>
+              <a:buNone/>
+            </a:pPr>
+            <a:r>
+              <a:rPr lang="en-US" sz="1050" dirty="0">
+                <a:solidFill>
+                  <a:srgbClr val="1C1E2E"/>
                 </a:solidFill>
                 <a:latin typeface="Calibri" pitchFamily="34" charset="0"/>
                 <a:ea typeface="Calibri" pitchFamily="34" charset="-122"/>
                 <a:cs typeface="Calibri" pitchFamily="34" charset="-120"/>
               </a:rPr>
-              <a:t>Tech Stack:  Claude API (Anthropic)  |  FastAPI  |  WebSocket  |  SQLite  |  vis-network  |  ngrok  |  GitHub</a:t>
-            </a:r>
-            <a:endParaRPr lang="en-US" sz="1000" dirty="0"/>
-          </a:p>
-        </p:txBody>
+              <a:t>Interview → Synthesis → Graph → Admin is a defined pipeline with structured inputs/outputs at each stage — ideal for an agent chain.</a:t>
+            </a:r>
+            <a:endParaRPr lang="en-US" sz="1050" dirty="0"/>
+          </a:p>
+        </p:txBody>
+      </p:sp>
+      <p:sp>
+        <p:nvSpPr>
+          <p:cNvPr id="39" name="Shape 37"/>
+          <p:cNvSpPr/>
+          <p:nvPr/>
+        </p:nvSpPr>
+        <p:spPr>
+          <a:xfrm>
+            <a:off x="6071616" y="2926080"/>
+            <a:ext cx="2788920" cy="1874520"/>
+          </a:xfrm>
+          <a:prstGeom prst="rect">
+            <a:avLst/>
+          </a:prstGeom>
+          <a:solidFill>
+            <a:srgbClr val="FFFFFF"/>
+          </a:solidFill>
+          <a:ln w="12700">
+            <a:solidFill>
+              <a:srgbClr val="E0E3F0"/>
+            </a:solidFill>
+            <a:prstDash val="solid"/>
+          </a:ln>
+          <a:effectLst>
+            <a:outerShdw sx="100000" sy="100000" kx="0" ky="0" algn="bl" rotWithShape="0" blurRad="101600" dist="38100" dir="8100000">
+              <a:srgbClr val="000000">
+                <a:alpha val="12000"/>
+              </a:srgbClr>
+            </a:outerShdw>
+          </a:effectLst>
+        </p:spPr>
       </p:sp>
       <p:sp>
         <p:nvSpPr>
@@ -6085,33 +7252,58 @@
         </p:nvSpPr>
         <p:spPr>
           <a:xfrm>
-            <a:off x="0" y="4892040"/>
-            <a:ext cx="9144000" cy="251460"/>
-          </a:xfrm>
-          <a:prstGeom prst="rect">
-            <a:avLst/>
-          </a:prstGeom>
-          <a:solidFill>
-            <a:srgbClr val="E8EAF6"/>
-          </a:solidFill>
-          <a:ln w="12700">
-            <a:solidFill>
-              <a:srgbClr val="E8EAF6"/>
-            </a:solidFill>
-            <a:prstDash val="solid"/>
-          </a:ln>
-        </p:spPr>
-      </p:sp>
-      <p:sp>
-        <p:nvSpPr>
-          <p:cNvPr id="41" name="Text 39"/>
-          <p:cNvSpPr/>
-          <p:nvPr/>
-        </p:nvSpPr>
-        <p:spPr>
-          <a:xfrm>
-            <a:off x="274320" y="4892040"/>
-            <a:ext cx="8595360" cy="251460"/>
+            <a:off x="6071616" y="2926080"/>
+            <a:ext cx="2788920" cy="384048"/>
+          </a:xfrm>
+          <a:prstGeom prst="rect">
+            <a:avLst/>
+          </a:prstGeom>
+          <a:solidFill>
+            <a:srgbClr val="2E7D32"/>
+          </a:solidFill>
+          <a:ln w="12700">
+            <a:solidFill>
+              <a:srgbClr val="2E7D32"/>
+            </a:solidFill>
+            <a:prstDash val="solid"/>
+          </a:ln>
+        </p:spPr>
+      </p:sp>
+      <p:sp>
+        <p:nvSpPr>
+          <p:cNvPr id="41" name="Shape 39"/>
+          <p:cNvSpPr/>
+          <p:nvPr/>
+        </p:nvSpPr>
+        <p:spPr>
+          <a:xfrm>
+            <a:off x="6163056" y="3383280"/>
+            <a:ext cx="402336" cy="402336"/>
+          </a:xfrm>
+          <a:prstGeom prst="rect">
+            <a:avLst/>
+          </a:prstGeom>
+          <a:solidFill>
+            <a:srgbClr val="2E7D32"/>
+          </a:solidFill>
+          <a:ln w="12700">
+            <a:solidFill>
+              <a:srgbClr val="2E7D32"/>
+            </a:solidFill>
+            <a:prstDash val="solid"/>
+          </a:ln>
+        </p:spPr>
+      </p:sp>
+      <p:sp>
+        <p:nvSpPr>
+          <p:cNvPr id="42" name="Text 40"/>
+          <p:cNvSpPr/>
+          <p:nvPr/>
+        </p:nvSpPr>
+        <p:spPr>
+          <a:xfrm>
+            <a:off x="6163056" y="3383280"/>
+            <a:ext cx="402336" cy="402336"/>
           </a:xfrm>
           <a:prstGeom prst="rect">
             <a:avLst/>
@@ -6123,19 +7315,203 @@
           <a:bodyPr wrap="square" lIns="0" tIns="0" rIns="0" bIns="0" rtlCol="0" anchor="ctr"/>
           <a:lstStyle/>
           <a:p>
-            <a:pPr indent="0" marL="0">
-              <a:buNone/>
-            </a:pPr>
-            <a:r>
-              <a:rPr lang="en-US" sz="900" dirty="0">
-                <a:solidFill>
-                  <a:srgbClr val="6B7280"/>
+            <a:pPr algn="ctr" indent="0" marL="0">
+              <a:buNone/>
+            </a:pPr>
+            <a:r>
+              <a:rPr lang="en-US" sz="1300" b="1" dirty="0">
+                <a:solidFill>
+                  <a:srgbClr val="FFFFFF"/>
+                </a:solidFill>
+                <a:latin typeface="Georgia" pitchFamily="34" charset="0"/>
+                <a:ea typeface="Georgia" pitchFamily="34" charset="-122"/>
+                <a:cs typeface="Georgia" pitchFamily="34" charset="-120"/>
+              </a:rPr>
+              <a:t>06</a:t>
+            </a:r>
+            <a:endParaRPr lang="en-US" sz="1300" dirty="0"/>
+          </a:p>
+        </p:txBody>
+      </p:sp>
+      <p:sp>
+        <p:nvSpPr>
+          <p:cNvPr id="43" name="Text 41"/>
+          <p:cNvSpPr/>
+          <p:nvPr/>
+        </p:nvSpPr>
+        <p:spPr>
+          <a:xfrm>
+            <a:off x="8449056" y="2926080"/>
+            <a:ext cx="347472" cy="384048"/>
+          </a:xfrm>
+          <a:prstGeom prst="rect">
+            <a:avLst/>
+          </a:prstGeom>
+          <a:noFill/>
+          <a:ln/>
+        </p:spPr>
+        <p:txBody>
+          <a:bodyPr wrap="square" lIns="0" tIns="0" rIns="0" bIns="0" rtlCol="0" anchor="ctr"/>
+          <a:lstStyle/>
+          <a:p>
+            <a:pPr algn="ctr" indent="0" marL="0">
+              <a:buNone/>
+            </a:pPr>
+            <a:r>
+              <a:rPr lang="en-US" sz="1600" b="1" dirty="0">
+                <a:solidFill>
+                  <a:srgbClr val="FFFFFF"/>
                 </a:solidFill>
                 <a:latin typeface="Calibri" pitchFamily="34" charset="0"/>
                 <a:ea typeface="Calibri" pitchFamily="34" charset="-122"/>
                 <a:cs typeface="Calibri" pitchFamily="34" charset="-120"/>
               </a:rPr>
-              <a:t>TTK Companion Agent Pipeline  |  Executive Briefing  |  2026</a:t>
+              <a:t>✓</a:t>
+            </a:r>
+            <a:endParaRPr lang="en-US" sz="1600" dirty="0"/>
+          </a:p>
+        </p:txBody>
+      </p:sp>
+      <p:sp>
+        <p:nvSpPr>
+          <p:cNvPr id="44" name="Text 42"/>
+          <p:cNvSpPr/>
+          <p:nvPr/>
+        </p:nvSpPr>
+        <p:spPr>
+          <a:xfrm>
+            <a:off x="6071616" y="2926080"/>
+            <a:ext cx="2331720" cy="384048"/>
+          </a:xfrm>
+          <a:prstGeom prst="rect">
+            <a:avLst/>
+          </a:prstGeom>
+          <a:noFill/>
+          <a:ln/>
+        </p:spPr>
+        <p:txBody>
+          <a:bodyPr wrap="square" lIns="101600" tIns="101600" rIns="101600" bIns="101600" rtlCol="0" anchor="ctr"/>
+          <a:lstStyle/>
+          <a:p>
+            <a:pPr indent="0" marL="0">
+              <a:buNone/>
+            </a:pPr>
+            <a:r>
+              <a:rPr lang="en-US" sz="1000" b="1" dirty="0">
+                <a:solidFill>
+                  <a:srgbClr val="FFFFFF"/>
+                </a:solidFill>
+                <a:latin typeface="Calibri" pitchFamily="34" charset="0"/>
+                <a:ea typeface="Calibri" pitchFamily="34" charset="-122"/>
+                <a:cs typeface="Calibri" pitchFamily="34" charset="-120"/>
+              </a:rPr>
+              <a:t>No ERP / CRM Integration Required</a:t>
+            </a:r>
+            <a:endParaRPr lang="en-US" sz="1000" dirty="0"/>
+          </a:p>
+        </p:txBody>
+      </p:sp>
+      <p:sp>
+        <p:nvSpPr>
+          <p:cNvPr id="45" name="Text 43"/>
+          <p:cNvSpPr/>
+          <p:nvPr/>
+        </p:nvSpPr>
+        <p:spPr>
+          <a:xfrm>
+            <a:off x="6665976" y="3383280"/>
+            <a:ext cx="2103120" cy="1325880"/>
+          </a:xfrm>
+          <a:prstGeom prst="rect">
+            <a:avLst/>
+          </a:prstGeom>
+          <a:noFill/>
+          <a:ln/>
+        </p:spPr>
+        <p:txBody>
+          <a:bodyPr wrap="square" rtlCol="0" anchor="t"/>
+          <a:lstStyle/>
+          <a:p>
+            <a:pPr indent="0" marL="0">
+              <a:lnSpc>
+                <a:spcPct val="130000"/>
+              </a:lnSpc>
+              <a:buNone/>
+            </a:pPr>
+            <a:r>
+              <a:rPr lang="en-US" sz="1050" dirty="0">
+                <a:solidFill>
+                  <a:srgbClr val="1C1E2E"/>
+                </a:solidFill>
+                <a:latin typeface="Calibri" pitchFamily="34" charset="0"/>
+                <a:ea typeface="Calibri" pitchFamily="34" charset="-122"/>
+                <a:cs typeface="Calibri" pitchFamily="34" charset="-120"/>
+              </a:rPr>
+              <a:t>Standalone SQLite + file system. No SAP, Salesforce or complex enterprise integration — simple deployment, low risk, fast time to value.</a:t>
+            </a:r>
+            <a:endParaRPr lang="en-US" sz="1050" dirty="0"/>
+          </a:p>
+        </p:txBody>
+      </p:sp>
+      <p:sp>
+        <p:nvSpPr>
+          <p:cNvPr id="46" name="Shape 44"/>
+          <p:cNvSpPr/>
+          <p:nvPr/>
+        </p:nvSpPr>
+        <p:spPr>
+          <a:xfrm>
+            <a:off x="0" y="4892040"/>
+            <a:ext cx="9144000" cy="251460"/>
+          </a:xfrm>
+          <a:prstGeom prst="rect">
+            <a:avLst/>
+          </a:prstGeom>
+          <a:solidFill>
+            <a:srgbClr val="E8EAF6"/>
+          </a:solidFill>
+          <a:ln w="12700">
+            <a:solidFill>
+              <a:srgbClr val="E8EAF6"/>
+            </a:solidFill>
+            <a:prstDash val="solid"/>
+          </a:ln>
+        </p:spPr>
+      </p:sp>
+      <p:sp>
+        <p:nvSpPr>
+          <p:cNvPr id="47" name="Text 45"/>
+          <p:cNvSpPr/>
+          <p:nvPr/>
+        </p:nvSpPr>
+        <p:spPr>
+          <a:xfrm>
+            <a:off x="274320" y="4892040"/>
+            <a:ext cx="8595360" cy="251460"/>
+          </a:xfrm>
+          <a:prstGeom prst="rect">
+            <a:avLst/>
+          </a:prstGeom>
+          <a:noFill/>
+          <a:ln/>
+        </p:spPr>
+        <p:txBody>
+          <a:bodyPr wrap="square" lIns="0" tIns="0" rIns="0" bIns="0" rtlCol="0" anchor="ctr"/>
+          <a:lstStyle/>
+          <a:p>
+            <a:pPr indent="0" marL="0">
+              <a:buNone/>
+            </a:pPr>
+            <a:r>
+              <a:rPr lang="en-US" sz="900" dirty="0">
+                <a:solidFill>
+                  <a:srgbClr val="6B7280"/>
+                </a:solidFill>
+                <a:latin typeface="Calibri" pitchFamily="34" charset="0"/>
+                <a:ea typeface="Calibri" pitchFamily="34" charset="-122"/>
+                <a:cs typeface="Calibri" pitchFamily="34" charset="-120"/>
+              </a:rPr>
+              <a:t>TTK Companion Agent Pipeline  |  Executive Briefing  |  2026   |   All 6 criteria met — strong fit for agentic automation</a:t>
             </a:r>
             <a:endParaRPr lang="en-US" sz="900" dirty="0"/>
           </a:p>
@@ -6152,6 +7528,1374 @@
 <file path=ppt/slides/slide5.xml><?xml version="1.0" encoding="utf-8"?>
 <p:sld xmlns:a="http://schemas.openxmlformats.org/drawingml/2006/main" xmlns:r="http://schemas.openxmlformats.org/officeDocument/2006/relationships" xmlns:p="http://schemas.openxmlformats.org/presentationml/2006/main">
   <p:cSld name="Slide 5">
+    <p:bg>
+      <p:bgPr>
+        <a:solidFill>
+          <a:srgbClr val="F4F5FB"/>
+        </a:solidFill>
+      </p:bgPr>
+    </p:bg>
+    <p:spTree>
+      <p:nvGrpSpPr>
+        <p:cNvPr id="1" name=""/>
+        <p:cNvGrpSpPr/>
+        <p:nvPr/>
+      </p:nvGrpSpPr>
+      <p:grpSpPr>
+        <a:xfrm>
+          <a:off x="0" y="0"/>
+          <a:ext cx="0" cy="0"/>
+          <a:chOff x="0" y="0"/>
+          <a:chExt cx="0" cy="0"/>
+        </a:xfrm>
+      </p:grpSpPr>
+      <p:sp>
+        <p:nvSpPr>
+          <p:cNvPr id="2" name="Shape 0"/>
+          <p:cNvSpPr/>
+          <p:nvPr/>
+        </p:nvSpPr>
+        <p:spPr>
+          <a:xfrm>
+            <a:off x="0" y="0"/>
+            <a:ext cx="9144000" cy="777240"/>
+          </a:xfrm>
+          <a:prstGeom prst="rect">
+            <a:avLst/>
+          </a:prstGeom>
+          <a:solidFill>
+            <a:srgbClr val="0D1B4B"/>
+          </a:solidFill>
+          <a:ln w="12700">
+            <a:solidFill>
+              <a:srgbClr val="0D1B4B"/>
+            </a:solidFill>
+            <a:prstDash val="solid"/>
+          </a:ln>
+        </p:spPr>
+      </p:sp>
+      <p:sp>
+        <p:nvSpPr>
+          <p:cNvPr id="3" name="Text 1"/>
+          <p:cNvSpPr/>
+          <p:nvPr/>
+        </p:nvSpPr>
+        <p:spPr>
+          <a:xfrm>
+            <a:off x="365760" y="0"/>
+            <a:ext cx="8412480" cy="777240"/>
+          </a:xfrm>
+          <a:prstGeom prst="rect">
+            <a:avLst/>
+          </a:prstGeom>
+          <a:noFill/>
+          <a:ln/>
+        </p:spPr>
+        <p:txBody>
+          <a:bodyPr wrap="square" lIns="0" tIns="0" rIns="0" bIns="0" rtlCol="0" anchor="ctr"/>
+          <a:lstStyle/>
+          <a:p>
+            <a:pPr indent="0" marL="0">
+              <a:buNone/>
+            </a:pPr>
+            <a:r>
+              <a:rPr lang="en-US" sz="2200" b="1" dirty="0">
+                <a:solidFill>
+                  <a:srgbClr val="FFFFFF"/>
+                </a:solidFill>
+                <a:latin typeface="Georgia" pitchFamily="34" charset="0"/>
+                <a:ea typeface="Georgia" pitchFamily="34" charset="-122"/>
+                <a:cs typeface="Georgia" pitchFamily="34" charset="-120"/>
+              </a:rPr>
+              <a:t>Architecture — Two Pipelines</a:t>
+            </a:r>
+            <a:endParaRPr lang="en-US" sz="2200" dirty="0"/>
+          </a:p>
+        </p:txBody>
+      </p:sp>
+      <p:sp>
+        <p:nvSpPr>
+          <p:cNvPr id="4" name="Shape 2"/>
+          <p:cNvSpPr/>
+          <p:nvPr/>
+        </p:nvSpPr>
+        <p:spPr>
+          <a:xfrm>
+            <a:off x="274320" y="914400"/>
+            <a:ext cx="4160520" cy="3520440"/>
+          </a:xfrm>
+          <a:prstGeom prst="rect">
+            <a:avLst/>
+          </a:prstGeom>
+          <a:solidFill>
+            <a:srgbClr val="FFFFFF"/>
+          </a:solidFill>
+          <a:ln w="12700">
+            <a:solidFill>
+              <a:srgbClr val="E0E3F0"/>
+            </a:solidFill>
+            <a:prstDash val="solid"/>
+          </a:ln>
+          <a:effectLst>
+            <a:outerShdw sx="100000" sy="100000" kx="0" ky="0" algn="bl" rotWithShape="0" blurRad="101600" dist="38100" dir="8100000">
+              <a:srgbClr val="000000">
+                <a:alpha val="12000"/>
+              </a:srgbClr>
+            </a:outerShdw>
+          </a:effectLst>
+        </p:spPr>
+      </p:sp>
+      <p:sp>
+        <p:nvSpPr>
+          <p:cNvPr id="5" name="Shape 3"/>
+          <p:cNvSpPr/>
+          <p:nvPr/>
+        </p:nvSpPr>
+        <p:spPr>
+          <a:xfrm>
+            <a:off x="274320" y="914400"/>
+            <a:ext cx="4160520" cy="411480"/>
+          </a:xfrm>
+          <a:prstGeom prst="rect">
+            <a:avLst/>
+          </a:prstGeom>
+          <a:solidFill>
+            <a:srgbClr val="0D1B4B"/>
+          </a:solidFill>
+          <a:ln w="12700">
+            <a:solidFill>
+              <a:srgbClr val="0D1B4B"/>
+            </a:solidFill>
+            <a:prstDash val="solid"/>
+          </a:ln>
+        </p:spPr>
+      </p:sp>
+      <p:sp>
+        <p:nvSpPr>
+          <p:cNvPr id="6" name="Text 4"/>
+          <p:cNvSpPr/>
+          <p:nvPr/>
+        </p:nvSpPr>
+        <p:spPr>
+          <a:xfrm>
+            <a:off x="274320" y="914400"/>
+            <a:ext cx="4160520" cy="411480"/>
+          </a:xfrm>
+          <a:prstGeom prst="rect">
+            <a:avLst/>
+          </a:prstGeom>
+          <a:noFill/>
+          <a:ln/>
+        </p:spPr>
+        <p:txBody>
+          <a:bodyPr wrap="square" lIns="0" tIns="0" rIns="0" bIns="0" rtlCol="0" anchor="ctr"/>
+          <a:lstStyle/>
+          <a:p>
+            <a:pPr algn="ctr" indent="0" marL="0">
+              <a:buNone/>
+            </a:pPr>
+            <a:r>
+              <a:rPr lang="en-US" sz="1100" b="1" spc="100" kern="0" dirty="0">
+                <a:solidFill>
+                  <a:srgbClr val="FFFFFF"/>
+                </a:solidFill>
+                <a:latin typeface="Calibri" pitchFamily="34" charset="0"/>
+                <a:ea typeface="Calibri" pitchFamily="34" charset="-122"/>
+                <a:cs typeface="Calibri" pitchFamily="34" charset="-120"/>
+              </a:rPr>
+              <a:t>INTERVIEW PIPELINE  —  Automatic</a:t>
+            </a:r>
+            <a:endParaRPr lang="en-US" sz="1100" dirty="0"/>
+          </a:p>
+        </p:txBody>
+      </p:sp>
+      <p:sp>
+        <p:nvSpPr>
+          <p:cNvPr id="7" name="Shape 5"/>
+          <p:cNvSpPr/>
+          <p:nvPr/>
+        </p:nvSpPr>
+        <p:spPr>
+          <a:xfrm>
+            <a:off x="457200" y="1463040"/>
+            <a:ext cx="411480" cy="411480"/>
+          </a:xfrm>
+          <a:prstGeom prst="rect">
+            <a:avLst/>
+          </a:prstGeom>
+          <a:solidFill>
+            <a:srgbClr val="3949AB"/>
+          </a:solidFill>
+          <a:ln w="12700">
+            <a:solidFill>
+              <a:srgbClr val="3949AB"/>
+            </a:solidFill>
+            <a:prstDash val="solid"/>
+          </a:ln>
+        </p:spPr>
+      </p:sp>
+      <p:sp>
+        <p:nvSpPr>
+          <p:cNvPr id="8" name="Text 6"/>
+          <p:cNvSpPr/>
+          <p:nvPr/>
+        </p:nvSpPr>
+        <p:spPr>
+          <a:xfrm>
+            <a:off x="457200" y="1463040"/>
+            <a:ext cx="411480" cy="411480"/>
+          </a:xfrm>
+          <a:prstGeom prst="rect">
+            <a:avLst/>
+          </a:prstGeom>
+          <a:noFill/>
+          <a:ln/>
+        </p:spPr>
+        <p:txBody>
+          <a:bodyPr wrap="square" lIns="0" tIns="0" rIns="0" bIns="0" rtlCol="0" anchor="ctr"/>
+          <a:lstStyle/>
+          <a:p>
+            <a:pPr algn="ctr" indent="0" marL="0">
+              <a:buNone/>
+            </a:pPr>
+            <a:r>
+              <a:rPr lang="en-US" sz="1600" b="1" dirty="0">
+                <a:solidFill>
+                  <a:srgbClr val="FFFFFF"/>
+                </a:solidFill>
+                <a:latin typeface="Georgia" pitchFamily="34" charset="0"/>
+                <a:ea typeface="Georgia" pitchFamily="34" charset="-122"/>
+                <a:cs typeface="Georgia" pitchFamily="34" charset="-120"/>
+              </a:rPr>
+              <a:t>1</a:t>
+            </a:r>
+            <a:endParaRPr lang="en-US" sz="1600" dirty="0"/>
+          </a:p>
+        </p:txBody>
+      </p:sp>
+      <p:sp>
+        <p:nvSpPr>
+          <p:cNvPr id="9" name="Text 7"/>
+          <p:cNvSpPr/>
+          <p:nvPr/>
+        </p:nvSpPr>
+        <p:spPr>
+          <a:xfrm>
+            <a:off x="960120" y="1463040"/>
+            <a:ext cx="3291840" cy="256032"/>
+          </a:xfrm>
+          <a:prstGeom prst="rect">
+            <a:avLst/>
+          </a:prstGeom>
+          <a:noFill/>
+          <a:ln/>
+        </p:spPr>
+        <p:txBody>
+          <a:bodyPr wrap="square" lIns="0" tIns="0" rIns="0" bIns="0" rtlCol="0" anchor="ctr"/>
+          <a:lstStyle/>
+          <a:p>
+            <a:pPr indent="0" marL="0">
+              <a:buNone/>
+            </a:pPr>
+            <a:r>
+              <a:rPr lang="en-US" sz="1200" b="1" dirty="0">
+                <a:solidFill>
+                  <a:srgbClr val="0D1B4B"/>
+                </a:solidFill>
+                <a:latin typeface="Calibri" pitchFamily="34" charset="0"/>
+                <a:ea typeface="Calibri" pitchFamily="34" charset="-122"/>
+                <a:cs typeface="Calibri" pitchFamily="34" charset="-120"/>
+              </a:rPr>
+              <a:t>TTK Interview Agent</a:t>
+            </a:r>
+            <a:endParaRPr lang="en-US" sz="1200" dirty="0"/>
+          </a:p>
+        </p:txBody>
+      </p:sp>
+      <p:sp>
+        <p:nvSpPr>
+          <p:cNvPr id="10" name="Text 8"/>
+          <p:cNvSpPr/>
+          <p:nvPr/>
+        </p:nvSpPr>
+        <p:spPr>
+          <a:xfrm>
+            <a:off x="960120" y="1719072"/>
+            <a:ext cx="3291840" cy="347472"/>
+          </a:xfrm>
+          <a:prstGeom prst="rect">
+            <a:avLst/>
+          </a:prstGeom>
+          <a:noFill/>
+          <a:ln/>
+        </p:spPr>
+        <p:txBody>
+          <a:bodyPr wrap="square" lIns="0" tIns="0" rIns="0" bIns="0" rtlCol="0" anchor="ctr"/>
+          <a:lstStyle/>
+          <a:p>
+            <a:pPr indent="0" marL="0">
+              <a:buNone/>
+            </a:pPr>
+            <a:r>
+              <a:rPr lang="en-US" sz="1000" dirty="0">
+                <a:solidFill>
+                  <a:srgbClr val="6B7280"/>
+                </a:solidFill>
+                <a:latin typeface="Calibri" pitchFamily="34" charset="0"/>
+                <a:ea typeface="Calibri" pitchFamily="34" charset="-122"/>
+                <a:cs typeface="Calibri" pitchFamily="34" charset="-120"/>
+              </a:rPr>
+              <a:t>Structured 5-turn conversation with process engineer via WebSocket streaming</a:t>
+            </a:r>
+            <a:endParaRPr lang="en-US" sz="1000" dirty="0"/>
+          </a:p>
+        </p:txBody>
+      </p:sp>
+      <p:sp>
+        <p:nvSpPr>
+          <p:cNvPr id="11" name="Shape 9"/>
+          <p:cNvSpPr/>
+          <p:nvPr/>
+        </p:nvSpPr>
+        <p:spPr>
+          <a:xfrm>
+            <a:off x="594360" y="1965960"/>
+            <a:ext cx="128016" cy="411480"/>
+          </a:xfrm>
+          <a:prstGeom prst="rect">
+            <a:avLst/>
+          </a:prstGeom>
+          <a:solidFill>
+            <a:srgbClr val="5C6BC0"/>
+          </a:solidFill>
+          <a:ln w="12700">
+            <a:solidFill>
+              <a:srgbClr val="5C6BC0"/>
+            </a:solidFill>
+            <a:prstDash val="solid"/>
+          </a:ln>
+        </p:spPr>
+      </p:sp>
+      <p:sp>
+        <p:nvSpPr>
+          <p:cNvPr id="12" name="Shape 10"/>
+          <p:cNvSpPr/>
+          <p:nvPr/>
+        </p:nvSpPr>
+        <p:spPr>
+          <a:xfrm>
+            <a:off x="457200" y="2423160"/>
+            <a:ext cx="411480" cy="411480"/>
+          </a:xfrm>
+          <a:prstGeom prst="rect">
+            <a:avLst/>
+          </a:prstGeom>
+          <a:solidFill>
+            <a:srgbClr val="3949AB"/>
+          </a:solidFill>
+          <a:ln w="12700">
+            <a:solidFill>
+              <a:srgbClr val="3949AB"/>
+            </a:solidFill>
+            <a:prstDash val="solid"/>
+          </a:ln>
+        </p:spPr>
+      </p:sp>
+      <p:sp>
+        <p:nvSpPr>
+          <p:cNvPr id="13" name="Text 11"/>
+          <p:cNvSpPr/>
+          <p:nvPr/>
+        </p:nvSpPr>
+        <p:spPr>
+          <a:xfrm>
+            <a:off x="457200" y="2423160"/>
+            <a:ext cx="411480" cy="411480"/>
+          </a:xfrm>
+          <a:prstGeom prst="rect">
+            <a:avLst/>
+          </a:prstGeom>
+          <a:noFill/>
+          <a:ln/>
+        </p:spPr>
+        <p:txBody>
+          <a:bodyPr wrap="square" lIns="0" tIns="0" rIns="0" bIns="0" rtlCol="0" anchor="ctr"/>
+          <a:lstStyle/>
+          <a:p>
+            <a:pPr algn="ctr" indent="0" marL="0">
+              <a:buNone/>
+            </a:pPr>
+            <a:r>
+              <a:rPr lang="en-US" sz="1600" b="1" dirty="0">
+                <a:solidFill>
+                  <a:srgbClr val="FFFFFF"/>
+                </a:solidFill>
+                <a:latin typeface="Georgia" pitchFamily="34" charset="0"/>
+                <a:ea typeface="Georgia" pitchFamily="34" charset="-122"/>
+                <a:cs typeface="Georgia" pitchFamily="34" charset="-120"/>
+              </a:rPr>
+              <a:t>2</a:t>
+            </a:r>
+            <a:endParaRPr lang="en-US" sz="1600" dirty="0"/>
+          </a:p>
+        </p:txBody>
+      </p:sp>
+      <p:sp>
+        <p:nvSpPr>
+          <p:cNvPr id="14" name="Text 12"/>
+          <p:cNvSpPr/>
+          <p:nvPr/>
+        </p:nvSpPr>
+        <p:spPr>
+          <a:xfrm>
+            <a:off x="960120" y="2423160"/>
+            <a:ext cx="3291840" cy="256032"/>
+          </a:xfrm>
+          <a:prstGeom prst="rect">
+            <a:avLst/>
+          </a:prstGeom>
+          <a:noFill/>
+          <a:ln/>
+        </p:spPr>
+        <p:txBody>
+          <a:bodyPr wrap="square" lIns="0" tIns="0" rIns="0" bIns="0" rtlCol="0" anchor="ctr"/>
+          <a:lstStyle/>
+          <a:p>
+            <a:pPr indent="0" marL="0">
+              <a:buNone/>
+            </a:pPr>
+            <a:r>
+              <a:rPr lang="en-US" sz="1200" b="1" dirty="0">
+                <a:solidFill>
+                  <a:srgbClr val="0D1B4B"/>
+                </a:solidFill>
+                <a:latin typeface="Calibri" pitchFamily="34" charset="0"/>
+                <a:ea typeface="Calibri" pitchFamily="34" charset="-122"/>
+                <a:cs typeface="Calibri" pitchFamily="34" charset="-120"/>
+              </a:rPr>
+              <a:t>Knowledge Synthesis Agent</a:t>
+            </a:r>
+            <a:endParaRPr lang="en-US" sz="1200" dirty="0"/>
+          </a:p>
+        </p:txBody>
+      </p:sp>
+      <p:sp>
+        <p:nvSpPr>
+          <p:cNvPr id="15" name="Text 13"/>
+          <p:cNvSpPr/>
+          <p:nvPr/>
+        </p:nvSpPr>
+        <p:spPr>
+          <a:xfrm>
+            <a:off x="960120" y="2679192"/>
+            <a:ext cx="3291840" cy="347472"/>
+          </a:xfrm>
+          <a:prstGeom prst="rect">
+            <a:avLst/>
+          </a:prstGeom>
+          <a:noFill/>
+          <a:ln/>
+        </p:spPr>
+        <p:txBody>
+          <a:bodyPr wrap="square" lIns="0" tIns="0" rIns="0" bIns="0" rtlCol="0" anchor="ctr"/>
+          <a:lstStyle/>
+          <a:p>
+            <a:pPr indent="0" marL="0">
+              <a:buNone/>
+            </a:pPr>
+            <a:r>
+              <a:rPr lang="en-US" sz="1000" dirty="0">
+                <a:solidFill>
+                  <a:srgbClr val="6B7280"/>
+                </a:solidFill>
+                <a:latin typeface="Calibri" pitchFamily="34" charset="0"/>
+                <a:ea typeface="Calibri" pitchFamily="34" charset="-122"/>
+                <a:cs typeface="Calibri" pitchFamily="34" charset="-120"/>
+              </a:rPr>
+              <a:t>Generates Knowledge Article + Risk Verification Checklist from interview JSON</a:t>
+            </a:r>
+            <a:endParaRPr lang="en-US" sz="1000" dirty="0"/>
+          </a:p>
+        </p:txBody>
+      </p:sp>
+      <p:sp>
+        <p:nvSpPr>
+          <p:cNvPr id="16" name="Shape 14"/>
+          <p:cNvSpPr/>
+          <p:nvPr/>
+        </p:nvSpPr>
+        <p:spPr>
+          <a:xfrm>
+            <a:off x="594360" y="2926080"/>
+            <a:ext cx="128016" cy="411480"/>
+          </a:xfrm>
+          <a:prstGeom prst="rect">
+            <a:avLst/>
+          </a:prstGeom>
+          <a:solidFill>
+            <a:srgbClr val="5C6BC0"/>
+          </a:solidFill>
+          <a:ln w="12700">
+            <a:solidFill>
+              <a:srgbClr val="5C6BC0"/>
+            </a:solidFill>
+            <a:prstDash val="solid"/>
+          </a:ln>
+        </p:spPr>
+      </p:sp>
+      <p:sp>
+        <p:nvSpPr>
+          <p:cNvPr id="17" name="Shape 15"/>
+          <p:cNvSpPr/>
+          <p:nvPr/>
+        </p:nvSpPr>
+        <p:spPr>
+          <a:xfrm>
+            <a:off x="457200" y="3383280"/>
+            <a:ext cx="411480" cy="411480"/>
+          </a:xfrm>
+          <a:prstGeom prst="rect">
+            <a:avLst/>
+          </a:prstGeom>
+          <a:solidFill>
+            <a:srgbClr val="3949AB"/>
+          </a:solidFill>
+          <a:ln w="12700">
+            <a:solidFill>
+              <a:srgbClr val="3949AB"/>
+            </a:solidFill>
+            <a:prstDash val="solid"/>
+          </a:ln>
+        </p:spPr>
+      </p:sp>
+      <p:sp>
+        <p:nvSpPr>
+          <p:cNvPr id="18" name="Text 16"/>
+          <p:cNvSpPr/>
+          <p:nvPr/>
+        </p:nvSpPr>
+        <p:spPr>
+          <a:xfrm>
+            <a:off x="457200" y="3383280"/>
+            <a:ext cx="411480" cy="411480"/>
+          </a:xfrm>
+          <a:prstGeom prst="rect">
+            <a:avLst/>
+          </a:prstGeom>
+          <a:noFill/>
+          <a:ln/>
+        </p:spPr>
+        <p:txBody>
+          <a:bodyPr wrap="square" lIns="0" tIns="0" rIns="0" bIns="0" rtlCol="0" anchor="ctr"/>
+          <a:lstStyle/>
+          <a:p>
+            <a:pPr algn="ctr" indent="0" marL="0">
+              <a:buNone/>
+            </a:pPr>
+            <a:r>
+              <a:rPr lang="en-US" sz="1600" b="1" dirty="0">
+                <a:solidFill>
+                  <a:srgbClr val="FFFFFF"/>
+                </a:solidFill>
+                <a:latin typeface="Georgia" pitchFamily="34" charset="0"/>
+                <a:ea typeface="Georgia" pitchFamily="34" charset="-122"/>
+                <a:cs typeface="Georgia" pitchFamily="34" charset="-120"/>
+              </a:rPr>
+              <a:t>3</a:t>
+            </a:r>
+            <a:endParaRPr lang="en-US" sz="1600" dirty="0"/>
+          </a:p>
+        </p:txBody>
+      </p:sp>
+      <p:sp>
+        <p:nvSpPr>
+          <p:cNvPr id="19" name="Text 17"/>
+          <p:cNvSpPr/>
+          <p:nvPr/>
+        </p:nvSpPr>
+        <p:spPr>
+          <a:xfrm>
+            <a:off x="960120" y="3383280"/>
+            <a:ext cx="3291840" cy="256032"/>
+          </a:xfrm>
+          <a:prstGeom prst="rect">
+            <a:avLst/>
+          </a:prstGeom>
+          <a:noFill/>
+          <a:ln/>
+        </p:spPr>
+        <p:txBody>
+          <a:bodyPr wrap="square" lIns="0" tIns="0" rIns="0" bIns="0" rtlCol="0" anchor="ctr"/>
+          <a:lstStyle/>
+          <a:p>
+            <a:pPr indent="0" marL="0">
+              <a:buNone/>
+            </a:pPr>
+            <a:r>
+              <a:rPr lang="en-US" sz="1200" b="1" dirty="0">
+                <a:solidFill>
+                  <a:srgbClr val="0D1B4B"/>
+                </a:solidFill>
+                <a:latin typeface="Calibri" pitchFamily="34" charset="0"/>
+                <a:ea typeface="Calibri" pitchFamily="34" charset="-122"/>
+                <a:cs typeface="Calibri" pitchFamily="34" charset="-120"/>
+              </a:rPr>
+              <a:t>Knowledge Graph Agent</a:t>
+            </a:r>
+            <a:endParaRPr lang="en-US" sz="1200" dirty="0"/>
+          </a:p>
+        </p:txBody>
+      </p:sp>
+      <p:sp>
+        <p:nvSpPr>
+          <p:cNvPr id="20" name="Text 18"/>
+          <p:cNvSpPr/>
+          <p:nvPr/>
+        </p:nvSpPr>
+        <p:spPr>
+          <a:xfrm>
+            <a:off x="960120" y="3639312"/>
+            <a:ext cx="3291840" cy="347472"/>
+          </a:xfrm>
+          <a:prstGeom prst="rect">
+            <a:avLst/>
+          </a:prstGeom>
+          <a:noFill/>
+          <a:ln/>
+        </p:spPr>
+        <p:txBody>
+          <a:bodyPr wrap="square" lIns="0" tIns="0" rIns="0" bIns="0" rtlCol="0" anchor="ctr"/>
+          <a:lstStyle/>
+          <a:p>
+            <a:pPr indent="0" marL="0">
+              <a:buNone/>
+            </a:pPr>
+            <a:r>
+              <a:rPr lang="en-US" sz="1000" dirty="0">
+                <a:solidFill>
+                  <a:srgbClr val="6B7280"/>
+                </a:solidFill>
+                <a:latin typeface="Calibri" pitchFamily="34" charset="0"/>
+                <a:ea typeface="Calibri" pitchFamily="34" charset="-122"/>
+                <a:cs typeface="Calibri" pitchFamily="34" charset="-120"/>
+              </a:rPr>
+              <a:t>Extracts entities &amp; relationships into graph nodes/edges, stored in SQLite</a:t>
+            </a:r>
+            <a:endParaRPr lang="en-US" sz="1000" dirty="0"/>
+          </a:p>
+        </p:txBody>
+      </p:sp>
+      <p:sp>
+        <p:nvSpPr>
+          <p:cNvPr id="21" name="Shape 19"/>
+          <p:cNvSpPr/>
+          <p:nvPr/>
+        </p:nvSpPr>
+        <p:spPr>
+          <a:xfrm>
+            <a:off x="4709160" y="914400"/>
+            <a:ext cx="4160520" cy="3520440"/>
+          </a:xfrm>
+          <a:prstGeom prst="rect">
+            <a:avLst/>
+          </a:prstGeom>
+          <a:solidFill>
+            <a:srgbClr val="FFFFFF"/>
+          </a:solidFill>
+          <a:ln w="12700">
+            <a:solidFill>
+              <a:srgbClr val="E0E3F0"/>
+            </a:solidFill>
+            <a:prstDash val="solid"/>
+          </a:ln>
+          <a:effectLst>
+            <a:outerShdw sx="100000" sy="100000" kx="0" ky="0" algn="bl" rotWithShape="0" blurRad="101600" dist="38100" dir="8100000">
+              <a:srgbClr val="000000">
+                <a:alpha val="12000"/>
+              </a:srgbClr>
+            </a:outerShdw>
+          </a:effectLst>
+        </p:spPr>
+      </p:sp>
+      <p:sp>
+        <p:nvSpPr>
+          <p:cNvPr id="22" name="Shape 20"/>
+          <p:cNvSpPr/>
+          <p:nvPr/>
+        </p:nvSpPr>
+        <p:spPr>
+          <a:xfrm>
+            <a:off x="4709160" y="914400"/>
+            <a:ext cx="4160520" cy="411480"/>
+          </a:xfrm>
+          <a:prstGeom prst="rect">
+            <a:avLst/>
+          </a:prstGeom>
+          <a:solidFill>
+            <a:srgbClr val="00695C"/>
+          </a:solidFill>
+          <a:ln w="12700">
+            <a:solidFill>
+              <a:srgbClr val="00695C"/>
+            </a:solidFill>
+            <a:prstDash val="solid"/>
+          </a:ln>
+        </p:spPr>
+      </p:sp>
+      <p:sp>
+        <p:nvSpPr>
+          <p:cNvPr id="23" name="Text 21"/>
+          <p:cNvSpPr/>
+          <p:nvPr/>
+        </p:nvSpPr>
+        <p:spPr>
+          <a:xfrm>
+            <a:off x="4709160" y="914400"/>
+            <a:ext cx="4160520" cy="411480"/>
+          </a:xfrm>
+          <a:prstGeom prst="rect">
+            <a:avLst/>
+          </a:prstGeom>
+          <a:noFill/>
+          <a:ln/>
+        </p:spPr>
+        <p:txBody>
+          <a:bodyPr wrap="square" lIns="0" tIns="0" rIns="0" bIns="0" rtlCol="0" anchor="ctr"/>
+          <a:lstStyle/>
+          <a:p>
+            <a:pPr algn="ctr" indent="0" marL="0">
+              <a:buNone/>
+            </a:pPr>
+            <a:r>
+              <a:rPr lang="en-US" sz="1100" b="1" spc="100" kern="0" dirty="0">
+                <a:solidFill>
+                  <a:srgbClr val="FFFFFF"/>
+                </a:solidFill>
+                <a:latin typeface="Calibri" pitchFamily="34" charset="0"/>
+                <a:ea typeface="Calibri" pitchFamily="34" charset="-122"/>
+                <a:cs typeface="Calibri" pitchFamily="34" charset="-120"/>
+              </a:rPr>
+              <a:t>ADMIN PIPELINE  —  On Demand</a:t>
+            </a:r>
+            <a:endParaRPr lang="en-US" sz="1100" dirty="0"/>
+          </a:p>
+        </p:txBody>
+      </p:sp>
+      <p:sp>
+        <p:nvSpPr>
+          <p:cNvPr id="24" name="Shape 22"/>
+          <p:cNvSpPr/>
+          <p:nvPr/>
+        </p:nvSpPr>
+        <p:spPr>
+          <a:xfrm>
+            <a:off x="4892040" y="1463040"/>
+            <a:ext cx="411480" cy="411480"/>
+          </a:xfrm>
+          <a:prstGeom prst="rect">
+            <a:avLst/>
+          </a:prstGeom>
+          <a:solidFill>
+            <a:srgbClr val="00695C"/>
+          </a:solidFill>
+          <a:ln w="12700">
+            <a:solidFill>
+              <a:srgbClr val="00695C"/>
+            </a:solidFill>
+            <a:prstDash val="solid"/>
+          </a:ln>
+        </p:spPr>
+      </p:sp>
+      <p:sp>
+        <p:nvSpPr>
+          <p:cNvPr id="25" name="Text 23"/>
+          <p:cNvSpPr/>
+          <p:nvPr/>
+        </p:nvSpPr>
+        <p:spPr>
+          <a:xfrm>
+            <a:off x="4892040" y="1463040"/>
+            <a:ext cx="411480" cy="411480"/>
+          </a:xfrm>
+          <a:prstGeom prst="rect">
+            <a:avLst/>
+          </a:prstGeom>
+          <a:noFill/>
+          <a:ln/>
+        </p:spPr>
+        <p:txBody>
+          <a:bodyPr wrap="square" lIns="0" tIns="0" rIns="0" bIns="0" rtlCol="0" anchor="ctr"/>
+          <a:lstStyle/>
+          <a:p>
+            <a:pPr algn="ctr" indent="0" marL="0">
+              <a:buNone/>
+            </a:pPr>
+            <a:r>
+              <a:rPr lang="en-US" sz="1600" b="1" dirty="0">
+                <a:solidFill>
+                  <a:srgbClr val="FFFFFF"/>
+                </a:solidFill>
+                <a:latin typeface="Georgia" pitchFamily="34" charset="0"/>
+                <a:ea typeface="Georgia" pitchFamily="34" charset="-122"/>
+                <a:cs typeface="Georgia" pitchFamily="34" charset="-120"/>
+              </a:rPr>
+              <a:t>4</a:t>
+            </a:r>
+            <a:endParaRPr lang="en-US" sz="1600" dirty="0"/>
+          </a:p>
+        </p:txBody>
+      </p:sp>
+      <p:sp>
+        <p:nvSpPr>
+          <p:cNvPr id="26" name="Text 24"/>
+          <p:cNvSpPr/>
+          <p:nvPr/>
+        </p:nvSpPr>
+        <p:spPr>
+          <a:xfrm>
+            <a:off x="5394960" y="1463040"/>
+            <a:ext cx="3291840" cy="256032"/>
+          </a:xfrm>
+          <a:prstGeom prst="rect">
+            <a:avLst/>
+          </a:prstGeom>
+          <a:noFill/>
+          <a:ln/>
+        </p:spPr>
+        <p:txBody>
+          <a:bodyPr wrap="square" lIns="0" tIns="0" rIns="0" bIns="0" rtlCol="0" anchor="ctr"/>
+          <a:lstStyle/>
+          <a:p>
+            <a:pPr indent="0" marL="0">
+              <a:buNone/>
+            </a:pPr>
+            <a:r>
+              <a:rPr lang="en-US" sz="1200" b="1" dirty="0">
+                <a:solidFill>
+                  <a:srgbClr val="0D1B4B"/>
+                </a:solidFill>
+                <a:latin typeface="Calibri" pitchFamily="34" charset="0"/>
+                <a:ea typeface="Calibri" pitchFamily="34" charset="-122"/>
+                <a:cs typeface="Calibri" pitchFamily="34" charset="-120"/>
+              </a:rPr>
+              <a:t>Admin KA Agent</a:t>
+            </a:r>
+            <a:endParaRPr lang="en-US" sz="1200" dirty="0"/>
+          </a:p>
+        </p:txBody>
+      </p:sp>
+      <p:sp>
+        <p:nvSpPr>
+          <p:cNvPr id="27" name="Text 25"/>
+          <p:cNvSpPr/>
+          <p:nvPr/>
+        </p:nvSpPr>
+        <p:spPr>
+          <a:xfrm>
+            <a:off x="5394960" y="1719072"/>
+            <a:ext cx="3291840" cy="347472"/>
+          </a:xfrm>
+          <a:prstGeom prst="rect">
+            <a:avLst/>
+          </a:prstGeom>
+          <a:noFill/>
+          <a:ln/>
+        </p:spPr>
+        <p:txBody>
+          <a:bodyPr wrap="square" lIns="0" tIns="0" rIns="0" bIns="0" rtlCol="0" anchor="ctr"/>
+          <a:lstStyle/>
+          <a:p>
+            <a:pPr indent="0" marL="0">
+              <a:buNone/>
+            </a:pPr>
+            <a:r>
+              <a:rPr lang="en-US" sz="1000" dirty="0">
+                <a:solidFill>
+                  <a:srgbClr val="6B7280"/>
+                </a:solidFill>
+                <a:latin typeface="Calibri" pitchFamily="34" charset="0"/>
+                <a:ea typeface="Calibri" pitchFamily="34" charset="-122"/>
+                <a:cs typeface="Calibri" pitchFamily="34" charset="-120"/>
+              </a:rPr>
+              <a:t>Consolidates all sessions into one authoritative Knowledge Article</a:t>
+            </a:r>
+            <a:endParaRPr lang="en-US" sz="1000" dirty="0"/>
+          </a:p>
+        </p:txBody>
+      </p:sp>
+      <p:sp>
+        <p:nvSpPr>
+          <p:cNvPr id="28" name="Shape 26"/>
+          <p:cNvSpPr/>
+          <p:nvPr/>
+        </p:nvSpPr>
+        <p:spPr>
+          <a:xfrm>
+            <a:off x="5029200" y="1965960"/>
+            <a:ext cx="128016" cy="411480"/>
+          </a:xfrm>
+          <a:prstGeom prst="rect">
+            <a:avLst/>
+          </a:prstGeom>
+          <a:solidFill>
+            <a:srgbClr val="00897B"/>
+          </a:solidFill>
+          <a:ln w="12700">
+            <a:solidFill>
+              <a:srgbClr val="00897B"/>
+            </a:solidFill>
+            <a:prstDash val="solid"/>
+          </a:ln>
+        </p:spPr>
+      </p:sp>
+      <p:sp>
+        <p:nvSpPr>
+          <p:cNvPr id="29" name="Shape 27"/>
+          <p:cNvSpPr/>
+          <p:nvPr/>
+        </p:nvSpPr>
+        <p:spPr>
+          <a:xfrm>
+            <a:off x="4892040" y="2423160"/>
+            <a:ext cx="411480" cy="411480"/>
+          </a:xfrm>
+          <a:prstGeom prst="rect">
+            <a:avLst/>
+          </a:prstGeom>
+          <a:solidFill>
+            <a:srgbClr val="00695C"/>
+          </a:solidFill>
+          <a:ln w="12700">
+            <a:solidFill>
+              <a:srgbClr val="00695C"/>
+            </a:solidFill>
+            <a:prstDash val="solid"/>
+          </a:ln>
+        </p:spPr>
+      </p:sp>
+      <p:sp>
+        <p:nvSpPr>
+          <p:cNvPr id="30" name="Text 28"/>
+          <p:cNvSpPr/>
+          <p:nvPr/>
+        </p:nvSpPr>
+        <p:spPr>
+          <a:xfrm>
+            <a:off x="4892040" y="2423160"/>
+            <a:ext cx="411480" cy="411480"/>
+          </a:xfrm>
+          <a:prstGeom prst="rect">
+            <a:avLst/>
+          </a:prstGeom>
+          <a:noFill/>
+          <a:ln/>
+        </p:spPr>
+        <p:txBody>
+          <a:bodyPr wrap="square" lIns="0" tIns="0" rIns="0" bIns="0" rtlCol="0" anchor="ctr"/>
+          <a:lstStyle/>
+          <a:p>
+            <a:pPr algn="ctr" indent="0" marL="0">
+              <a:buNone/>
+            </a:pPr>
+            <a:r>
+              <a:rPr lang="en-US" sz="1600" b="1" dirty="0">
+                <a:solidFill>
+                  <a:srgbClr val="FFFFFF"/>
+                </a:solidFill>
+                <a:latin typeface="Georgia" pitchFamily="34" charset="0"/>
+                <a:ea typeface="Georgia" pitchFamily="34" charset="-122"/>
+                <a:cs typeface="Georgia" pitchFamily="34" charset="-120"/>
+              </a:rPr>
+              <a:t>5</a:t>
+            </a:r>
+            <a:endParaRPr lang="en-US" sz="1600" dirty="0"/>
+          </a:p>
+        </p:txBody>
+      </p:sp>
+      <p:sp>
+        <p:nvSpPr>
+          <p:cNvPr id="31" name="Text 29"/>
+          <p:cNvSpPr/>
+          <p:nvPr/>
+        </p:nvSpPr>
+        <p:spPr>
+          <a:xfrm>
+            <a:off x="5394960" y="2423160"/>
+            <a:ext cx="3291840" cy="256032"/>
+          </a:xfrm>
+          <a:prstGeom prst="rect">
+            <a:avLst/>
+          </a:prstGeom>
+          <a:noFill/>
+          <a:ln/>
+        </p:spPr>
+        <p:txBody>
+          <a:bodyPr wrap="square" lIns="0" tIns="0" rIns="0" bIns="0" rtlCol="0" anchor="ctr"/>
+          <a:lstStyle/>
+          <a:p>
+            <a:pPr indent="0" marL="0">
+              <a:buNone/>
+            </a:pPr>
+            <a:r>
+              <a:rPr lang="en-US" sz="1200" b="1" dirty="0">
+                <a:solidFill>
+                  <a:srgbClr val="0D1B4B"/>
+                </a:solidFill>
+                <a:latin typeface="Calibri" pitchFamily="34" charset="0"/>
+                <a:ea typeface="Calibri" pitchFamily="34" charset="-122"/>
+                <a:cs typeface="Calibri" pitchFamily="34" charset="-120"/>
+              </a:rPr>
+              <a:t>Admin Checklist Agent</a:t>
+            </a:r>
+            <a:endParaRPr lang="en-US" sz="1200" dirty="0"/>
+          </a:p>
+        </p:txBody>
+      </p:sp>
+      <p:sp>
+        <p:nvSpPr>
+          <p:cNvPr id="32" name="Text 30"/>
+          <p:cNvSpPr/>
+          <p:nvPr/>
+        </p:nvSpPr>
+        <p:spPr>
+          <a:xfrm>
+            <a:off x="5394960" y="2679192"/>
+            <a:ext cx="3291840" cy="347472"/>
+          </a:xfrm>
+          <a:prstGeom prst="rect">
+            <a:avLst/>
+          </a:prstGeom>
+          <a:noFill/>
+          <a:ln/>
+        </p:spPr>
+        <p:txBody>
+          <a:bodyPr wrap="square" lIns="0" tIns="0" rIns="0" bIns="0" rtlCol="0" anchor="ctr"/>
+          <a:lstStyle/>
+          <a:p>
+            <a:pPr indent="0" marL="0">
+              <a:buNone/>
+            </a:pPr>
+            <a:r>
+              <a:rPr lang="en-US" sz="1000" dirty="0">
+                <a:solidFill>
+                  <a:srgbClr val="6B7280"/>
+                </a:solidFill>
+                <a:latin typeface="Calibri" pitchFamily="34" charset="0"/>
+                <a:ea typeface="Calibri" pitchFamily="34" charset="-122"/>
+                <a:cs typeface="Calibri" pitchFamily="34" charset="-120"/>
+              </a:rPr>
+              <a:t>De-duplicated cross-session best practices checklist with [CRITICAL] tags</a:t>
+            </a:r>
+            <a:endParaRPr lang="en-US" sz="1000" dirty="0"/>
+          </a:p>
+        </p:txBody>
+      </p:sp>
+      <p:sp>
+        <p:nvSpPr>
+          <p:cNvPr id="33" name="Shape 31"/>
+          <p:cNvSpPr/>
+          <p:nvPr/>
+        </p:nvSpPr>
+        <p:spPr>
+          <a:xfrm>
+            <a:off x="5029200" y="2926080"/>
+            <a:ext cx="128016" cy="411480"/>
+          </a:xfrm>
+          <a:prstGeom prst="rect">
+            <a:avLst/>
+          </a:prstGeom>
+          <a:solidFill>
+            <a:srgbClr val="00897B"/>
+          </a:solidFill>
+          <a:ln w="12700">
+            <a:solidFill>
+              <a:srgbClr val="00897B"/>
+            </a:solidFill>
+            <a:prstDash val="solid"/>
+          </a:ln>
+        </p:spPr>
+      </p:sp>
+      <p:sp>
+        <p:nvSpPr>
+          <p:cNvPr id="34" name="Shape 32"/>
+          <p:cNvSpPr/>
+          <p:nvPr/>
+        </p:nvSpPr>
+        <p:spPr>
+          <a:xfrm>
+            <a:off x="4892040" y="3383280"/>
+            <a:ext cx="411480" cy="411480"/>
+          </a:xfrm>
+          <a:prstGeom prst="rect">
+            <a:avLst/>
+          </a:prstGeom>
+          <a:solidFill>
+            <a:srgbClr val="00695C"/>
+          </a:solidFill>
+          <a:ln w="12700">
+            <a:solidFill>
+              <a:srgbClr val="00695C"/>
+            </a:solidFill>
+            <a:prstDash val="solid"/>
+          </a:ln>
+        </p:spPr>
+      </p:sp>
+      <p:sp>
+        <p:nvSpPr>
+          <p:cNvPr id="35" name="Text 33"/>
+          <p:cNvSpPr/>
+          <p:nvPr/>
+        </p:nvSpPr>
+        <p:spPr>
+          <a:xfrm>
+            <a:off x="4892040" y="3383280"/>
+            <a:ext cx="411480" cy="411480"/>
+          </a:xfrm>
+          <a:prstGeom prst="rect">
+            <a:avLst/>
+          </a:prstGeom>
+          <a:noFill/>
+          <a:ln/>
+        </p:spPr>
+        <p:txBody>
+          <a:bodyPr wrap="square" lIns="0" tIns="0" rIns="0" bIns="0" rtlCol="0" anchor="ctr"/>
+          <a:lstStyle/>
+          <a:p>
+            <a:pPr algn="ctr" indent="0" marL="0">
+              <a:buNone/>
+            </a:pPr>
+            <a:r>
+              <a:rPr lang="en-US" sz="1600" b="1" dirty="0">
+                <a:solidFill>
+                  <a:srgbClr val="FFFFFF"/>
+                </a:solidFill>
+                <a:latin typeface="Georgia" pitchFamily="34" charset="0"/>
+                <a:ea typeface="Georgia" pitchFamily="34" charset="-122"/>
+                <a:cs typeface="Georgia" pitchFamily="34" charset="-120"/>
+              </a:rPr>
+              <a:t>6</a:t>
+            </a:r>
+            <a:endParaRPr lang="en-US" sz="1600" dirty="0"/>
+          </a:p>
+        </p:txBody>
+      </p:sp>
+      <p:sp>
+        <p:nvSpPr>
+          <p:cNvPr id="36" name="Text 34"/>
+          <p:cNvSpPr/>
+          <p:nvPr/>
+        </p:nvSpPr>
+        <p:spPr>
+          <a:xfrm>
+            <a:off x="5394960" y="3383280"/>
+            <a:ext cx="3291840" cy="256032"/>
+          </a:xfrm>
+          <a:prstGeom prst="rect">
+            <a:avLst/>
+          </a:prstGeom>
+          <a:noFill/>
+          <a:ln/>
+        </p:spPr>
+        <p:txBody>
+          <a:bodyPr wrap="square" lIns="0" tIns="0" rIns="0" bIns="0" rtlCol="0" anchor="ctr"/>
+          <a:lstStyle/>
+          <a:p>
+            <a:pPr indent="0" marL="0">
+              <a:buNone/>
+            </a:pPr>
+            <a:r>
+              <a:rPr lang="en-US" sz="1200" b="1" dirty="0">
+                <a:solidFill>
+                  <a:srgbClr val="0D1B4B"/>
+                </a:solidFill>
+                <a:latin typeface="Calibri" pitchFamily="34" charset="0"/>
+                <a:ea typeface="Calibri" pitchFamily="34" charset="-122"/>
+                <a:cs typeface="Calibri" pitchFamily="34" charset="-120"/>
+              </a:rPr>
+              <a:t>Admin Graph Agent</a:t>
+            </a:r>
+            <a:endParaRPr lang="en-US" sz="1200" dirty="0"/>
+          </a:p>
+        </p:txBody>
+      </p:sp>
+      <p:sp>
+        <p:nvSpPr>
+          <p:cNvPr id="37" name="Text 35"/>
+          <p:cNvSpPr/>
+          <p:nvPr/>
+        </p:nvSpPr>
+        <p:spPr>
+          <a:xfrm>
+            <a:off x="5394960" y="3639312"/>
+            <a:ext cx="3291840" cy="347472"/>
+          </a:xfrm>
+          <a:prstGeom prst="rect">
+            <a:avLst/>
+          </a:prstGeom>
+          <a:noFill/>
+          <a:ln/>
+        </p:spPr>
+        <p:txBody>
+          <a:bodyPr wrap="square" lIns="0" tIns="0" rIns="0" bIns="0" rtlCol="0" anchor="ctr"/>
+          <a:lstStyle/>
+          <a:p>
+            <a:pPr indent="0" marL="0">
+              <a:buNone/>
+            </a:pPr>
+            <a:r>
+              <a:rPr lang="en-US" sz="1000" dirty="0">
+                <a:solidFill>
+                  <a:srgbClr val="6B7280"/>
+                </a:solidFill>
+                <a:latin typeface="Calibri" pitchFamily="34" charset="0"/>
+                <a:ea typeface="Calibri" pitchFamily="34" charset="-122"/>
+                <a:cs typeface="Calibri" pitchFamily="34" charset="-120"/>
+              </a:rPr>
+              <a:t>Unified knowledge graph — SQL merge or full LLM re-extraction</a:t>
+            </a:r>
+            <a:endParaRPr lang="en-US" sz="1000" dirty="0"/>
+          </a:p>
+        </p:txBody>
+      </p:sp>
+      <p:sp>
+        <p:nvSpPr>
+          <p:cNvPr id="38" name="Shape 36"/>
+          <p:cNvSpPr/>
+          <p:nvPr/>
+        </p:nvSpPr>
+        <p:spPr>
+          <a:xfrm>
+            <a:off x="274320" y="4572000"/>
+            <a:ext cx="8595360" cy="274320"/>
+          </a:xfrm>
+          <a:prstGeom prst="rect">
+            <a:avLst/>
+          </a:prstGeom>
+          <a:solidFill>
+            <a:srgbClr val="E8EAF6"/>
+          </a:solidFill>
+          <a:ln w="12700">
+            <a:solidFill>
+              <a:srgbClr val="E8EAF6"/>
+            </a:solidFill>
+            <a:prstDash val="solid"/>
+          </a:ln>
+        </p:spPr>
+      </p:sp>
+      <p:sp>
+        <p:nvSpPr>
+          <p:cNvPr id="39" name="Text 37"/>
+          <p:cNvSpPr/>
+          <p:nvPr/>
+        </p:nvSpPr>
+        <p:spPr>
+          <a:xfrm>
+            <a:off x="274320" y="4572000"/>
+            <a:ext cx="8595360" cy="274320"/>
+          </a:xfrm>
+          <a:prstGeom prst="rect">
+            <a:avLst/>
+          </a:prstGeom>
+          <a:noFill/>
+          <a:ln/>
+        </p:spPr>
+        <p:txBody>
+          <a:bodyPr wrap="square" lIns="0" tIns="0" rIns="0" bIns="0" rtlCol="0" anchor="ctr"/>
+          <a:lstStyle/>
+          <a:p>
+            <a:pPr algn="ctr" indent="0" marL="0">
+              <a:buNone/>
+            </a:pPr>
+            <a:r>
+              <a:rPr lang="en-US" sz="1000" b="1" dirty="0">
+                <a:solidFill>
+                  <a:srgbClr val="0D1B4B"/>
+                </a:solidFill>
+                <a:latin typeface="Calibri" pitchFamily="34" charset="0"/>
+                <a:ea typeface="Calibri" pitchFamily="34" charset="-122"/>
+                <a:cs typeface="Calibri" pitchFamily="34" charset="-120"/>
+              </a:rPr>
+              <a:t>Tech Stack:  Claude API (Anthropic)  |  FastAPI  |  WebSocket  |  SQLite  |  vis-network  |  ngrok  |  GitHub</a:t>
+            </a:r>
+            <a:endParaRPr lang="en-US" sz="1000" dirty="0"/>
+          </a:p>
+        </p:txBody>
+      </p:sp>
+      <p:sp>
+        <p:nvSpPr>
+          <p:cNvPr id="40" name="Shape 38"/>
+          <p:cNvSpPr/>
+          <p:nvPr/>
+        </p:nvSpPr>
+        <p:spPr>
+          <a:xfrm>
+            <a:off x="0" y="4892040"/>
+            <a:ext cx="9144000" cy="251460"/>
+          </a:xfrm>
+          <a:prstGeom prst="rect">
+            <a:avLst/>
+          </a:prstGeom>
+          <a:solidFill>
+            <a:srgbClr val="E8EAF6"/>
+          </a:solidFill>
+          <a:ln w="12700">
+            <a:solidFill>
+              <a:srgbClr val="E8EAF6"/>
+            </a:solidFill>
+            <a:prstDash val="solid"/>
+          </a:ln>
+        </p:spPr>
+      </p:sp>
+      <p:sp>
+        <p:nvSpPr>
+          <p:cNvPr id="41" name="Text 39"/>
+          <p:cNvSpPr/>
+          <p:nvPr/>
+        </p:nvSpPr>
+        <p:spPr>
+          <a:xfrm>
+            <a:off x="274320" y="4892040"/>
+            <a:ext cx="8595360" cy="251460"/>
+          </a:xfrm>
+          <a:prstGeom prst="rect">
+            <a:avLst/>
+          </a:prstGeom>
+          <a:noFill/>
+          <a:ln/>
+        </p:spPr>
+        <p:txBody>
+          <a:bodyPr wrap="square" lIns="0" tIns="0" rIns="0" bIns="0" rtlCol="0" anchor="ctr"/>
+          <a:lstStyle/>
+          <a:p>
+            <a:pPr indent="0" marL="0">
+              <a:buNone/>
+            </a:pPr>
+            <a:r>
+              <a:rPr lang="en-US" sz="900" dirty="0">
+                <a:solidFill>
+                  <a:srgbClr val="6B7280"/>
+                </a:solidFill>
+                <a:latin typeface="Calibri" pitchFamily="34" charset="0"/>
+                <a:ea typeface="Calibri" pitchFamily="34" charset="-122"/>
+                <a:cs typeface="Calibri" pitchFamily="34" charset="-120"/>
+              </a:rPr>
+              <a:t>TTK Companion Agent Pipeline  |  Executive Briefing  |  2026</a:t>
+            </a:r>
+            <a:endParaRPr lang="en-US" sz="900" dirty="0"/>
+          </a:p>
+        </p:txBody>
+      </p:sp>
+    </p:spTree>
+  </p:cSld>
+  <p:clrMapOvr>
+    <a:masterClrMapping/>
+  </p:clrMapOvr>
+</p:sld>
+</file>
+
+<file path=ppt/slides/slide6.xml><?xml version="1.0" encoding="utf-8"?>
+<p:sld xmlns:a="http://schemas.openxmlformats.org/drawingml/2006/main" xmlns:r="http://schemas.openxmlformats.org/officeDocument/2006/relationships" xmlns:p="http://schemas.openxmlformats.org/presentationml/2006/main">
+  <p:cSld name="Slide 6">
     <p:bg>
       <p:bgPr>
         <a:solidFill>
@@ -7521,9 +10265,9 @@
 </p:sld>
 </file>
 
-<file path=ppt/slides/slide6.xml><?xml version="1.0" encoding="utf-8"?>
+<file path=ppt/slides/slide7.xml><?xml version="1.0" encoding="utf-8"?>
 <p:sld xmlns:a="http://schemas.openxmlformats.org/drawingml/2006/main" xmlns:r="http://schemas.openxmlformats.org/officeDocument/2006/relationships" xmlns:p="http://schemas.openxmlformats.org/presentationml/2006/main">
-  <p:cSld name="Slide 6">
+  <p:cSld name="Slide 7">
     <p:bg>
       <p:bgPr>
         <a:solidFill>
@@ -8509,9 +11253,9 @@
 </p:sld>
 </file>
 
-<file path=ppt/slides/slide7.xml><?xml version="1.0" encoding="utf-8"?>
+<file path=ppt/slides/slide8.xml><?xml version="1.0" encoding="utf-8"?>
 <p:sld xmlns:a="http://schemas.openxmlformats.org/drawingml/2006/main" xmlns:r="http://schemas.openxmlformats.org/officeDocument/2006/relationships" xmlns:p="http://schemas.openxmlformats.org/presentationml/2006/main">
-  <p:cSld name="Slide 7">
+  <p:cSld name="Slide 8">
     <p:bg>
       <p:bgPr>
         <a:solidFill>
@@ -9536,9 +12280,9 @@
 </p:sld>
 </file>
 
-<file path=ppt/slides/slide8.xml><?xml version="1.0" encoding="utf-8"?>
+<file path=ppt/slides/slide9.xml><?xml version="1.0" encoding="utf-8"?>
 <p:sld xmlns:a="http://schemas.openxmlformats.org/drawingml/2006/main" xmlns:r="http://schemas.openxmlformats.org/officeDocument/2006/relationships" xmlns:p="http://schemas.openxmlformats.org/presentationml/2006/main">
-  <p:cSld name="Slide 8">
+  <p:cSld name="Slide 9">
     <p:bg>
       <p:bgPr>
         <a:solidFill>
@@ -10398,1055 +13142,6 @@
               <a:rPr lang="en-US" sz="900" dirty="0">
                 <a:solidFill>
                   <a:srgbClr val="4455AA"/>
-                </a:solidFill>
-                <a:latin typeface="Calibri" pitchFamily="34" charset="0"/>
-                <a:ea typeface="Calibri" pitchFamily="34" charset="-122"/>
-                <a:cs typeface="Calibri" pitchFamily="34" charset="-120"/>
-              </a:rPr>
-              <a:t>TTK Companion Agent Pipeline  |  Executive Briefing  |  2026</a:t>
-            </a:r>
-            <a:endParaRPr lang="en-US" sz="900" dirty="0"/>
-          </a:p>
-        </p:txBody>
-      </p:sp>
-    </p:spTree>
-  </p:cSld>
-  <p:clrMapOvr>
-    <a:masterClrMapping/>
-  </p:clrMapOvr>
-</p:sld>
-</file>
-
-<file path=ppt/slides/slide9.xml><?xml version="1.0" encoding="utf-8"?>
-<p:sld xmlns:a="http://schemas.openxmlformats.org/drawingml/2006/main" xmlns:r="http://schemas.openxmlformats.org/officeDocument/2006/relationships" xmlns:p="http://schemas.openxmlformats.org/presentationml/2006/main">
-  <p:cSld name="Slide 9">
-    <p:bg>
-      <p:bgPr>
-        <a:solidFill>
-          <a:srgbClr val="F4F5FB"/>
-        </a:solidFill>
-      </p:bgPr>
-    </p:bg>
-    <p:spTree>
-      <p:nvGrpSpPr>
-        <p:cNvPr id="1" name=""/>
-        <p:cNvGrpSpPr/>
-        <p:nvPr/>
-      </p:nvGrpSpPr>
-      <p:grpSpPr>
-        <a:xfrm>
-          <a:off x="0" y="0"/>
-          <a:ext cx="0" cy="0"/>
-          <a:chOff x="0" y="0"/>
-          <a:chExt cx="0" cy="0"/>
-        </a:xfrm>
-      </p:grpSpPr>
-      <p:sp>
-        <p:nvSpPr>
-          <p:cNvPr id="2" name="Shape 0"/>
-          <p:cNvSpPr/>
-          <p:nvPr/>
-        </p:nvSpPr>
-        <p:spPr>
-          <a:xfrm>
-            <a:off x="0" y="0"/>
-            <a:ext cx="9144000" cy="777240"/>
-          </a:xfrm>
-          <a:prstGeom prst="rect">
-            <a:avLst/>
-          </a:prstGeom>
-          <a:solidFill>
-            <a:srgbClr val="0D1B4B"/>
-          </a:solidFill>
-          <a:ln w="12700">
-            <a:solidFill>
-              <a:srgbClr val="0D1B4B"/>
-            </a:solidFill>
-            <a:prstDash val="solid"/>
-          </a:ln>
-        </p:spPr>
-      </p:sp>
-      <p:sp>
-        <p:nvSpPr>
-          <p:cNvPr id="3" name="Text 1"/>
-          <p:cNvSpPr/>
-          <p:nvPr/>
-        </p:nvSpPr>
-        <p:spPr>
-          <a:xfrm>
-            <a:off x="365760" y="0"/>
-            <a:ext cx="8412480" cy="777240"/>
-          </a:xfrm>
-          <a:prstGeom prst="rect">
-            <a:avLst/>
-          </a:prstGeom>
-          <a:noFill/>
-          <a:ln/>
-        </p:spPr>
-        <p:txBody>
-          <a:bodyPr wrap="square" lIns="0" tIns="0" rIns="0" bIns="0" rtlCol="0" anchor="ctr"/>
-          <a:lstStyle/>
-          <a:p>
-            <a:pPr indent="0" marL="0">
-              <a:buNone/>
-            </a:pPr>
-            <a:r>
-              <a:rPr lang="en-US" sz="2200" b="1" dirty="0">
-                <a:solidFill>
-                  <a:srgbClr val="FFFFFF"/>
-                </a:solidFill>
-                <a:latin typeface="Georgia" pitchFamily="34" charset="0"/>
-                <a:ea typeface="Georgia" pitchFamily="34" charset="-122"/>
-                <a:cs typeface="Georgia" pitchFamily="34" charset="-120"/>
-              </a:rPr>
-              <a:t>Deployment &amp; Access</a:t>
-            </a:r>
-            <a:endParaRPr lang="en-US" sz="2200" dirty="0"/>
-          </a:p>
-        </p:txBody>
-      </p:sp>
-      <p:sp>
-        <p:nvSpPr>
-          <p:cNvPr id="4" name="Shape 2"/>
-          <p:cNvSpPr/>
-          <p:nvPr/>
-        </p:nvSpPr>
-        <p:spPr>
-          <a:xfrm>
-            <a:off x="274320" y="914400"/>
-            <a:ext cx="2788920" cy="3611880"/>
-          </a:xfrm>
-          <a:prstGeom prst="rect">
-            <a:avLst/>
-          </a:prstGeom>
-          <a:solidFill>
-            <a:srgbClr val="FFFFFF"/>
-          </a:solidFill>
-          <a:ln w="12700">
-            <a:solidFill>
-              <a:srgbClr val="E0E3F0"/>
-            </a:solidFill>
-            <a:prstDash val="solid"/>
-          </a:ln>
-          <a:effectLst>
-            <a:outerShdw sx="100000" sy="100000" kx="0" ky="0" algn="bl" rotWithShape="0" blurRad="101600" dist="38100" dir="8100000">
-              <a:srgbClr val="000000">
-                <a:alpha val="12000"/>
-              </a:srgbClr>
-            </a:outerShdw>
-          </a:effectLst>
-        </p:spPr>
-      </p:sp>
-      <p:sp>
-        <p:nvSpPr>
-          <p:cNvPr id="5" name="Shape 3"/>
-          <p:cNvSpPr/>
-          <p:nvPr/>
-        </p:nvSpPr>
-        <p:spPr>
-          <a:xfrm>
-            <a:off x="274320" y="914400"/>
-            <a:ext cx="2788920" cy="438912"/>
-          </a:xfrm>
-          <a:prstGeom prst="rect">
-            <a:avLst/>
-          </a:prstGeom>
-          <a:solidFill>
-            <a:srgbClr val="0D1B4B"/>
-          </a:solidFill>
-          <a:ln w="12700">
-            <a:solidFill>
-              <a:srgbClr val="0D1B4B"/>
-            </a:solidFill>
-            <a:prstDash val="solid"/>
-          </a:ln>
-        </p:spPr>
-      </p:sp>
-      <p:sp>
-        <p:nvSpPr>
-          <p:cNvPr id="6" name="Text 4"/>
-          <p:cNvSpPr/>
-          <p:nvPr/>
-        </p:nvSpPr>
-        <p:spPr>
-          <a:xfrm>
-            <a:off x="274320" y="914400"/>
-            <a:ext cx="2788920" cy="438912"/>
-          </a:xfrm>
-          <a:prstGeom prst="rect">
-            <a:avLst/>
-          </a:prstGeom>
-          <a:noFill/>
-          <a:ln/>
-        </p:spPr>
-        <p:txBody>
-          <a:bodyPr wrap="square" lIns="0" tIns="0" rIns="0" bIns="0" rtlCol="0" anchor="ctr"/>
-          <a:lstStyle/>
-          <a:p>
-            <a:pPr algn="ctr" indent="0" marL="0">
-              <a:buNone/>
-            </a:pPr>
-            <a:r>
-              <a:rPr lang="en-US" sz="1100" b="1" spc="150" kern="0" dirty="0">
-                <a:solidFill>
-                  <a:srgbClr val="FFFFFF"/>
-                </a:solidFill>
-                <a:latin typeface="Calibri" pitchFamily="34" charset="0"/>
-                <a:ea typeface="Calibri" pitchFamily="34" charset="-122"/>
-                <a:cs typeface="Calibri" pitchFamily="34" charset="-120"/>
-              </a:rPr>
-              <a:t>LOCAL</a:t>
-            </a:r>
-            <a:endParaRPr lang="en-US" sz="1100" dirty="0"/>
-          </a:p>
-        </p:txBody>
-      </p:sp>
-      <p:sp>
-        <p:nvSpPr>
-          <p:cNvPr id="7" name="Shape 5"/>
-          <p:cNvSpPr/>
-          <p:nvPr/>
-        </p:nvSpPr>
-        <p:spPr>
-          <a:xfrm>
-            <a:off x="411480" y="1481328"/>
-            <a:ext cx="2514600" cy="402336"/>
-          </a:xfrm>
-          <a:prstGeom prst="rect">
-            <a:avLst/>
-          </a:prstGeom>
-          <a:solidFill>
-            <a:srgbClr val="E8EAF6"/>
-          </a:solidFill>
-          <a:ln w="12700">
-            <a:solidFill>
-              <a:srgbClr val="E8EAF6"/>
-            </a:solidFill>
-            <a:prstDash val="solid"/>
-          </a:ln>
-        </p:spPr>
-      </p:sp>
-      <p:sp>
-        <p:nvSpPr>
-          <p:cNvPr id="8" name="Text 6"/>
-          <p:cNvSpPr/>
-          <p:nvPr/>
-        </p:nvSpPr>
-        <p:spPr>
-          <a:xfrm>
-            <a:off x="411480" y="1481328"/>
-            <a:ext cx="2514600" cy="402336"/>
-          </a:xfrm>
-          <a:prstGeom prst="rect">
-            <a:avLst/>
-          </a:prstGeom>
-          <a:noFill/>
-          <a:ln/>
-        </p:spPr>
-        <p:txBody>
-          <a:bodyPr wrap="square" lIns="0" tIns="0" rIns="0" bIns="0" rtlCol="0" anchor="ctr"/>
-          <a:lstStyle/>
-          <a:p>
-            <a:pPr algn="ctr" indent="0" marL="0">
-              <a:buNone/>
-            </a:pPr>
-            <a:r>
-              <a:rPr lang="en-US" sz="1200" b="1" dirty="0">
-                <a:solidFill>
-                  <a:srgbClr val="0D1B4B"/>
-                </a:solidFill>
-                <a:latin typeface="Consolas" pitchFamily="34" charset="0"/>
-                <a:ea typeface="Consolas" pitchFamily="34" charset="-122"/>
-                <a:cs typeface="Consolas" pitchFamily="34" charset="-120"/>
-              </a:rPr>
-              <a:t>localhost:8000</a:t>
-            </a:r>
-            <a:endParaRPr lang="en-US" sz="1200" dirty="0"/>
-          </a:p>
-        </p:txBody>
-      </p:sp>
-      <p:sp>
-        <p:nvSpPr>
-          <p:cNvPr id="9" name="Text 7"/>
-          <p:cNvSpPr/>
-          <p:nvPr/>
-        </p:nvSpPr>
-        <p:spPr>
-          <a:xfrm>
-            <a:off x="457200" y="2011680"/>
-            <a:ext cx="2423160" cy="2331720"/>
-          </a:xfrm>
-          <a:prstGeom prst="rect">
-            <a:avLst/>
-          </a:prstGeom>
-          <a:noFill/>
-          <a:ln/>
-        </p:spPr>
-        <p:txBody>
-          <a:bodyPr wrap="square" rtlCol="0" anchor="t"/>
-          <a:lstStyle/>
-          <a:p>
-            <a:pPr marL="342900" indent="-342900">
-              <a:lnSpc>
-                <a:spcPct val="140000"/>
-              </a:lnSpc>
-              <a:buSzPct val="100000"/>
-              <a:buChar char="•"/>
-            </a:pPr>
-            <a:r>
-              <a:rPr lang="en-US" sz="1100" dirty="0">
-                <a:solidFill>
-                  <a:srgbClr val="1C1E2E"/>
-                </a:solidFill>
-                <a:latin typeface="Calibri" pitchFamily="34" charset="0"/>
-                <a:ea typeface="Calibri" pitchFamily="34" charset="-122"/>
-                <a:cs typeface="Calibri" pitchFamily="34" charset="-120"/>
-              </a:rPr>
-              <a:t>uvicorn app:app --reload --port 8000</a:t>
-            </a:r>
-            <a:endParaRPr lang="en-US" sz="1100" dirty="0"/>
-          </a:p>
-          <a:p>
-            <a:pPr marL="342900" indent="-342900">
-              <a:lnSpc>
-                <a:spcPct val="140000"/>
-              </a:lnSpc>
-              <a:buSzPct val="100000"/>
-              <a:buChar char="•"/>
-            </a:pPr>
-            <a:r>
-              <a:rPr lang="en-US" sz="1100" dirty="0">
-                <a:solidFill>
-                  <a:srgbClr val="1C1E2E"/>
-                </a:solidFill>
-                <a:latin typeface="Calibri" pitchFamily="34" charset="0"/>
-                <a:ea typeface="Calibri" pitchFamily="34" charset="-122"/>
-                <a:cs typeface="Calibri" pitchFamily="34" charset="-120"/>
-              </a:rPr>
-              <a:t>Engineer view: /</a:t>
-            </a:r>
-            <a:endParaRPr lang="en-US" sz="1100" dirty="0"/>
-          </a:p>
-          <a:p>
-            <a:pPr marL="342900" indent="-342900">
-              <a:lnSpc>
-                <a:spcPct val="140000"/>
-              </a:lnSpc>
-              <a:buSzPct val="100000"/>
-              <a:buChar char="•"/>
-            </a:pPr>
-            <a:r>
-              <a:rPr lang="en-US" sz="1100" dirty="0">
-                <a:solidFill>
-                  <a:srgbClr val="1C1E2E"/>
-                </a:solidFill>
-                <a:latin typeface="Calibri" pitchFamily="34" charset="0"/>
-                <a:ea typeface="Calibri" pitchFamily="34" charset="-122"/>
-                <a:cs typeface="Calibri" pitchFamily="34" charset="-120"/>
-              </a:rPr>
-              <a:t>Admin dashboard: /admin</a:t>
-            </a:r>
-            <a:endParaRPr lang="en-US" sz="1100" dirty="0"/>
-          </a:p>
-          <a:p>
-            <a:pPr marL="342900" indent="-342900">
-              <a:lnSpc>
-                <a:spcPct val="140000"/>
-              </a:lnSpc>
-              <a:buSzPct val="100000"/>
-              <a:buChar char="•"/>
-            </a:pPr>
-            <a:r>
-              <a:rPr lang="en-US" sz="1100" dirty="0">
-                <a:solidFill>
-                  <a:srgbClr val="1C1E2E"/>
-                </a:solidFill>
-                <a:latin typeface="Calibri" pitchFamily="34" charset="0"/>
-                <a:ea typeface="Calibri" pitchFamily="34" charset="-122"/>
-                <a:cs typeface="Calibri" pitchFamily="34" charset="-120"/>
-              </a:rPr>
-              <a:t>SQLite DB: ttk_output/ttk_knowledge.db</a:t>
-            </a:r>
-            <a:endParaRPr lang="en-US" sz="1100" dirty="0"/>
-          </a:p>
-          <a:p>
-            <a:pPr indent="0" marL="0">
-              <a:lnSpc>
-                <a:spcPct val="140000"/>
-              </a:lnSpc>
-              <a:buNone/>
-            </a:pPr>
-            <a:endParaRPr lang="en-US" sz="1100" dirty="0"/>
-          </a:p>
-        </p:txBody>
-      </p:sp>
-      <p:sp>
-        <p:nvSpPr>
-          <p:cNvPr id="10" name="Shape 8"/>
-          <p:cNvSpPr/>
-          <p:nvPr/>
-        </p:nvSpPr>
-        <p:spPr>
-          <a:xfrm>
-            <a:off x="3200400" y="914400"/>
-            <a:ext cx="2788920" cy="3611880"/>
-          </a:xfrm>
-          <a:prstGeom prst="rect">
-            <a:avLst/>
-          </a:prstGeom>
-          <a:solidFill>
-            <a:srgbClr val="FFFFFF"/>
-          </a:solidFill>
-          <a:ln w="12700">
-            <a:solidFill>
-              <a:srgbClr val="E0E3F0"/>
-            </a:solidFill>
-            <a:prstDash val="solid"/>
-          </a:ln>
-          <a:effectLst>
-            <a:outerShdw sx="100000" sy="100000" kx="0" ky="0" algn="bl" rotWithShape="0" blurRad="101600" dist="38100" dir="8100000">
-              <a:srgbClr val="000000">
-                <a:alpha val="12000"/>
-              </a:srgbClr>
-            </a:outerShdw>
-          </a:effectLst>
-        </p:spPr>
-      </p:sp>
-      <p:sp>
-        <p:nvSpPr>
-          <p:cNvPr id="11" name="Shape 9"/>
-          <p:cNvSpPr/>
-          <p:nvPr/>
-        </p:nvSpPr>
-        <p:spPr>
-          <a:xfrm>
-            <a:off x="3200400" y="914400"/>
-            <a:ext cx="2788920" cy="438912"/>
-          </a:xfrm>
-          <a:prstGeom prst="rect">
-            <a:avLst/>
-          </a:prstGeom>
-          <a:solidFill>
-            <a:srgbClr val="3949AB"/>
-          </a:solidFill>
-          <a:ln w="12700">
-            <a:solidFill>
-              <a:srgbClr val="3949AB"/>
-            </a:solidFill>
-            <a:prstDash val="solid"/>
-          </a:ln>
-        </p:spPr>
-      </p:sp>
-      <p:sp>
-        <p:nvSpPr>
-          <p:cNvPr id="12" name="Text 10"/>
-          <p:cNvSpPr/>
-          <p:nvPr/>
-        </p:nvSpPr>
-        <p:spPr>
-          <a:xfrm>
-            <a:off x="3200400" y="914400"/>
-            <a:ext cx="2788920" cy="438912"/>
-          </a:xfrm>
-          <a:prstGeom prst="rect">
-            <a:avLst/>
-          </a:prstGeom>
-          <a:noFill/>
-          <a:ln/>
-        </p:spPr>
-        <p:txBody>
-          <a:bodyPr wrap="square" lIns="0" tIns="0" rIns="0" bIns="0" rtlCol="0" anchor="ctr"/>
-          <a:lstStyle/>
-          <a:p>
-            <a:pPr algn="ctr" indent="0" marL="0">
-              <a:buNone/>
-            </a:pPr>
-            <a:r>
-              <a:rPr lang="en-US" sz="1100" b="1" spc="150" kern="0" dirty="0">
-                <a:solidFill>
-                  <a:srgbClr val="FFFFFF"/>
-                </a:solidFill>
-                <a:latin typeface="Calibri" pitchFamily="34" charset="0"/>
-                <a:ea typeface="Calibri" pitchFamily="34" charset="-122"/>
-                <a:cs typeface="Calibri" pitchFamily="34" charset="-120"/>
-              </a:rPr>
-              <a:t>PUBLIC</a:t>
-            </a:r>
-            <a:endParaRPr lang="en-US" sz="1100" dirty="0"/>
-          </a:p>
-        </p:txBody>
-      </p:sp>
-      <p:sp>
-        <p:nvSpPr>
-          <p:cNvPr id="13" name="Shape 11"/>
-          <p:cNvSpPr/>
-          <p:nvPr/>
-        </p:nvSpPr>
-        <p:spPr>
-          <a:xfrm>
-            <a:off x="3337560" y="1481328"/>
-            <a:ext cx="2514600" cy="402336"/>
-          </a:xfrm>
-          <a:prstGeom prst="rect">
-            <a:avLst/>
-          </a:prstGeom>
-          <a:solidFill>
-            <a:srgbClr val="E8EAF6"/>
-          </a:solidFill>
-          <a:ln w="12700">
-            <a:solidFill>
-              <a:srgbClr val="E8EAF6"/>
-            </a:solidFill>
-            <a:prstDash val="solid"/>
-          </a:ln>
-        </p:spPr>
-      </p:sp>
-      <p:sp>
-        <p:nvSpPr>
-          <p:cNvPr id="14" name="Text 12"/>
-          <p:cNvSpPr/>
-          <p:nvPr/>
-        </p:nvSpPr>
-        <p:spPr>
-          <a:xfrm>
-            <a:off x="3337560" y="1481328"/>
-            <a:ext cx="2514600" cy="402336"/>
-          </a:xfrm>
-          <a:prstGeom prst="rect">
-            <a:avLst/>
-          </a:prstGeom>
-          <a:noFill/>
-          <a:ln/>
-        </p:spPr>
-        <p:txBody>
-          <a:bodyPr wrap="square" lIns="0" tIns="0" rIns="0" bIns="0" rtlCol="0" anchor="ctr"/>
-          <a:lstStyle/>
-          <a:p>
-            <a:pPr algn="ctr" indent="0" marL="0">
-              <a:buNone/>
-            </a:pPr>
-            <a:r>
-              <a:rPr lang="en-US" sz="1200" b="1" dirty="0">
-                <a:solidFill>
-                  <a:srgbClr val="3949AB"/>
-                </a:solidFill>
-                <a:latin typeface="Consolas" pitchFamily="34" charset="0"/>
-                <a:ea typeface="Consolas" pitchFamily="34" charset="-122"/>
-                <a:cs typeface="Consolas" pitchFamily="34" charset="-120"/>
-              </a:rPr>
-              <a:t>knowledge.ngrok-free.app</a:t>
-            </a:r>
-            <a:endParaRPr lang="en-US" sz="1200" dirty="0"/>
-          </a:p>
-        </p:txBody>
-      </p:sp>
-      <p:sp>
-        <p:nvSpPr>
-          <p:cNvPr id="15" name="Text 13"/>
-          <p:cNvSpPr/>
-          <p:nvPr/>
-        </p:nvSpPr>
-        <p:spPr>
-          <a:xfrm>
-            <a:off x="3383280" y="2011680"/>
-            <a:ext cx="2423160" cy="2331720"/>
-          </a:xfrm>
-          <a:prstGeom prst="rect">
-            <a:avLst/>
-          </a:prstGeom>
-          <a:noFill/>
-          <a:ln/>
-        </p:spPr>
-        <p:txBody>
-          <a:bodyPr wrap="square" rtlCol="0" anchor="t"/>
-          <a:lstStyle/>
-          <a:p>
-            <a:pPr marL="342900" indent="-342900">
-              <a:lnSpc>
-                <a:spcPct val="140000"/>
-              </a:lnSpc>
-              <a:buSzPct val="100000"/>
-              <a:buChar char="•"/>
-            </a:pPr>
-            <a:r>
-              <a:rPr lang="en-US" sz="1100" dirty="0">
-                <a:solidFill>
-                  <a:srgbClr val="1C1E2E"/>
-                </a:solidFill>
-                <a:latin typeface="Calibri" pitchFamily="34" charset="0"/>
-                <a:ea typeface="Calibri" pitchFamily="34" charset="-122"/>
-                <a:cs typeface="Calibri" pitchFamily="34" charset="-120"/>
-              </a:rPr>
-              <a:t>ngrok static domain (free tier)</a:t>
-            </a:r>
-            <a:endParaRPr lang="en-US" sz="1100" dirty="0"/>
-          </a:p>
-          <a:p>
-            <a:pPr marL="342900" indent="-342900">
-              <a:lnSpc>
-                <a:spcPct val="140000"/>
-              </a:lnSpc>
-              <a:buSzPct val="100000"/>
-              <a:buChar char="•"/>
-            </a:pPr>
-            <a:r>
-              <a:rPr lang="en-US" sz="1100" dirty="0">
-                <a:solidFill>
-                  <a:srgbClr val="1C1E2E"/>
-                </a:solidFill>
-                <a:latin typeface="Calibri" pitchFamily="34" charset="0"/>
-                <a:ea typeface="Calibri" pitchFamily="34" charset="-122"/>
-                <a:cs typeface="Calibri" pitchFamily="34" charset="-120"/>
-              </a:rPr>
-              <a:t>Permanent URL — no change on restart</a:t>
-            </a:r>
-            <a:endParaRPr lang="en-US" sz="1100" dirty="0"/>
-          </a:p>
-          <a:p>
-            <a:pPr marL="342900" indent="-342900">
-              <a:lnSpc>
-                <a:spcPct val="140000"/>
-              </a:lnSpc>
-              <a:buSzPct val="100000"/>
-              <a:buChar char="•"/>
-            </a:pPr>
-            <a:r>
-              <a:rPr lang="en-US" sz="1100" dirty="0">
-                <a:solidFill>
-                  <a:srgbClr val="1C1E2E"/>
-                </a:solidFill>
-                <a:latin typeface="Calibri" pitchFamily="34" charset="0"/>
-                <a:ea typeface="Calibri" pitchFamily="34" charset="-122"/>
-                <a:cs typeface="Calibri" pitchFamily="34" charset="-120"/>
-              </a:rPr>
-              <a:t>Engineer: knowledge.ngrok-free.app</a:t>
-            </a:r>
-            <a:endParaRPr lang="en-US" sz="1100" dirty="0"/>
-          </a:p>
-          <a:p>
-            <a:pPr marL="342900" indent="-342900">
-              <a:lnSpc>
-                <a:spcPct val="140000"/>
-              </a:lnSpc>
-              <a:buSzPct val="100000"/>
-              <a:buChar char="•"/>
-            </a:pPr>
-            <a:r>
-              <a:rPr lang="en-US" sz="1100" dirty="0">
-                <a:solidFill>
-                  <a:srgbClr val="1C1E2E"/>
-                </a:solidFill>
-                <a:latin typeface="Calibri" pitchFamily="34" charset="0"/>
-                <a:ea typeface="Calibri" pitchFamily="34" charset="-122"/>
-                <a:cs typeface="Calibri" pitchFamily="34" charset="-120"/>
-              </a:rPr>
-              <a:t>Admin: knowledge.ngrok-free.app/admin</a:t>
-            </a:r>
-            <a:endParaRPr lang="en-US" sz="1100" dirty="0"/>
-          </a:p>
-          <a:p>
-            <a:pPr indent="0" marL="0">
-              <a:lnSpc>
-                <a:spcPct val="140000"/>
-              </a:lnSpc>
-              <a:buNone/>
-            </a:pPr>
-            <a:endParaRPr lang="en-US" sz="1100" dirty="0"/>
-          </a:p>
-        </p:txBody>
-      </p:sp>
-      <p:sp>
-        <p:nvSpPr>
-          <p:cNvPr id="16" name="Shape 14"/>
-          <p:cNvSpPr/>
-          <p:nvPr/>
-        </p:nvSpPr>
-        <p:spPr>
-          <a:xfrm>
-            <a:off x="6126480" y="914400"/>
-            <a:ext cx="2788920" cy="3611880"/>
-          </a:xfrm>
-          <a:prstGeom prst="rect">
-            <a:avLst/>
-          </a:prstGeom>
-          <a:solidFill>
-            <a:srgbClr val="FFFFFF"/>
-          </a:solidFill>
-          <a:ln w="12700">
-            <a:solidFill>
-              <a:srgbClr val="E0E3F0"/>
-            </a:solidFill>
-            <a:prstDash val="solid"/>
-          </a:ln>
-          <a:effectLst>
-            <a:outerShdw sx="100000" sy="100000" kx="0" ky="0" algn="bl" rotWithShape="0" blurRad="101600" dist="38100" dir="8100000">
-              <a:srgbClr val="000000">
-                <a:alpha val="12000"/>
-              </a:srgbClr>
-            </a:outerShdw>
-          </a:effectLst>
-        </p:spPr>
-      </p:sp>
-      <p:sp>
-        <p:nvSpPr>
-          <p:cNvPr id="17" name="Shape 15"/>
-          <p:cNvSpPr/>
-          <p:nvPr/>
-        </p:nvSpPr>
-        <p:spPr>
-          <a:xfrm>
-            <a:off x="6126480" y="914400"/>
-            <a:ext cx="2788920" cy="438912"/>
-          </a:xfrm>
-          <a:prstGeom prst="rect">
-            <a:avLst/>
-          </a:prstGeom>
-          <a:solidFill>
-            <a:srgbClr val="00695C"/>
-          </a:solidFill>
-          <a:ln w="12700">
-            <a:solidFill>
-              <a:srgbClr val="00695C"/>
-            </a:solidFill>
-            <a:prstDash val="solid"/>
-          </a:ln>
-        </p:spPr>
-      </p:sp>
-      <p:sp>
-        <p:nvSpPr>
-          <p:cNvPr id="18" name="Text 16"/>
-          <p:cNvSpPr/>
-          <p:nvPr/>
-        </p:nvSpPr>
-        <p:spPr>
-          <a:xfrm>
-            <a:off x="6126480" y="914400"/>
-            <a:ext cx="2788920" cy="438912"/>
-          </a:xfrm>
-          <a:prstGeom prst="rect">
-            <a:avLst/>
-          </a:prstGeom>
-          <a:noFill/>
-          <a:ln/>
-        </p:spPr>
-        <p:txBody>
-          <a:bodyPr wrap="square" lIns="0" tIns="0" rIns="0" bIns="0" rtlCol="0" anchor="ctr"/>
-          <a:lstStyle/>
-          <a:p>
-            <a:pPr algn="ctr" indent="0" marL="0">
-              <a:buNone/>
-            </a:pPr>
-            <a:r>
-              <a:rPr lang="en-US" sz="1100" b="1" spc="150" kern="0" dirty="0">
-                <a:solidFill>
-                  <a:srgbClr val="FFFFFF"/>
-                </a:solidFill>
-                <a:latin typeface="Calibri" pitchFamily="34" charset="0"/>
-                <a:ea typeface="Calibri" pitchFamily="34" charset="-122"/>
-                <a:cs typeface="Calibri" pitchFamily="34" charset="-120"/>
-              </a:rPr>
-              <a:t>CLOUD (RECOMMENDED)</a:t>
-            </a:r>
-            <a:endParaRPr lang="en-US" sz="1100" dirty="0"/>
-          </a:p>
-        </p:txBody>
-      </p:sp>
-      <p:sp>
-        <p:nvSpPr>
-          <p:cNvPr id="19" name="Shape 17"/>
-          <p:cNvSpPr/>
-          <p:nvPr/>
-        </p:nvSpPr>
-        <p:spPr>
-          <a:xfrm>
-            <a:off x="6263640" y="1481328"/>
-            <a:ext cx="2514600" cy="402336"/>
-          </a:xfrm>
-          <a:prstGeom prst="rect">
-            <a:avLst/>
-          </a:prstGeom>
-          <a:solidFill>
-            <a:srgbClr val="E8EAF6"/>
-          </a:solidFill>
-          <a:ln w="12700">
-            <a:solidFill>
-              <a:srgbClr val="E8EAF6"/>
-            </a:solidFill>
-            <a:prstDash val="solid"/>
-          </a:ln>
-        </p:spPr>
-      </p:sp>
-      <p:sp>
-        <p:nvSpPr>
-          <p:cNvPr id="20" name="Text 18"/>
-          <p:cNvSpPr/>
-          <p:nvPr/>
-        </p:nvSpPr>
-        <p:spPr>
-          <a:xfrm>
-            <a:off x="6263640" y="1481328"/>
-            <a:ext cx="2514600" cy="402336"/>
-          </a:xfrm>
-          <a:prstGeom prst="rect">
-            <a:avLst/>
-          </a:prstGeom>
-          <a:noFill/>
-          <a:ln/>
-        </p:spPr>
-        <p:txBody>
-          <a:bodyPr wrap="square" lIns="0" tIns="0" rIns="0" bIns="0" rtlCol="0" anchor="ctr"/>
-          <a:lstStyle/>
-          <a:p>
-            <a:pPr algn="ctr" indent="0" marL="0">
-              <a:buNone/>
-            </a:pPr>
-            <a:r>
-              <a:rPr lang="en-US" sz="1200" b="1" dirty="0">
-                <a:solidFill>
-                  <a:srgbClr val="00695C"/>
-                </a:solidFill>
-                <a:latin typeface="Consolas" pitchFamily="34" charset="0"/>
-                <a:ea typeface="Consolas" pitchFamily="34" charset="-122"/>
-                <a:cs typeface="Consolas" pitchFamily="34" charset="-120"/>
-              </a:rPr>
-              <a:t>Railway.app</a:t>
-            </a:r>
-            <a:endParaRPr lang="en-US" sz="1200" dirty="0"/>
-          </a:p>
-        </p:txBody>
-      </p:sp>
-      <p:sp>
-        <p:nvSpPr>
-          <p:cNvPr id="21" name="Text 19"/>
-          <p:cNvSpPr/>
-          <p:nvPr/>
-        </p:nvSpPr>
-        <p:spPr>
-          <a:xfrm>
-            <a:off x="6309360" y="2011680"/>
-            <a:ext cx="2423160" cy="2331720"/>
-          </a:xfrm>
-          <a:prstGeom prst="rect">
-            <a:avLst/>
-          </a:prstGeom>
-          <a:noFill/>
-          <a:ln/>
-        </p:spPr>
-        <p:txBody>
-          <a:bodyPr wrap="square" rtlCol="0" anchor="t"/>
-          <a:lstStyle/>
-          <a:p>
-            <a:pPr marL="342900" indent="-342900">
-              <a:lnSpc>
-                <a:spcPct val="140000"/>
-              </a:lnSpc>
-              <a:buSzPct val="100000"/>
-              <a:buChar char="•"/>
-            </a:pPr>
-            <a:r>
-              <a:rPr lang="en-US" sz="1100" dirty="0">
-                <a:solidFill>
-                  <a:srgbClr val="1C1E2E"/>
-                </a:solidFill>
-                <a:latin typeface="Calibri" pitchFamily="34" charset="0"/>
-                <a:ea typeface="Calibri" pitchFamily="34" charset="-122"/>
-                <a:cs typeface="Calibri" pitchFamily="34" charset="-120"/>
-              </a:rPr>
-              <a:t>railway.toml included in repo</a:t>
-            </a:r>
-            <a:endParaRPr lang="en-US" sz="1100" dirty="0"/>
-          </a:p>
-          <a:p>
-            <a:pPr marL="342900" indent="-342900">
-              <a:lnSpc>
-                <a:spcPct val="140000"/>
-              </a:lnSpc>
-              <a:buSzPct val="100000"/>
-              <a:buChar char="•"/>
-            </a:pPr>
-            <a:r>
-              <a:rPr lang="en-US" sz="1100" dirty="0">
-                <a:solidFill>
-                  <a:srgbClr val="1C1E2E"/>
-                </a:solidFill>
-                <a:latin typeface="Calibri" pitchFamily="34" charset="0"/>
-                <a:ea typeface="Calibri" pitchFamily="34" charset="-122"/>
-                <a:cs typeface="Calibri" pitchFamily="34" charset="-120"/>
-              </a:rPr>
-              <a:t>Connect github.com/girishkurup/ttk-knowledge-agent</a:t>
-            </a:r>
-            <a:endParaRPr lang="en-US" sz="1100" dirty="0"/>
-          </a:p>
-          <a:p>
-            <a:pPr marL="342900" indent="-342900">
-              <a:lnSpc>
-                <a:spcPct val="140000"/>
-              </a:lnSpc>
-              <a:buSzPct val="100000"/>
-              <a:buChar char="•"/>
-            </a:pPr>
-            <a:r>
-              <a:rPr lang="en-US" sz="1100" dirty="0">
-                <a:solidFill>
-                  <a:srgbClr val="1C1E2E"/>
-                </a:solidFill>
-                <a:latin typeface="Calibri" pitchFamily="34" charset="0"/>
-                <a:ea typeface="Calibri" pitchFamily="34" charset="-122"/>
-                <a:cs typeface="Calibri" pitchFamily="34" charset="-120"/>
-              </a:rPr>
-              <a:t>Set ANTHROPIC_API_KEY in Railway dashboard</a:t>
-            </a:r>
-            <a:endParaRPr lang="en-US" sz="1100" dirty="0"/>
-          </a:p>
-          <a:p>
-            <a:pPr marL="342900" indent="-342900">
-              <a:lnSpc>
-                <a:spcPct val="140000"/>
-              </a:lnSpc>
-              <a:buSzPct val="100000"/>
-              <a:buChar char="•"/>
-            </a:pPr>
-            <a:r>
-              <a:rPr lang="en-US" sz="1100" dirty="0">
-                <a:solidFill>
-                  <a:srgbClr val="1C1E2E"/>
-                </a:solidFill>
-                <a:latin typeface="Calibri" pitchFamily="34" charset="0"/>
-                <a:ea typeface="Calibri" pitchFamily="34" charset="-122"/>
-                <a:cs typeface="Calibri" pitchFamily="34" charset="-120"/>
-              </a:rPr>
-              <a:t>Permanent URL — no laptop required</a:t>
-            </a:r>
-            <a:endParaRPr lang="en-US" sz="1100" dirty="0"/>
-          </a:p>
-          <a:p>
-            <a:pPr indent="0" marL="0">
-              <a:lnSpc>
-                <a:spcPct val="140000"/>
-              </a:lnSpc>
-              <a:buNone/>
-            </a:pPr>
-            <a:endParaRPr lang="en-US" sz="1100" dirty="0"/>
-          </a:p>
-        </p:txBody>
-      </p:sp>
-      <p:sp>
-        <p:nvSpPr>
-          <p:cNvPr id="22" name="Shape 20"/>
-          <p:cNvSpPr/>
-          <p:nvPr/>
-        </p:nvSpPr>
-        <p:spPr>
-          <a:xfrm>
-            <a:off x="274320" y="4617720"/>
-            <a:ext cx="8595360" cy="274320"/>
-          </a:xfrm>
-          <a:prstGeom prst="rect">
-            <a:avLst/>
-          </a:prstGeom>
-          <a:solidFill>
-            <a:srgbClr val="0D1B4B"/>
-          </a:solidFill>
-          <a:ln w="12700">
-            <a:solidFill>
-              <a:srgbClr val="0D1B4B"/>
-            </a:solidFill>
-            <a:prstDash val="solid"/>
-          </a:ln>
-        </p:spPr>
-      </p:sp>
-      <p:sp>
-        <p:nvSpPr>
-          <p:cNvPr id="23" name="Text 21"/>
-          <p:cNvSpPr/>
-          <p:nvPr/>
-        </p:nvSpPr>
-        <p:spPr>
-          <a:xfrm>
-            <a:off x="274320" y="4617720"/>
-            <a:ext cx="8595360" cy="274320"/>
-          </a:xfrm>
-          <a:prstGeom prst="rect">
-            <a:avLst/>
-          </a:prstGeom>
-          <a:noFill/>
-          <a:ln/>
-        </p:spPr>
-        <p:txBody>
-          <a:bodyPr wrap="square" lIns="0" tIns="0" rIns="0" bIns="0" rtlCol="0" anchor="ctr"/>
-          <a:lstStyle/>
-          <a:p>
-            <a:pPr algn="ctr" indent="0" marL="0">
-              <a:buNone/>
-            </a:pPr>
-            <a:r>
-              <a:rPr lang="en-US" sz="1000" dirty="0">
-                <a:solidFill>
-                  <a:srgbClr val="FFFFFF"/>
-                </a:solidFill>
-                <a:latin typeface="Calibri" pitchFamily="34" charset="0"/>
-                <a:ea typeface="Calibri" pitchFamily="34" charset="-122"/>
-                <a:cs typeface="Calibri" pitchFamily="34" charset="-120"/>
-              </a:rPr>
-              <a:t>GitHub:  github.com/girishkurup/ttk-knowledge-agent  —  All source code + session data + SQLite DB committed</a:t>
-            </a:r>
-            <a:endParaRPr lang="en-US" sz="1000" dirty="0"/>
-          </a:p>
-        </p:txBody>
-      </p:sp>
-      <p:sp>
-        <p:nvSpPr>
-          <p:cNvPr id="24" name="Shape 22"/>
-          <p:cNvSpPr/>
-          <p:nvPr/>
-        </p:nvSpPr>
-        <p:spPr>
-          <a:xfrm>
-            <a:off x="0" y="4892040"/>
-            <a:ext cx="9144000" cy="251460"/>
-          </a:xfrm>
-          <a:prstGeom prst="rect">
-            <a:avLst/>
-          </a:prstGeom>
-          <a:solidFill>
-            <a:srgbClr val="E8EAF6"/>
-          </a:solidFill>
-          <a:ln w="12700">
-            <a:solidFill>
-              <a:srgbClr val="E8EAF6"/>
-            </a:solidFill>
-            <a:prstDash val="solid"/>
-          </a:ln>
-        </p:spPr>
-      </p:sp>
-      <p:sp>
-        <p:nvSpPr>
-          <p:cNvPr id="25" name="Text 23"/>
-          <p:cNvSpPr/>
-          <p:nvPr/>
-        </p:nvSpPr>
-        <p:spPr>
-          <a:xfrm>
-            <a:off x="274320" y="4892040"/>
-            <a:ext cx="8595360" cy="251460"/>
-          </a:xfrm>
-          <a:prstGeom prst="rect">
-            <a:avLst/>
-          </a:prstGeom>
-          <a:noFill/>
-          <a:ln/>
-        </p:spPr>
-        <p:txBody>
-          <a:bodyPr wrap="square" lIns="0" tIns="0" rIns="0" bIns="0" rtlCol="0" anchor="ctr"/>
-          <a:lstStyle/>
-          <a:p>
-            <a:pPr indent="0" marL="0">
-              <a:buNone/>
-            </a:pPr>
-            <a:r>
-              <a:rPr lang="en-US" sz="900" dirty="0">
-                <a:solidFill>
-                  <a:srgbClr val="6B7280"/>
                 </a:solidFill>
                 <a:latin typeface="Calibri" pitchFamily="34" charset="0"/>
                 <a:ea typeface="Calibri" pitchFamily="34" charset="-122"/>
